--- a/03-build/pptx/C5_U2_docente.pptx
+++ b/03-build/pptx/C5_U2_docente.pptx
@@ -1856,7 +1856,7 @@
           <a:lstStyle/>
           <a:p>
             <a:r>
-              <a:t>TEACHER · VOCAB familia (reveal). Bouw een árbol genealógico op het bord terwijl je onthult. Wijs op de -o/-a-paren. Zie het boek §1.1 (clusters/árbol). Online: «familia-memoria» + flip cards ES↔NL.</a:t>
+              <a:t>TEACHER · VOCAB familia (reveal). Bouw een árbol genealógico op het bord terwijl je onthult. Wijs op de -o/-a-paren. Zie het boek §1.1 → el árbol genealógico de ROSALÍA (parel) + het ¡Ojo!-kader: primo/prima (kind van tío/tía) vs. sobrino/sobrina (kind van hermano/hermana). Online: «familia-memoria» + flip cards ES↔NL.</a:t>
             </a:r>
           </a:p>
           <a:p/>
@@ -41353,7 +41353,7 @@
                 </a:solidFill>
                 <a:latin typeface="Inter"/>
               </a:rPr>
-              <a:t>~24 spellen + flip cards ES↔NL + klikbare kaart + recorder («shadowing-lucia», «describe-familiar», «mensaje-familia») op de página digital. QR's → juiste anker. Conjugador = aparte tool.</a:t>
+              <a:t>~20 spellen + flip cards ES↔NL + klikbare kaart + recorder («shadowing-lucia», «describe-familiar», «mensaje-familia») op de página digital. QR's → juiste anker. Conjugador = aparte tool.</a:t>
             </a:r>
           </a:p>
         </p:txBody>

--- a/03-build/pptx/C5_U2_docente.pptx
+++ b/03-build/pptx/C5_U2_docente.pptx
@@ -9665,7 +9665,6 @@
               <a:srgbClr val="2563EB"/>
             </a:solidFill>
           </a:ln>
-          <a:effectLst/>
           <a:effectLst>
             <a:outerShdw blurRad="90000" dist="38000" dir="5400000" rotWithShape="0">
               <a:srgbClr val="20242E">
@@ -10035,7 +10034,6 @@
               <a:srgbClr val="14B8A6"/>
             </a:solidFill>
           </a:ln>
-          <a:effectLst/>
           <a:effectLst>
             <a:outerShdw blurRad="90000" dist="38000" dir="5400000" rotWithShape="0">
               <a:srgbClr val="20242E">
@@ -11438,7 +11436,6 @@
           <a:ln>
             <a:noFill/>
           </a:ln>
-          <a:effectLst/>
           <a:effectLst>
             <a:outerShdw blurRad="90000" dist="38000" dir="5400000" rotWithShape="0">
               <a:srgbClr val="20242E">
@@ -11536,7 +11533,6 @@
           <a:ln>
             <a:noFill/>
           </a:ln>
-          <a:effectLst/>
           <a:effectLst>
             <a:outerShdw blurRad="90000" dist="38000" dir="5400000" rotWithShape="0">
               <a:srgbClr val="20242E">
@@ -17252,7 +17248,6 @@
               <a:srgbClr val="1E9E74"/>
             </a:solidFill>
           </a:ln>
-          <a:effectLst/>
           <a:effectLst>
             <a:outerShdw blurRad="90000" dist="38000" dir="5400000" rotWithShape="0">
               <a:srgbClr val="20242E">
@@ -17442,7 +17437,6 @@
               <a:srgbClr val="1E9E74"/>
             </a:solidFill>
           </a:ln>
-          <a:effectLst/>
           <a:effectLst>
             <a:outerShdw blurRad="90000" dist="38000" dir="5400000" rotWithShape="0">
               <a:srgbClr val="20242E">
@@ -17632,7 +17626,6 @@
               <a:srgbClr val="1E9E74"/>
             </a:solidFill>
           </a:ln>
-          <a:effectLst/>
           <a:effectLst>
             <a:outerShdw blurRad="90000" dist="38000" dir="5400000" rotWithShape="0">
               <a:srgbClr val="20242E">
@@ -17822,7 +17815,6 @@
               <a:srgbClr val="1E9E74"/>
             </a:solidFill>
           </a:ln>
-          <a:effectLst/>
           <a:effectLst>
             <a:outerShdw blurRad="90000" dist="38000" dir="5400000" rotWithShape="0">
               <a:srgbClr val="20242E">
@@ -18012,7 +18004,6 @@
               <a:srgbClr val="1E9E74"/>
             </a:solidFill>
           </a:ln>
-          <a:effectLst/>
           <a:effectLst>
             <a:outerShdw blurRad="90000" dist="38000" dir="5400000" rotWithShape="0">
               <a:srgbClr val="20242E">
@@ -18202,7 +18193,6 @@
               <a:srgbClr val="1E9E74"/>
             </a:solidFill>
           </a:ln>
-          <a:effectLst/>
           <a:effectLst>
             <a:outerShdw blurRad="90000" dist="38000" dir="5400000" rotWithShape="0">
               <a:srgbClr val="20242E">
@@ -19723,7 +19713,6 @@
               <a:srgbClr val="1E9E74"/>
             </a:solidFill>
           </a:ln>
-          <a:effectLst/>
           <a:effectLst>
             <a:outerShdw blurRad="90000" dist="38000" dir="5400000" rotWithShape="0">
               <a:srgbClr val="20242E">
@@ -21815,7 +21804,6 @@
               <a:srgbClr val="E4E3DE"/>
             </a:solidFill>
           </a:ln>
-          <a:effectLst/>
           <a:effectLst>
             <a:outerShdw blurRad="90000" dist="38000" dir="5400000" rotWithShape="0">
               <a:srgbClr val="20242E">
@@ -22049,7 +22037,6 @@
               <a:srgbClr val="E4E3DE"/>
             </a:solidFill>
           </a:ln>
-          <a:effectLst/>
           <a:effectLst>
             <a:outerShdw blurRad="90000" dist="38000" dir="5400000" rotWithShape="0">
               <a:srgbClr val="20242E">
@@ -22283,7 +22270,6 @@
               <a:srgbClr val="E4E3DE"/>
             </a:solidFill>
           </a:ln>
-          <a:effectLst/>
           <a:effectLst>
             <a:outerShdw blurRad="90000" dist="38000" dir="5400000" rotWithShape="0">
               <a:srgbClr val="20242E">
@@ -22517,7 +22503,6 @@
               <a:srgbClr val="E4E3DE"/>
             </a:solidFill>
           </a:ln>
-          <a:effectLst/>
           <a:effectLst>
             <a:outerShdw blurRad="90000" dist="38000" dir="5400000" rotWithShape="0">
               <a:srgbClr val="20242E">
@@ -25986,7 +25971,6 @@
               <a:srgbClr val="E4E3DE"/>
             </a:solidFill>
           </a:ln>
-          <a:effectLst/>
           <a:effectLst>
             <a:outerShdw blurRad="90000" dist="38000" dir="5400000" rotWithShape="0">
               <a:srgbClr val="20242E">
@@ -26665,7 +26649,6 @@
               <a:srgbClr val="1E9E74"/>
             </a:solidFill>
           </a:ln>
-          <a:effectLst/>
           <a:effectLst>
             <a:outerShdw blurRad="90000" dist="38000" dir="5400000" rotWithShape="0">
               <a:srgbClr val="20242E">
@@ -30303,7 +30286,6 @@
               <a:srgbClr val="1E9E74"/>
             </a:solidFill>
           </a:ln>
-          <a:effectLst/>
           <a:effectLst>
             <a:outerShdw blurRad="90000" dist="38000" dir="5400000" rotWithShape="0">
               <a:srgbClr val="20242E">
@@ -30606,7 +30588,6 @@
               <a:srgbClr val="1E9E74"/>
             </a:solidFill>
           </a:ln>
-          <a:effectLst/>
           <a:effectLst>
             <a:outerShdw blurRad="90000" dist="38000" dir="5400000" rotWithShape="0">
               <a:srgbClr val="20242E">
@@ -30909,7 +30890,6 @@
               <a:srgbClr val="1E9E74"/>
             </a:solidFill>
           </a:ln>
-          <a:effectLst/>
           <a:effectLst>
             <a:outerShdw blurRad="90000" dist="38000" dir="5400000" rotWithShape="0">
               <a:srgbClr val="20242E">
@@ -31212,7 +31192,6 @@
               <a:srgbClr val="157355"/>
             </a:solidFill>
           </a:ln>
-          <a:effectLst/>
           <a:effectLst>
             <a:outerShdw blurRad="90000" dist="38000" dir="5400000" rotWithShape="0">
               <a:srgbClr val="20242E">
@@ -31515,7 +31494,6 @@
               <a:srgbClr val="1E9E74"/>
             </a:solidFill>
           </a:ln>
-          <a:effectLst/>
           <a:effectLst>
             <a:outerShdw blurRad="90000" dist="38000" dir="5400000" rotWithShape="0">
               <a:srgbClr val="20242E">
@@ -31818,7 +31796,6 @@
               <a:srgbClr val="157355"/>
             </a:solidFill>
           </a:ln>
-          <a:effectLst/>
           <a:effectLst>
             <a:outerShdw blurRad="90000" dist="38000" dir="5400000" rotWithShape="0">
               <a:srgbClr val="20242E">
@@ -32121,7 +32098,6 @@
               <a:srgbClr val="157355"/>
             </a:solidFill>
           </a:ln>
-          <a:effectLst/>
           <a:effectLst>
             <a:outerShdw blurRad="90000" dist="38000" dir="5400000" rotWithShape="0">
               <a:srgbClr val="20242E">
@@ -32424,7 +32400,6 @@
               <a:srgbClr val="B7860B"/>
             </a:solidFill>
           </a:ln>
-          <a:effectLst/>
           <a:effectLst>
             <a:outerShdw blurRad="90000" dist="38000" dir="5400000" rotWithShape="0">
               <a:srgbClr val="20242E">
@@ -33253,7 +33228,6 @@
               <a:srgbClr val="1E9E74"/>
             </a:solidFill>
           </a:ln>
-          <a:effectLst/>
           <a:effectLst>
             <a:outerShdw blurRad="90000" dist="38000" dir="5400000" rotWithShape="0">
               <a:srgbClr val="20242E">
@@ -33487,7 +33461,6 @@
               <a:srgbClr val="1E9E74"/>
             </a:solidFill>
           </a:ln>
-          <a:effectLst/>
           <a:effectLst>
             <a:outerShdw blurRad="90000" dist="38000" dir="5400000" rotWithShape="0">
               <a:srgbClr val="20242E">
@@ -33721,7 +33694,6 @@
               <a:srgbClr val="1E9E74"/>
             </a:solidFill>
           </a:ln>
-          <a:effectLst/>
           <a:effectLst>
             <a:outerShdw blurRad="90000" dist="38000" dir="5400000" rotWithShape="0">
               <a:srgbClr val="20242E">
@@ -39095,7 +39067,6 @@
           <a:ln>
             <a:noFill/>
           </a:ln>
-          <a:effectLst/>
           <a:effectLst>
             <a:outerShdw blurRad="90000" dist="38000" dir="5400000" rotWithShape="0">
               <a:srgbClr val="20242E">
@@ -40808,7 +40779,6 @@
           <a:ln>
             <a:noFill/>
           </a:ln>
-          <a:effectLst/>
           <a:effectLst>
             <a:outerShdw blurRad="90000" dist="38000" dir="5400000" rotWithShape="0">
               <a:srgbClr val="20242E">
@@ -40951,7 +40921,6 @@
           <a:ln>
             <a:noFill/>
           </a:ln>
-          <a:effectLst/>
           <a:effectLst>
             <a:outerShdw blurRad="90000" dist="38000" dir="5400000" rotWithShape="0">
               <a:srgbClr val="20242E">
@@ -41094,7 +41063,6 @@
           <a:ln>
             <a:noFill/>
           </a:ln>
-          <a:effectLst/>
           <a:effectLst>
             <a:outerShdw blurRad="90000" dist="38000" dir="5400000" rotWithShape="0">
               <a:srgbClr val="20242E">
@@ -41237,7 +41205,6 @@
           <a:ln>
             <a:noFill/>
           </a:ln>
-          <a:effectLst/>
           <a:effectLst>
             <a:outerShdw blurRad="90000" dist="38000" dir="5400000" rotWithShape="0">
               <a:srgbClr val="20242E">
@@ -41380,7 +41347,6 @@
           <a:ln>
             <a:noFill/>
           </a:ln>
-          <a:effectLst/>
           <a:effectLst>
             <a:outerShdw blurRad="90000" dist="38000" dir="5400000" rotWithShape="0">
               <a:srgbClr val="20242E">
@@ -44670,7 +44636,6 @@
               <a:srgbClr val="1E9E74"/>
             </a:solidFill>
           </a:ln>
-          <a:effectLst/>
           <a:effectLst>
             <a:outerShdw blurRad="90000" dist="38000" dir="5400000" rotWithShape="0">
               <a:srgbClr val="20242E">
@@ -44815,7 +44780,6 @@
               <a:srgbClr val="1E9E74"/>
             </a:solidFill>
           </a:ln>
-          <a:effectLst/>
           <a:effectLst>
             <a:outerShdw blurRad="90000" dist="38000" dir="5400000" rotWithShape="0">
               <a:srgbClr val="20242E">
@@ -44960,7 +44924,6 @@
               <a:srgbClr val="1E9E74"/>
             </a:solidFill>
           </a:ln>
-          <a:effectLst/>
           <a:effectLst>
             <a:outerShdw blurRad="90000" dist="38000" dir="5400000" rotWithShape="0">
               <a:srgbClr val="20242E">
@@ -45105,7 +45068,6 @@
               <a:srgbClr val="1E9E74"/>
             </a:solidFill>
           </a:ln>
-          <a:effectLst/>
           <a:effectLst>
             <a:outerShdw blurRad="90000" dist="38000" dir="5400000" rotWithShape="0">
               <a:srgbClr val="20242E">
@@ -45250,7 +45212,6 @@
               <a:srgbClr val="1E9E74"/>
             </a:solidFill>
           </a:ln>
-          <a:effectLst/>
           <a:effectLst>
             <a:outerShdw blurRad="90000" dist="38000" dir="5400000" rotWithShape="0">
               <a:srgbClr val="20242E">
@@ -45395,7 +45356,6 @@
               <a:srgbClr val="1E9E74"/>
             </a:solidFill>
           </a:ln>
-          <a:effectLst/>
           <a:effectLst>
             <a:outerShdw blurRad="90000" dist="38000" dir="5400000" rotWithShape="0">
               <a:srgbClr val="20242E">
@@ -49392,7 +49352,6 @@
           <a:ln>
             <a:noFill/>
           </a:ln>
-          <a:effectLst/>
           <a:effectLst>
             <a:outerShdw blurRad="90000" dist="38000" dir="5400000" rotWithShape="0">
               <a:srgbClr val="20242E">
@@ -56876,7 +56835,6 @@
               <a:srgbClr val="1E9E74"/>
             </a:solidFill>
           </a:ln>
-          <a:effectLst/>
           <a:effectLst>
             <a:outerShdw blurRad="90000" dist="38000" dir="5400000" rotWithShape="0">
               <a:srgbClr val="20242E">
@@ -57021,7 +56979,6 @@
               <a:srgbClr val="1E9E74"/>
             </a:solidFill>
           </a:ln>
-          <a:effectLst/>
           <a:effectLst>
             <a:outerShdw blurRad="90000" dist="38000" dir="5400000" rotWithShape="0">
               <a:srgbClr val="20242E">
@@ -57166,7 +57123,6 @@
               <a:srgbClr val="1E9E74"/>
             </a:solidFill>
           </a:ln>
-          <a:effectLst/>
           <a:effectLst>
             <a:outerShdw blurRad="90000" dist="38000" dir="5400000" rotWithShape="0">
               <a:srgbClr val="20242E">
@@ -57311,7 +57267,6 @@
               <a:srgbClr val="1E9E74"/>
             </a:solidFill>
           </a:ln>
-          <a:effectLst/>
           <a:effectLst>
             <a:outerShdw blurRad="90000" dist="38000" dir="5400000" rotWithShape="0">
               <a:srgbClr val="20242E">

--- a/03-build/pptx/C5_U2_docente.pptx
+++ b/03-build/pptx/C5_U2_docente.pptx
@@ -13,6 +13,9 @@
     <p:sldId id="261" r:id="rId13"/>
     <p:sldId id="262" r:id="rId14"/>
     <p:sldId id="263" r:id="rId15"/>
+    <p:sldId id="280" r:id="rId32"/>
+    <p:sldId id="281" r:id="rId33"/>
+    <p:sldId id="282" r:id="rId34"/>
     <p:sldId id="264" r:id="rId16"/>
     <p:sldId id="265" r:id="rId17"/>
     <p:sldId id="266" r:id="rId18"/>
@@ -1802,6 +1805,255 @@
           </p:nvPr>
         </p:nvSpPr>
         <p:spPr/>
+      </p:sp>
+    </p:spTree>
+  </p:cSld>
+  <p:clrMapOvr>
+    <a:masterClrMapping/>
+  </p:clrMapOvr>
+</p:notes>
+</file>
+
+<file path=ppt/notesSlides/notesSlide25.xml><?xml version="1.0" encoding="utf-8"?>
+<p:notes xmlns:a="http://schemas.openxmlformats.org/drawingml/2006/main" xmlns:p="http://schemas.openxmlformats.org/presentationml/2006/main" xmlns:r="http://schemas.openxmlformats.org/officeDocument/2006/relationships">
+  <p:cSld>
+    <p:spTree>
+      <p:nvGrpSpPr>
+        <p:cNvPr id="1" name=""/>
+        <p:cNvGrpSpPr/>
+        <p:nvPr/>
+      </p:nvGrpSpPr>
+      <p:grpSpPr>
+        <a:xfrm>
+          <a:off x="0" y="0"/>
+          <a:ext cx="0" cy="0"/>
+          <a:chOff x="0" y="0"/>
+          <a:chExt cx="0" cy="0"/>
+        </a:xfrm>
+      </p:grpSpPr>
+      <p:sp>
+        <p:nvSpPr>
+          <p:cNvPr id="2" name="Slide Image Placeholder 1"/>
+          <p:cNvSpPr>
+            <a:spLocks noGrp="1"/>
+          </p:cNvSpPr>
+          <p:nvPr>
+            <p:ph type="sldImg" idx="2"/>
+          </p:nvPr>
+        </p:nvSpPr>
+        <p:spPr/>
+      </p:sp>
+      <p:sp>
+        <p:nvSpPr>
+          <p:cNvPr id="3" name="Notes Placeholder 2"/>
+          <p:cNvSpPr>
+            <a:spLocks noGrp="1"/>
+          </p:cNvSpPr>
+          <p:nvPr>
+            <p:ph type="body" idx="3" sz="quarter"/>
+          </p:nvPr>
+        </p:nvSpPr>
+        <p:spPr/>
+        <p:txBody>
+          <a:bodyPr/>
+          <a:lstStyle/>
+          <a:p>
+            <a:r>
+              <a:t>RETO 2 · La familia de la telenovela — 🎭 simulatie met beperking</a:t>
+            </a:r>
+          </a:p>
+          <a:p>
+            <a:r>
+              <a:t>OPDRACHT: Samen verzinnen jullie de familie. Elk personage wordt met een bezittelijk voornaamwoord aan een ander gekoppeld.</a:t>
+            </a:r>
+          </a:p>
+          <a:p>
+            <a:r>
+              <a:t>DE REGEL: Elk nieuw personage moet met minstens twee bezittelijke voornaamwoorden aan de bestaande familie hangen. Een personage dat aan niemand hangt, komt er niet in.</a:t>
+            </a:r>
+          </a:p>
+          <a:p>
+            <a:r>
+              <a:t>VERLOOP: Empezamos con Rosalía, la abuela. Todo cuelga de ella. | Cada alumno/a añade un personaje y lo conecta. | El/la profe dibuja el árbol en la pizarra mientras tanto. | Al final: una frase de escándalo con «su» o «sus».</a:t>
+            </a:r>
+          </a:p>
+          <a:p>
+            <a:r>
+              <a:t>SLEUTEL: De regel te bewaken: «su» hoort bij het bezeten ding, niet bij de bezitter — «sus hijos» is meervoud omdat er meer kinderen zijn, niet omdat er meer ouders zijn.  ||  «Nuestro/-a» beweegt wél mee in geslacht: nuestra abuela, nuestro abuelo.  ||  Laat de stamboom op het bord staan: bij de eindtaak «Álbum de familia» is hij het model.</a:t>
+            </a:r>
+          </a:p>
+          <a:p>
+            <a:r>
+              <a:t>NOTA: Werkt het best als de leerkracht meetekent. Zonder zichtbare stamboom verliest de klas na zes personages het overzicht.</a:t>
+            </a:r>
+          </a:p>
+        </p:txBody>
+      </p:sp>
+    </p:spTree>
+  </p:cSld>
+  <p:clrMapOvr>
+    <a:masterClrMapping/>
+  </p:clrMapOvr>
+</p:notes>
+</file>
+
+<file path=ppt/notesSlides/notesSlide26.xml><?xml version="1.0" encoding="utf-8"?>
+<p:notes xmlns:a="http://schemas.openxmlformats.org/drawingml/2006/main" xmlns:p="http://schemas.openxmlformats.org/presentationml/2006/main" xmlns:r="http://schemas.openxmlformats.org/officeDocument/2006/relationships">
+  <p:cSld>
+    <p:spTree>
+      <p:nvGrpSpPr>
+        <p:cNvPr id="1" name=""/>
+        <p:cNvGrpSpPr/>
+        <p:nvPr/>
+      </p:nvGrpSpPr>
+      <p:grpSpPr>
+        <a:xfrm>
+          <a:off x="0" y="0"/>
+          <a:ext cx="0" cy="0"/>
+          <a:chOff x="0" y="0"/>
+          <a:chExt cx="0" cy="0"/>
+        </a:xfrm>
+      </p:grpSpPr>
+      <p:sp>
+        <p:nvSpPr>
+          <p:cNvPr id="2" name="Slide Image Placeholder 1"/>
+          <p:cNvSpPr>
+            <a:spLocks noGrp="1"/>
+          </p:cNvSpPr>
+          <p:nvPr>
+            <p:ph type="sldImg" idx="2"/>
+          </p:nvPr>
+        </p:nvSpPr>
+        <p:spPr/>
+      </p:sp>
+      <p:sp>
+        <p:nvSpPr>
+          <p:cNvPr id="3" name="Notes Placeholder 2"/>
+          <p:cNvSpPr>
+            <a:spLocks noGrp="1"/>
+          </p:cNvSpPr>
+          <p:nvPr>
+            <p:ph type="body" idx="3" sz="quarter"/>
+          </p:nvPr>
+        </p:nvSpPr>
+        <p:spPr/>
+        <p:txBody>
+          <a:bodyPr/>
+          <a:lstStyle/>
+          <a:p>
+            <a:r>
+              <a:t>RETO 3 · Herencia con condiciones — ⚖️ onderhandeling &amp; dilemma</a:t>
+            </a:r>
+          </a:p>
+          <a:p>
+            <a:r>
+              <a:t>OPDRACHT: Beslis wie wat krijgt. Elke beslissing verdedig je alleen met een familierelatie.</a:t>
+            </a:r>
+          </a:p>
+          <a:p>
+            <a:r>
+              <a:t>DE REGEL: Alleen familieargumenten tellen. «Ik wil het» of «het past bij mij» is geen argument; «es de su hermana, no de la mía» wel.</a:t>
+            </a:r>
+          </a:p>
+          <a:p>
+            <a:r>
+              <a:t>VERLOOP: Leed la nota de la tía. No decide nada. | Cada uno elige un objeto y prepara su argumento. | Negociad. Solo argumentos de parentesco. | ¿No hay acuerdo? El objeto va al museo del pueblo.</a:t>
+            </a:r>
+          </a:p>
+          <a:p>
+            <a:r>
+              <a:t>SLEUTEL: Er is geen juiste verdeling. Beoordeel of élke toewijzing met een familierelatie verdedigd is en of de bezittelijke voornaamwoorden kloppen.  ||  De ring is de scherpste casus: «de madre a hija» sluit de zonen uit — laat de klas dat zelf ontdekken en betwisten.  ||  De kat is bewust de minst begeerde: daar hoor je «no lo quiero» en dus de ontkenning met pronomen.</a:t>
+            </a:r>
+          </a:p>
+          <a:p>
+            <a:r>
+              <a:t>NOTA: Zet een klok van acht minuten. Zonder tijdsdruk blijft de klas bij het eerste voorwerp hangen.</a:t>
+            </a:r>
+          </a:p>
+        </p:txBody>
+      </p:sp>
+    </p:spTree>
+  </p:cSld>
+  <p:clrMapOvr>
+    <a:masterClrMapping/>
+  </p:clrMapOvr>
+</p:notes>
+</file>
+
+<file path=ppt/notesSlides/notesSlide27.xml><?xml version="1.0" encoding="utf-8"?>
+<p:notes xmlns:a="http://schemas.openxmlformats.org/drawingml/2006/main" xmlns:p="http://schemas.openxmlformats.org/presentationml/2006/main" xmlns:r="http://schemas.openxmlformats.org/officeDocument/2006/relationships">
+  <p:cSld>
+    <p:spTree>
+      <p:nvGrpSpPr>
+        <p:cNvPr id="1" name=""/>
+        <p:cNvGrpSpPr/>
+        <p:nvPr/>
+      </p:nvGrpSpPr>
+      <p:grpSpPr>
+        <a:xfrm>
+          <a:off x="0" y="0"/>
+          <a:ext cx="0" cy="0"/>
+          <a:chOff x="0" y="0"/>
+          <a:chExt cx="0" cy="0"/>
+        </a:xfrm>
+      </p:grpSpPr>
+      <p:sp>
+        <p:nvSpPr>
+          <p:cNvPr id="2" name="Slide Image Placeholder 1"/>
+          <p:cNvSpPr>
+            <a:spLocks noGrp="1"/>
+          </p:cNvSpPr>
+          <p:nvPr>
+            <p:ph type="sldImg" idx="2"/>
+          </p:nvPr>
+        </p:nvSpPr>
+        <p:spPr/>
+      </p:sp>
+      <p:sp>
+        <p:nvSpPr>
+          <p:cNvPr id="3" name="Notes Placeholder 2"/>
+          <p:cNvSpPr>
+            <a:spLocks noGrp="1"/>
+          </p:cNvSpPr>
+          <p:nvPr>
+            <p:ph type="body" idx="3" sz="quarter"/>
+          </p:nvPr>
+        </p:nvSpPr>
+        <p:spPr/>
+        <p:txBody>
+          <a:bodyPr/>
+          <a:lstStyle/>
+          <a:p>
+            <a:r>
+              <a:t>RETO 8 · La foto sin pie — 🕵️ forensisch</a:t>
+            </a:r>
+          </a:p>
+          <a:p>
+            <a:r>
+              <a:t>OPDRACHT: Kies het juiste onderschrift en zeg welk woord het verraadt. Bijna altijd is dat «ser» of «estar».</a:t>
+            </a:r>
+          </a:p>
+          <a:p>
+            <a:r>
+              <a:t>DE REGEL: Je moet het verraderlijke wóórd aanwijzen, niet het onderschrift. Wie het juiste kiest maar het woord niet vindt, heeft geraden.</a:t>
+            </a:r>
+          </a:p>
+          <a:p>
+            <a:r>
+              <a:t>VERLOOP: Mira la escena. ¿Qué ves exactamente? | Lee los tres pies. Dos chocan con la foto. | Señala la palabra que decide.</a:t>
+            </a:r>
+          </a:p>
+          <a:p>
+            <a:r>
+              <a:t>SLEUTEL: Casus 1: het eerste. Beslissend woord: «está» (gevoel van dit moment).  ||  Casus 2: het eerste. Beslissend woord: «es cocinero» (beroep gaat met ser).  ||  Casus 3: het tweede. Beslissend woord: «lleva» — een bril draag je, die ben of sta je niet.  ||  Casus 3 is de moeilijkste omdat geen van de drie fout is op ser/estar alleen: je moet zien dat het werkwoord zelf verkeerd gekozen is.</a:t>
+            </a:r>
+          </a:p>
+          <a:p>
+            <a:r>
+              <a:t>NOTA: De scènes worden op de dia beschreven, niet getoond: de leerling moet ze zich voorstellen en dan pas de zinnen toetsen. Dat maakt het een taaloefening en geen zoekplaatje.</a:t>
+            </a:r>
+          </a:p>
+        </p:txBody>
       </p:sp>
     </p:spTree>
   </p:cSld>
@@ -41660,6 +41912,5694 @@
   <p:clrMapOvr>
     <a:masterClrMapping/>
   </p:clrMapOvr>
+</p:sld>
+</file>
+
+<file path=ppt/slides/slide25.xml><?xml version="1.0" encoding="utf-8"?>
+<p:sld xmlns:a="http://schemas.openxmlformats.org/drawingml/2006/main" xmlns:p="http://schemas.openxmlformats.org/presentationml/2006/main" xmlns:r="http://schemas.openxmlformats.org/officeDocument/2006/relationships">
+  <p:cSld>
+    <p:spTree>
+      <p:nvGrpSpPr>
+        <p:cNvPr id="1" name=""/>
+        <p:cNvGrpSpPr/>
+        <p:nvPr/>
+      </p:nvGrpSpPr>
+      <p:grpSpPr/>
+      <p:sp>
+        <p:nvSpPr>
+          <p:cNvPr id="2" name="Fondo"/>
+          <p:cNvSpPr/>
+          <p:nvPr/>
+        </p:nvSpPr>
+        <p:spPr>
+          <a:xfrm>
+            <a:off x="0" y="0"/>
+            <a:ext cx="12191695" cy="6858000"/>
+          </a:xfrm>
+          <a:prstGeom prst="rect">
+            <a:avLst/>
+          </a:prstGeom>
+          <a:solidFill>
+            <a:srgbClr val="FCFBF8"/>
+          </a:solidFill>
+          <a:ln>
+            <a:noFill/>
+          </a:ln>
+          <a:effectLst/>
+        </p:spPr>
+        <p:style>
+          <a:lnRef idx="1">
+            <a:schemeClr val="accent1"/>
+          </a:lnRef>
+          <a:fillRef idx="3">
+            <a:schemeClr val="accent1"/>
+          </a:fillRef>
+          <a:effectRef idx="2">
+            <a:schemeClr val="accent1"/>
+          </a:effectRef>
+          <a:fontRef idx="minor">
+            <a:schemeClr val="lt1"/>
+          </a:fontRef>
+        </p:style>
+        <p:txBody>
+          <a:bodyPr rtlCol="0" anchor="ctr"/>
+          <a:lstStyle/>
+          <a:p/>
+        </p:txBody>
+      </p:sp>
+      <p:sp>
+        <p:nvSpPr>
+          <p:cNvPr id="3" name="Cabecera"/>
+          <p:cNvSpPr/>
+          <p:nvPr/>
+        </p:nvSpPr>
+        <p:spPr>
+          <a:xfrm>
+            <a:off x="0" y="0"/>
+            <a:ext cx="12191695" cy="1078992"/>
+          </a:xfrm>
+          <a:prstGeom prst="rect">
+            <a:avLst/>
+          </a:prstGeom>
+          <a:solidFill>
+            <a:srgbClr val="1E9E74"/>
+          </a:solidFill>
+          <a:ln>
+            <a:noFill/>
+          </a:ln>
+          <a:effectLst/>
+        </p:spPr>
+        <p:style>
+          <a:lnRef idx="1">
+            <a:schemeClr val="accent1"/>
+          </a:lnRef>
+          <a:fillRef idx="3">
+            <a:schemeClr val="accent1"/>
+          </a:fillRef>
+          <a:effectRef idx="2">
+            <a:schemeClr val="accent1"/>
+          </a:effectRef>
+          <a:fontRef idx="minor">
+            <a:schemeClr val="lt1"/>
+          </a:fontRef>
+        </p:style>
+        <p:txBody>
+          <a:bodyPr rtlCol="0" anchor="ctr"/>
+          <a:lstStyle/>
+          <a:p/>
+        </p:txBody>
+      </p:sp>
+      <p:sp>
+        <p:nvSpPr>
+          <p:cNvPr id="4" name="Chip"/>
+          <p:cNvSpPr/>
+          <p:nvPr/>
+        </p:nvSpPr>
+        <p:spPr>
+          <a:xfrm>
+            <a:off x="457200" y="182880"/>
+            <a:ext cx="3017520" cy="292608"/>
+          </a:xfrm>
+          <a:prstGeom prst="roundRect">
+            <a:avLst>
+              <a:gd name="adj" fmla="val 50000"/>
+            </a:avLst>
+          </a:prstGeom>
+          <a:solidFill>
+            <a:srgbClr val="FFFFFF"/>
+          </a:solidFill>
+          <a:ln>
+            <a:noFill/>
+          </a:ln>
+          <a:effectLst/>
+        </p:spPr>
+        <p:style>
+          <a:lnRef idx="1">
+            <a:schemeClr val="accent1"/>
+          </a:lnRef>
+          <a:fillRef idx="3">
+            <a:schemeClr val="accent1"/>
+          </a:fillRef>
+          <a:effectRef idx="2">
+            <a:schemeClr val="accent1"/>
+          </a:effectRef>
+          <a:fontRef idx="minor">
+            <a:schemeClr val="lt1"/>
+          </a:fontRef>
+        </p:style>
+        <p:txBody>
+          <a:bodyPr rtlCol="0" anchor="ctr"/>
+          <a:lstStyle/>
+          <a:p/>
+        </p:txBody>
+      </p:sp>
+      <p:sp>
+        <p:nvSpPr>
+          <p:cNvPr id="5" name="ChipTxt"/>
+          <p:cNvSpPr txBox="1"/>
+          <p:nvPr/>
+        </p:nvSpPr>
+        <p:spPr>
+          <a:xfrm>
+            <a:off x="457200" y="173736"/>
+            <a:ext cx="3017520" cy="310896"/>
+          </a:xfrm>
+          <a:prstGeom prst="rect">
+            <a:avLst/>
+          </a:prstGeom>
+          <a:noFill/>
+        </p:spPr>
+        <p:txBody>
+          <a:bodyPr wrap="square" anchor="ctr" lIns="45720" rIns="45720" tIns="27432" bIns="27432">
+            <a:normAutofit/>
+          </a:bodyPr>
+          <a:lstStyle/>
+          <a:p>
+            <a:pPr algn="ctr"/>
+            <a:r>
+              <a:rPr sz="950" b="1">
+                <a:solidFill>
+                  <a:srgbClr val="157355"/>
+                </a:solidFill>
+                <a:latin typeface="Inter"/>
+              </a:rPr>
+              <a:t>RETO 2 · SIMULATIE MET BEPERKING</a:t>
+            </a:r>
+          </a:p>
+        </p:txBody>
+      </p:sp>
+      <p:sp>
+        <p:nvSpPr>
+          <p:cNvPr id="6" name="Titulo"/>
+          <p:cNvSpPr txBox="1"/>
+          <p:nvPr/>
+        </p:nvSpPr>
+        <p:spPr>
+          <a:xfrm>
+            <a:off x="457200" y="502920"/>
+            <a:ext cx="8412480" cy="475488"/>
+          </a:xfrm>
+          <a:prstGeom prst="rect">
+            <a:avLst/>
+          </a:prstGeom>
+          <a:noFill/>
+        </p:spPr>
+        <p:txBody>
+          <a:bodyPr wrap="square" anchor="t" lIns="45720" rIns="45720" tIns="27432" bIns="27432">
+            <a:normAutofit/>
+          </a:bodyPr>
+          <a:lstStyle/>
+          <a:p>
+            <a:pPr algn="l"/>
+            <a:r>
+              <a:rPr sz="2700" b="1">
+                <a:solidFill>
+                  <a:srgbClr val="FFFFFF"/>
+                </a:solidFill>
+                <a:latin typeface="Bricolage Grotesque"/>
+              </a:rPr>
+              <a:t>La familia de la telenovela</a:t>
+            </a:r>
+          </a:p>
+        </p:txBody>
+      </p:sp>
+      <p:sp>
+        <p:nvSpPr>
+          <p:cNvPr id="7" name="Badges"/>
+          <p:cNvSpPr txBox="1"/>
+          <p:nvPr/>
+        </p:nvSpPr>
+        <p:spPr>
+          <a:xfrm>
+            <a:off x="9052560" y="256032"/>
+            <a:ext cx="2651760" cy="640080"/>
+          </a:xfrm>
+          <a:prstGeom prst="rect">
+            <a:avLst/>
+          </a:prstGeom>
+          <a:noFill/>
+        </p:spPr>
+        <p:txBody>
+          <a:bodyPr wrap="square" anchor="t" lIns="45720" rIns="45720" tIns="27432" bIns="27432">
+            <a:normAutofit/>
+          </a:bodyPr>
+          <a:lstStyle/>
+          <a:p>
+            <a:pPr algn="r"/>
+            <a:r>
+              <a:rPr sz="1000">
+                <a:solidFill>
+                  <a:srgbClr val="E4F4EE"/>
+                </a:solidFill>
+                <a:latin typeface="Inter"/>
+              </a:rPr>
+              <a:t>🏫 Toda la clase</a:t>
+            </a:r>
+          </a:p>
+          <a:p>
+            <a:pPr algn="r"/>
+            <a:r>
+              <a:rPr sz="1000">
+                <a:solidFill>
+                  <a:srgbClr val="E4F4EE"/>
+                </a:solidFill>
+                <a:latin typeface="Inter"/>
+              </a:rPr>
+              <a:t>± 15 min · ★★★</a:t>
+            </a:r>
+          </a:p>
+        </p:txBody>
+      </p:sp>
+      <p:sp>
+        <p:nvSpPr>
+          <p:cNvPr id="8" name="Gancho"/>
+          <p:cNvSpPr txBox="1"/>
+          <p:nvPr/>
+        </p:nvSpPr>
+        <p:spPr>
+          <a:xfrm>
+            <a:off x="457200" y="1225296"/>
+            <a:ext cx="11274552" cy="566928"/>
+          </a:xfrm>
+          <a:prstGeom prst="rect">
+            <a:avLst/>
+          </a:prstGeom>
+          <a:noFill/>
+        </p:spPr>
+        <p:txBody>
+          <a:bodyPr wrap="square" anchor="t" lIns="45720" rIns="45720" tIns="27432" bIns="27432">
+            <a:normAutofit/>
+          </a:bodyPr>
+          <a:lstStyle/>
+          <a:p>
+            <a:pPr algn="l"/>
+            <a:r>
+              <a:rPr sz="1600" b="1">
+                <a:solidFill>
+                  <a:srgbClr val="157355"/>
+                </a:solidFill>
+                <a:latin typeface="Bricolage Grotesque"/>
+              </a:rPr>
+              <a:t>La clase escribe una telenovela. Pero primero hay que saber quién es de quién.</a:t>
+            </a:r>
+          </a:p>
+          <a:p>
+            <a:pPr algn="l"/>
+            <a:r>
+              <a:rPr sz="1100" i="1">
+                <a:solidFill>
+                  <a:srgbClr val="6A6E78"/>
+                </a:solidFill>
+                <a:latin typeface="Inter"/>
+              </a:rPr>
+              <a:t>De klas schrijft een telenovela. Maar eerst moet je weten wie van wie is.</a:t>
+            </a:r>
+          </a:p>
+        </p:txBody>
+      </p:sp>
+      <p:sp>
+        <p:nvSpPr>
+          <p:cNvPr id="9" name="ReglaCaja"/>
+          <p:cNvSpPr/>
+          <p:nvPr/>
+        </p:nvSpPr>
+        <p:spPr>
+          <a:xfrm>
+            <a:off x="457200" y="1847088"/>
+            <a:ext cx="11274552" cy="658368"/>
+          </a:xfrm>
+          <a:prstGeom prst="roundRect">
+            <a:avLst>
+              <a:gd name="adj" fmla="val 5000"/>
+            </a:avLst>
+          </a:prstGeom>
+          <a:solidFill>
+            <a:srgbClr val="FBF3D6"/>
+          </a:solidFill>
+          <a:ln>
+            <a:noFill/>
+          </a:ln>
+          <a:effectLst/>
+        </p:spPr>
+        <p:style>
+          <a:lnRef idx="1">
+            <a:schemeClr val="accent1"/>
+          </a:lnRef>
+          <a:fillRef idx="3">
+            <a:schemeClr val="accent1"/>
+          </a:fillRef>
+          <a:effectRef idx="2">
+            <a:schemeClr val="accent1"/>
+          </a:effectRef>
+          <a:fontRef idx="minor">
+            <a:schemeClr val="lt1"/>
+          </a:fontRef>
+        </p:style>
+        <p:txBody>
+          <a:bodyPr rtlCol="0" anchor="ctr"/>
+          <a:lstStyle/>
+          <a:p/>
+        </p:txBody>
+      </p:sp>
+      <p:sp>
+        <p:nvSpPr>
+          <p:cNvPr id="10" name="ReglaTxt"/>
+          <p:cNvSpPr txBox="1"/>
+          <p:nvPr/>
+        </p:nvSpPr>
+        <p:spPr>
+          <a:xfrm>
+            <a:off x="603504" y="1883664"/>
+            <a:ext cx="10972800" cy="585216"/>
+          </a:xfrm>
+          <a:prstGeom prst="rect">
+            <a:avLst/>
+          </a:prstGeom>
+          <a:noFill/>
+        </p:spPr>
+        <p:txBody>
+          <a:bodyPr wrap="square" anchor="t" lIns="45720" rIns="45720" tIns="27432" bIns="27432">
+            <a:normAutofit/>
+          </a:bodyPr>
+          <a:lstStyle/>
+          <a:p>
+            <a:pPr algn="l"/>
+            <a:r>
+              <a:rPr sz="850" b="1">
+                <a:solidFill>
+                  <a:srgbClr val="B7860B"/>
+                </a:solidFill>
+                <a:latin typeface="Inter"/>
+              </a:rPr>
+              <a:t>LA REGLA DEL RETO</a:t>
+            </a:r>
+          </a:p>
+          <a:p>
+            <a:pPr algn="l"/>
+            <a:r>
+              <a:rPr sz="1100">
+                <a:solidFill>
+                  <a:srgbClr val="20242E"/>
+                </a:solidFill>
+                <a:latin typeface="Inter"/>
+              </a:rPr>
+              <a:t>Elk nieuw personage moet met minstens twee bezittelijke voornaamwoorden aan de bestaande familie hangen. Een personage dat aan niemand hangt, komt er niet in.</a:t>
+            </a:r>
+          </a:p>
+        </p:txBody>
+      </p:sp>
+      <p:sp>
+        <p:nvSpPr>
+          <p:cNvPr id="11" name="Tarjeta 0"/>
+          <p:cNvSpPr/>
+          <p:nvPr/>
+        </p:nvSpPr>
+        <p:spPr>
+          <a:xfrm>
+            <a:off x="457200" y="2670048"/>
+            <a:ext cx="2708910" cy="1170432"/>
+          </a:xfrm>
+          <a:prstGeom prst="roundRect">
+            <a:avLst>
+              <a:gd name="adj" fmla="val 6000"/>
+            </a:avLst>
+          </a:prstGeom>
+          <a:solidFill>
+            <a:srgbClr val="FFFFFF"/>
+          </a:solidFill>
+          <a:ln w="12700">
+            <a:solidFill>
+              <a:srgbClr val="E4E3DE"/>
+            </a:solidFill>
+          </a:ln>
+          <a:effectLst/>
+        </p:spPr>
+        <p:style>
+          <a:lnRef idx="1">
+            <a:schemeClr val="accent1"/>
+          </a:lnRef>
+          <a:fillRef idx="3">
+            <a:schemeClr val="accent1"/>
+          </a:fillRef>
+          <a:effectRef idx="2">
+            <a:schemeClr val="accent1"/>
+          </a:effectRef>
+          <a:fontRef idx="minor">
+            <a:schemeClr val="lt1"/>
+          </a:fontRef>
+        </p:style>
+        <p:txBody>
+          <a:bodyPr rtlCol="0" anchor="ctr"/>
+          <a:lstStyle/>
+          <a:p/>
+        </p:txBody>
+      </p:sp>
+      <p:sp>
+        <p:nvSpPr>
+          <p:cNvPr id="12" name="TarjetaTxt 0"/>
+          <p:cNvSpPr txBox="1"/>
+          <p:nvPr/>
+        </p:nvSpPr>
+        <p:spPr>
+          <a:xfrm>
+            <a:off x="548640" y="2724912"/>
+            <a:ext cx="2526030" cy="1060704"/>
+          </a:xfrm>
+          <a:prstGeom prst="rect">
+            <a:avLst/>
+          </a:prstGeom>
+          <a:noFill/>
+        </p:spPr>
+        <p:txBody>
+          <a:bodyPr wrap="square" anchor="t" lIns="45720" rIns="45720" tIns="27432" bIns="27432">
+            <a:normAutofit/>
+          </a:bodyPr>
+          <a:lstStyle/>
+          <a:p>
+            <a:pPr algn="l"/>
+            <a:r>
+              <a:rPr sz="1100" b="1">
+                <a:solidFill>
+                  <a:srgbClr val="157355"/>
+                </a:solidFill>
+                <a:latin typeface="Bricolage Grotesque"/>
+              </a:rPr>
+              <a:t>Rosalía</a:t>
+            </a:r>
+          </a:p>
+          <a:p>
+            <a:pPr algn="l"/>
+            <a:r>
+              <a:rPr sz="1000">
+                <a:solidFill>
+                  <a:srgbClr val="20242E"/>
+                </a:solidFill>
+                <a:latin typeface="Inter"/>
+              </a:rPr>
+              <a:t>la abuela · 78 años · vive en Triana</a:t>
+            </a:r>
+          </a:p>
+        </p:txBody>
+      </p:sp>
+      <p:sp>
+        <p:nvSpPr>
+          <p:cNvPr id="13" name="Tarjeta 1"/>
+          <p:cNvSpPr/>
+          <p:nvPr/>
+        </p:nvSpPr>
+        <p:spPr>
+          <a:xfrm>
+            <a:off x="3312414" y="2670048"/>
+            <a:ext cx="2708910" cy="1170432"/>
+          </a:xfrm>
+          <a:prstGeom prst="roundRect">
+            <a:avLst>
+              <a:gd name="adj" fmla="val 6000"/>
+            </a:avLst>
+          </a:prstGeom>
+          <a:solidFill>
+            <a:srgbClr val="FFFFFF"/>
+          </a:solidFill>
+          <a:ln w="12700">
+            <a:solidFill>
+              <a:srgbClr val="E4E3DE"/>
+            </a:solidFill>
+          </a:ln>
+          <a:effectLst/>
+        </p:spPr>
+        <p:style>
+          <a:lnRef idx="1">
+            <a:schemeClr val="accent1"/>
+          </a:lnRef>
+          <a:fillRef idx="3">
+            <a:schemeClr val="accent1"/>
+          </a:fillRef>
+          <a:effectRef idx="2">
+            <a:schemeClr val="accent1"/>
+          </a:effectRef>
+          <a:fontRef idx="minor">
+            <a:schemeClr val="lt1"/>
+          </a:fontRef>
+        </p:style>
+        <p:txBody>
+          <a:bodyPr rtlCol="0" anchor="ctr"/>
+          <a:lstStyle/>
+          <a:p/>
+        </p:txBody>
+      </p:sp>
+      <p:sp>
+        <p:nvSpPr>
+          <p:cNvPr id="14" name="TarjetaTxt 1"/>
+          <p:cNvSpPr txBox="1"/>
+          <p:nvPr/>
+        </p:nvSpPr>
+        <p:spPr>
+          <a:xfrm>
+            <a:off x="3403854" y="2724912"/>
+            <a:ext cx="2526030" cy="1060704"/>
+          </a:xfrm>
+          <a:prstGeom prst="rect">
+            <a:avLst/>
+          </a:prstGeom>
+          <a:noFill/>
+        </p:spPr>
+        <p:txBody>
+          <a:bodyPr wrap="square" anchor="t" lIns="45720" rIns="45720" tIns="27432" bIns="27432">
+            <a:normAutofit/>
+          </a:bodyPr>
+          <a:lstStyle/>
+          <a:p>
+            <a:pPr algn="l"/>
+            <a:r>
+              <a:rPr sz="1100" b="1">
+                <a:solidFill>
+                  <a:srgbClr val="157355"/>
+                </a:solidFill>
+                <a:latin typeface="Bricolage Grotesque"/>
+              </a:rPr>
+              <a:t>Curro</a:t>
+            </a:r>
+          </a:p>
+          <a:p>
+            <a:pPr algn="l"/>
+            <a:r>
+              <a:rPr sz="1000">
+                <a:solidFill>
+                  <a:srgbClr val="20242E"/>
+                </a:solidFill>
+                <a:latin typeface="Inter"/>
+              </a:rPr>
+              <a:t>su marido · toca la guitarra</a:t>
+            </a:r>
+          </a:p>
+        </p:txBody>
+      </p:sp>
+      <p:sp>
+        <p:nvSpPr>
+          <p:cNvPr id="15" name="Tarjeta 2"/>
+          <p:cNvSpPr/>
+          <p:nvPr/>
+        </p:nvSpPr>
+        <p:spPr>
+          <a:xfrm>
+            <a:off x="6167628" y="2670048"/>
+            <a:ext cx="2708910" cy="1170432"/>
+          </a:xfrm>
+          <a:prstGeom prst="roundRect">
+            <a:avLst>
+              <a:gd name="adj" fmla="val 6000"/>
+            </a:avLst>
+          </a:prstGeom>
+          <a:solidFill>
+            <a:srgbClr val="FFFFFF"/>
+          </a:solidFill>
+          <a:ln w="12700">
+            <a:solidFill>
+              <a:srgbClr val="E4E3DE"/>
+            </a:solidFill>
+          </a:ln>
+          <a:effectLst/>
+        </p:spPr>
+        <p:style>
+          <a:lnRef idx="1">
+            <a:schemeClr val="accent1"/>
+          </a:lnRef>
+          <a:fillRef idx="3">
+            <a:schemeClr val="accent1"/>
+          </a:fillRef>
+          <a:effectRef idx="2">
+            <a:schemeClr val="accent1"/>
+          </a:effectRef>
+          <a:fontRef idx="minor">
+            <a:schemeClr val="lt1"/>
+          </a:fontRef>
+        </p:style>
+        <p:txBody>
+          <a:bodyPr rtlCol="0" anchor="ctr"/>
+          <a:lstStyle/>
+          <a:p/>
+        </p:txBody>
+      </p:sp>
+      <p:sp>
+        <p:nvSpPr>
+          <p:cNvPr id="16" name="TarjetaTxt 2"/>
+          <p:cNvSpPr txBox="1"/>
+          <p:nvPr/>
+        </p:nvSpPr>
+        <p:spPr>
+          <a:xfrm>
+            <a:off x="6259068" y="2724912"/>
+            <a:ext cx="2526030" cy="1060704"/>
+          </a:xfrm>
+          <a:prstGeom prst="rect">
+            <a:avLst/>
+          </a:prstGeom>
+          <a:noFill/>
+        </p:spPr>
+        <p:txBody>
+          <a:bodyPr wrap="square" anchor="t" lIns="45720" rIns="45720" tIns="27432" bIns="27432">
+            <a:normAutofit/>
+          </a:bodyPr>
+          <a:lstStyle/>
+          <a:p>
+            <a:pPr algn="l"/>
+            <a:r>
+              <a:rPr sz="1100" b="1">
+                <a:solidFill>
+                  <a:srgbClr val="157355"/>
+                </a:solidFill>
+                <a:latin typeface="Bricolage Grotesque"/>
+              </a:rPr>
+              <a:t>marco</a:t>
+            </a:r>
+          </a:p>
+          <a:p>
+            <a:pPr algn="l"/>
+            <a:r>
+              <a:rPr sz="1000">
+                <a:solidFill>
+                  <a:srgbClr val="20242E"/>
+                </a:solidFill>
+                <a:latin typeface="Inter"/>
+              </a:rPr>
+              <a:t>… es mi/tu/su …</a:t>
+            </a:r>
+          </a:p>
+        </p:txBody>
+      </p:sp>
+      <p:sp>
+        <p:nvSpPr>
+          <p:cNvPr id="17" name="Tarjeta 3"/>
+          <p:cNvSpPr/>
+          <p:nvPr/>
+        </p:nvSpPr>
+        <p:spPr>
+          <a:xfrm>
+            <a:off x="9022842" y="2670048"/>
+            <a:ext cx="2708910" cy="1170432"/>
+          </a:xfrm>
+          <a:prstGeom prst="roundRect">
+            <a:avLst>
+              <a:gd name="adj" fmla="val 6000"/>
+            </a:avLst>
+          </a:prstGeom>
+          <a:solidFill>
+            <a:srgbClr val="FFFFFF"/>
+          </a:solidFill>
+          <a:ln w="12700">
+            <a:solidFill>
+              <a:srgbClr val="E4E3DE"/>
+            </a:solidFill>
+          </a:ln>
+          <a:effectLst/>
+        </p:spPr>
+        <p:style>
+          <a:lnRef idx="1">
+            <a:schemeClr val="accent1"/>
+          </a:lnRef>
+          <a:fillRef idx="3">
+            <a:schemeClr val="accent1"/>
+          </a:fillRef>
+          <a:effectRef idx="2">
+            <a:schemeClr val="accent1"/>
+          </a:effectRef>
+          <a:fontRef idx="minor">
+            <a:schemeClr val="lt1"/>
+          </a:fontRef>
+        </p:style>
+        <p:txBody>
+          <a:bodyPr rtlCol="0" anchor="ctr"/>
+          <a:lstStyle/>
+          <a:p/>
+        </p:txBody>
+      </p:sp>
+      <p:sp>
+        <p:nvSpPr>
+          <p:cNvPr id="18" name="TarjetaTxt 3"/>
+          <p:cNvSpPr txBox="1"/>
+          <p:nvPr/>
+        </p:nvSpPr>
+        <p:spPr>
+          <a:xfrm>
+            <a:off x="9114282" y="2724912"/>
+            <a:ext cx="2526030" cy="1060704"/>
+          </a:xfrm>
+          <a:prstGeom prst="rect">
+            <a:avLst/>
+          </a:prstGeom>
+          <a:noFill/>
+        </p:spPr>
+        <p:txBody>
+          <a:bodyPr wrap="square" anchor="t" lIns="45720" rIns="45720" tIns="27432" bIns="27432">
+            <a:normAutofit/>
+          </a:bodyPr>
+          <a:lstStyle/>
+          <a:p>
+            <a:pPr algn="l"/>
+            <a:r>
+              <a:rPr sz="1100" b="1">
+                <a:solidFill>
+                  <a:srgbClr val="157355"/>
+                </a:solidFill>
+                <a:latin typeface="Bricolage Grotesque"/>
+              </a:rPr>
+              <a:t>marco</a:t>
+            </a:r>
+          </a:p>
+          <a:p>
+            <a:pPr algn="l"/>
+            <a:r>
+              <a:rPr sz="1000">
+                <a:solidFill>
+                  <a:srgbClr val="20242E"/>
+                </a:solidFill>
+                <a:latin typeface="Inter"/>
+              </a:rPr>
+              <a:t>Sus hijos se llaman …</a:t>
+            </a:r>
+          </a:p>
+        </p:txBody>
+      </p:sp>
+      <p:sp>
+        <p:nvSpPr>
+          <p:cNvPr id="19" name="Tarjeta 4"/>
+          <p:cNvSpPr/>
+          <p:nvPr/>
+        </p:nvSpPr>
+        <p:spPr>
+          <a:xfrm>
+            <a:off x="457200" y="3968496"/>
+            <a:ext cx="2708910" cy="1170432"/>
+          </a:xfrm>
+          <a:prstGeom prst="roundRect">
+            <a:avLst>
+              <a:gd name="adj" fmla="val 6000"/>
+            </a:avLst>
+          </a:prstGeom>
+          <a:solidFill>
+            <a:srgbClr val="FFFFFF"/>
+          </a:solidFill>
+          <a:ln w="12700">
+            <a:solidFill>
+              <a:srgbClr val="E4E3DE"/>
+            </a:solidFill>
+          </a:ln>
+          <a:effectLst/>
+        </p:spPr>
+        <p:style>
+          <a:lnRef idx="1">
+            <a:schemeClr val="accent1"/>
+          </a:lnRef>
+          <a:fillRef idx="3">
+            <a:schemeClr val="accent1"/>
+          </a:fillRef>
+          <a:effectRef idx="2">
+            <a:schemeClr val="accent1"/>
+          </a:effectRef>
+          <a:fontRef idx="minor">
+            <a:schemeClr val="lt1"/>
+          </a:fontRef>
+        </p:style>
+        <p:txBody>
+          <a:bodyPr rtlCol="0" anchor="ctr"/>
+          <a:lstStyle/>
+          <a:p/>
+        </p:txBody>
+      </p:sp>
+      <p:sp>
+        <p:nvSpPr>
+          <p:cNvPr id="20" name="TarjetaTxt 4"/>
+          <p:cNvSpPr txBox="1"/>
+          <p:nvPr/>
+        </p:nvSpPr>
+        <p:spPr>
+          <a:xfrm>
+            <a:off x="548640" y="4023360"/>
+            <a:ext cx="2526030" cy="1060704"/>
+          </a:xfrm>
+          <a:prstGeom prst="rect">
+            <a:avLst/>
+          </a:prstGeom>
+          <a:noFill/>
+        </p:spPr>
+        <p:txBody>
+          <a:bodyPr wrap="square" anchor="t" lIns="45720" rIns="45720" tIns="27432" bIns="27432">
+            <a:normAutofit/>
+          </a:bodyPr>
+          <a:lstStyle/>
+          <a:p>
+            <a:pPr algn="l"/>
+            <a:r>
+              <a:rPr sz="1100" b="1">
+                <a:solidFill>
+                  <a:srgbClr val="157355"/>
+                </a:solidFill>
+                <a:latin typeface="Bricolage Grotesque"/>
+              </a:rPr>
+              <a:t>marco</a:t>
+            </a:r>
+          </a:p>
+          <a:p>
+            <a:pPr algn="l"/>
+            <a:r>
+              <a:rPr sz="1000">
+                <a:solidFill>
+                  <a:srgbClr val="20242E"/>
+                </a:solidFill>
+                <a:latin typeface="Inter"/>
+              </a:rPr>
+              <a:t>Nuestra abuela vive en …</a:t>
+            </a:r>
+          </a:p>
+        </p:txBody>
+      </p:sp>
+      <p:sp>
+        <p:nvSpPr>
+          <p:cNvPr id="21" name="Tarjeta 5"/>
+          <p:cNvSpPr/>
+          <p:nvPr/>
+        </p:nvSpPr>
+        <p:spPr>
+          <a:xfrm>
+            <a:off x="3312414" y="3968496"/>
+            <a:ext cx="2708910" cy="1170432"/>
+          </a:xfrm>
+          <a:prstGeom prst="roundRect">
+            <a:avLst>
+              <a:gd name="adj" fmla="val 6000"/>
+            </a:avLst>
+          </a:prstGeom>
+          <a:solidFill>
+            <a:srgbClr val="FFFFFF"/>
+          </a:solidFill>
+          <a:ln w="12700">
+            <a:solidFill>
+              <a:srgbClr val="E4E3DE"/>
+            </a:solidFill>
+          </a:ln>
+          <a:effectLst/>
+        </p:spPr>
+        <p:style>
+          <a:lnRef idx="1">
+            <a:schemeClr val="accent1"/>
+          </a:lnRef>
+          <a:fillRef idx="3">
+            <a:schemeClr val="accent1"/>
+          </a:fillRef>
+          <a:effectRef idx="2">
+            <a:schemeClr val="accent1"/>
+          </a:effectRef>
+          <a:fontRef idx="minor">
+            <a:schemeClr val="lt1"/>
+          </a:fontRef>
+        </p:style>
+        <p:txBody>
+          <a:bodyPr rtlCol="0" anchor="ctr"/>
+          <a:lstStyle/>
+          <a:p/>
+        </p:txBody>
+      </p:sp>
+      <p:sp>
+        <p:nvSpPr>
+          <p:cNvPr id="22" name="TarjetaTxt 5"/>
+          <p:cNvSpPr txBox="1"/>
+          <p:nvPr/>
+        </p:nvSpPr>
+        <p:spPr>
+          <a:xfrm>
+            <a:off x="3403854" y="4023360"/>
+            <a:ext cx="2526030" cy="1060704"/>
+          </a:xfrm>
+          <a:prstGeom prst="rect">
+            <a:avLst/>
+          </a:prstGeom>
+          <a:noFill/>
+        </p:spPr>
+        <p:txBody>
+          <a:bodyPr wrap="square" anchor="t" lIns="45720" rIns="45720" tIns="27432" bIns="27432">
+            <a:normAutofit/>
+          </a:bodyPr>
+          <a:lstStyle/>
+          <a:p>
+            <a:pPr algn="l"/>
+            <a:r>
+              <a:rPr sz="1100" b="1">
+                <a:solidFill>
+                  <a:srgbClr val="157355"/>
+                </a:solidFill>
+                <a:latin typeface="Bricolage Grotesque"/>
+              </a:rPr>
+              <a:t>marco</a:t>
+            </a:r>
+          </a:p>
+          <a:p>
+            <a:pPr algn="l"/>
+            <a:r>
+              <a:rPr sz="1000">
+                <a:solidFill>
+                  <a:srgbClr val="20242E"/>
+                </a:solidFill>
+                <a:latin typeface="Inter"/>
+              </a:rPr>
+              <a:t>Su perro se llama …</a:t>
+            </a:r>
+          </a:p>
+        </p:txBody>
+      </p:sp>
+      <p:sp>
+        <p:nvSpPr>
+          <p:cNvPr id="23" name="Tarjeta 6"/>
+          <p:cNvSpPr/>
+          <p:nvPr/>
+        </p:nvSpPr>
+        <p:spPr>
+          <a:xfrm>
+            <a:off x="6167628" y="3968496"/>
+            <a:ext cx="2708910" cy="1170432"/>
+          </a:xfrm>
+          <a:prstGeom prst="roundRect">
+            <a:avLst>
+              <a:gd name="adj" fmla="val 6000"/>
+            </a:avLst>
+          </a:prstGeom>
+          <a:solidFill>
+            <a:srgbClr val="FFFFFF"/>
+          </a:solidFill>
+          <a:ln w="12700">
+            <a:solidFill>
+              <a:srgbClr val="E4E3DE"/>
+            </a:solidFill>
+          </a:ln>
+          <a:effectLst/>
+        </p:spPr>
+        <p:style>
+          <a:lnRef idx="1">
+            <a:schemeClr val="accent1"/>
+          </a:lnRef>
+          <a:fillRef idx="3">
+            <a:schemeClr val="accent1"/>
+          </a:fillRef>
+          <a:effectRef idx="2">
+            <a:schemeClr val="accent1"/>
+          </a:effectRef>
+          <a:fontRef idx="minor">
+            <a:schemeClr val="lt1"/>
+          </a:fontRef>
+        </p:style>
+        <p:txBody>
+          <a:bodyPr rtlCol="0" anchor="ctr"/>
+          <a:lstStyle/>
+          <a:p/>
+        </p:txBody>
+      </p:sp>
+      <p:sp>
+        <p:nvSpPr>
+          <p:cNvPr id="24" name="TarjetaTxt 6"/>
+          <p:cNvSpPr txBox="1"/>
+          <p:nvPr/>
+        </p:nvSpPr>
+        <p:spPr>
+          <a:xfrm>
+            <a:off x="6259068" y="4023360"/>
+            <a:ext cx="2526030" cy="1060704"/>
+          </a:xfrm>
+          <a:prstGeom prst="rect">
+            <a:avLst/>
+          </a:prstGeom>
+          <a:noFill/>
+        </p:spPr>
+        <p:txBody>
+          <a:bodyPr wrap="square" anchor="t" lIns="45720" rIns="45720" tIns="27432" bIns="27432">
+            <a:normAutofit/>
+          </a:bodyPr>
+          <a:lstStyle/>
+          <a:p>
+            <a:pPr algn="l"/>
+            <a:r>
+              <a:rPr sz="1100" b="1">
+                <a:solidFill>
+                  <a:srgbClr val="157355"/>
+                </a:solidFill>
+                <a:latin typeface="Bricolage Grotesque"/>
+              </a:rPr>
+              <a:t>¡Escándalo!</a:t>
+            </a:r>
+          </a:p>
+          <a:p>
+            <a:pPr algn="l"/>
+            <a:r>
+              <a:rPr sz="1000">
+                <a:solidFill>
+                  <a:srgbClr val="20242E"/>
+                </a:solidFill>
+                <a:latin typeface="Inter"/>
+              </a:rPr>
+              <a:t>¡Su marido no es su marido!</a:t>
+            </a:r>
+          </a:p>
+        </p:txBody>
+      </p:sp>
+      <p:sp>
+        <p:nvSpPr>
+          <p:cNvPr id="25" name="Tarjeta 7"/>
+          <p:cNvSpPr/>
+          <p:nvPr/>
+        </p:nvSpPr>
+        <p:spPr>
+          <a:xfrm>
+            <a:off x="9022842" y="3968496"/>
+            <a:ext cx="2708910" cy="1170432"/>
+          </a:xfrm>
+          <a:prstGeom prst="roundRect">
+            <a:avLst>
+              <a:gd name="adj" fmla="val 6000"/>
+            </a:avLst>
+          </a:prstGeom>
+          <a:solidFill>
+            <a:srgbClr val="FFFFFF"/>
+          </a:solidFill>
+          <a:ln w="12700">
+            <a:solidFill>
+              <a:srgbClr val="E4E3DE"/>
+            </a:solidFill>
+          </a:ln>
+          <a:effectLst/>
+        </p:spPr>
+        <p:style>
+          <a:lnRef idx="1">
+            <a:schemeClr val="accent1"/>
+          </a:lnRef>
+          <a:fillRef idx="3">
+            <a:schemeClr val="accent1"/>
+          </a:fillRef>
+          <a:effectRef idx="2">
+            <a:schemeClr val="accent1"/>
+          </a:effectRef>
+          <a:fontRef idx="minor">
+            <a:schemeClr val="lt1"/>
+          </a:fontRef>
+        </p:style>
+        <p:txBody>
+          <a:bodyPr rtlCol="0" anchor="ctr"/>
+          <a:lstStyle/>
+          <a:p/>
+        </p:txBody>
+      </p:sp>
+      <p:sp>
+        <p:nvSpPr>
+          <p:cNvPr id="26" name="TarjetaTxt 7"/>
+          <p:cNvSpPr txBox="1"/>
+          <p:nvPr/>
+        </p:nvSpPr>
+        <p:spPr>
+          <a:xfrm>
+            <a:off x="9114282" y="4023360"/>
+            <a:ext cx="2526030" cy="1060704"/>
+          </a:xfrm>
+          <a:prstGeom prst="rect">
+            <a:avLst/>
+          </a:prstGeom>
+          <a:noFill/>
+        </p:spPr>
+        <p:txBody>
+          <a:bodyPr wrap="square" anchor="t" lIns="45720" rIns="45720" tIns="27432" bIns="27432">
+            <a:normAutofit/>
+          </a:bodyPr>
+          <a:lstStyle/>
+          <a:p>
+            <a:pPr algn="l"/>
+            <a:r>
+              <a:rPr sz="1100" b="1">
+                <a:solidFill>
+                  <a:srgbClr val="157355"/>
+                </a:solidFill>
+                <a:latin typeface="Bricolage Grotesque"/>
+              </a:rPr>
+              <a:t>¡Escándalo!</a:t>
+            </a:r>
+          </a:p>
+          <a:p>
+            <a:pPr algn="l"/>
+            <a:r>
+              <a:rPr sz="1000">
+                <a:solidFill>
+                  <a:srgbClr val="20242E"/>
+                </a:solidFill>
+                <a:latin typeface="Inter"/>
+              </a:rPr>
+              <a:t>¡Sus hijos no saben que …!</a:t>
+            </a:r>
+          </a:p>
+        </p:txBody>
+      </p:sp>
+      <p:sp>
+        <p:nvSpPr>
+          <p:cNvPr id="27" name="Tarjeta 8"/>
+          <p:cNvSpPr/>
+          <p:nvPr/>
+        </p:nvSpPr>
+        <p:spPr>
+          <a:xfrm>
+            <a:off x="457200" y="5266944"/>
+            <a:ext cx="2708910" cy="1170432"/>
+          </a:xfrm>
+          <a:prstGeom prst="roundRect">
+            <a:avLst>
+              <a:gd name="adj" fmla="val 6000"/>
+            </a:avLst>
+          </a:prstGeom>
+          <a:solidFill>
+            <a:srgbClr val="FFFFFF"/>
+          </a:solidFill>
+          <a:ln w="12700">
+            <a:solidFill>
+              <a:srgbClr val="E4E3DE"/>
+            </a:solidFill>
+          </a:ln>
+          <a:effectLst/>
+        </p:spPr>
+        <p:style>
+          <a:lnRef idx="1">
+            <a:schemeClr val="accent1"/>
+          </a:lnRef>
+          <a:fillRef idx="3">
+            <a:schemeClr val="accent1"/>
+          </a:fillRef>
+          <a:effectRef idx="2">
+            <a:schemeClr val="accent1"/>
+          </a:effectRef>
+          <a:fontRef idx="minor">
+            <a:schemeClr val="lt1"/>
+          </a:fontRef>
+        </p:style>
+        <p:txBody>
+          <a:bodyPr rtlCol="0" anchor="ctr"/>
+          <a:lstStyle/>
+          <a:p/>
+        </p:txBody>
+      </p:sp>
+      <p:sp>
+        <p:nvSpPr>
+          <p:cNvPr id="28" name="TarjetaTxt 8"/>
+          <p:cNvSpPr txBox="1"/>
+          <p:nvPr/>
+        </p:nvSpPr>
+        <p:spPr>
+          <a:xfrm>
+            <a:off x="548640" y="5321808"/>
+            <a:ext cx="2526030" cy="1060704"/>
+          </a:xfrm>
+          <a:prstGeom prst="rect">
+            <a:avLst/>
+          </a:prstGeom>
+          <a:noFill/>
+        </p:spPr>
+        <p:txBody>
+          <a:bodyPr wrap="square" anchor="t" lIns="45720" rIns="45720" tIns="27432" bIns="27432">
+            <a:normAutofit/>
+          </a:bodyPr>
+          <a:lstStyle/>
+          <a:p>
+            <a:pPr algn="l"/>
+            <a:r>
+              <a:rPr sz="1100" b="1">
+                <a:solidFill>
+                  <a:srgbClr val="157355"/>
+                </a:solidFill>
+                <a:latin typeface="Bricolage Grotesque"/>
+              </a:rPr>
+              <a:t>¡Escándalo!</a:t>
+            </a:r>
+          </a:p>
+          <a:p>
+            <a:pPr algn="l"/>
+            <a:r>
+              <a:rPr sz="1000">
+                <a:solidFill>
+                  <a:srgbClr val="20242E"/>
+                </a:solidFill>
+                <a:latin typeface="Inter"/>
+              </a:rPr>
+              <a:t>¡Nuestra abuela tiene un secreto!</a:t>
+            </a:r>
+          </a:p>
+        </p:txBody>
+      </p:sp>
+    </p:spTree>
+  </p:cSld>
+  <p:clrMapOvr>
+    <a:masterClrMapping/>
+  </p:clrMapOvr>
+</p:sld>
+</file>
+
+<file path=ppt/slides/slide26.xml><?xml version="1.0" encoding="utf-8"?>
+<p:sld xmlns:a="http://schemas.openxmlformats.org/drawingml/2006/main" xmlns:p="http://schemas.openxmlformats.org/presentationml/2006/main" xmlns:r="http://schemas.openxmlformats.org/officeDocument/2006/relationships">
+  <p:cSld>
+    <p:spTree>
+      <p:nvGrpSpPr>
+        <p:cNvPr id="1" name=""/>
+        <p:cNvGrpSpPr/>
+        <p:nvPr/>
+      </p:nvGrpSpPr>
+      <p:grpSpPr/>
+      <p:sp>
+        <p:nvSpPr>
+          <p:cNvPr id="2" name="Fondo"/>
+          <p:cNvSpPr/>
+          <p:nvPr/>
+        </p:nvSpPr>
+        <p:spPr>
+          <a:xfrm>
+            <a:off x="0" y="0"/>
+            <a:ext cx="12191695" cy="6858000"/>
+          </a:xfrm>
+          <a:prstGeom prst="rect">
+            <a:avLst/>
+          </a:prstGeom>
+          <a:solidFill>
+            <a:srgbClr val="FCFBF8"/>
+          </a:solidFill>
+          <a:ln>
+            <a:noFill/>
+          </a:ln>
+          <a:effectLst/>
+        </p:spPr>
+        <p:style>
+          <a:lnRef idx="1">
+            <a:schemeClr val="accent1"/>
+          </a:lnRef>
+          <a:fillRef idx="3">
+            <a:schemeClr val="accent1"/>
+          </a:fillRef>
+          <a:effectRef idx="2">
+            <a:schemeClr val="accent1"/>
+          </a:effectRef>
+          <a:fontRef idx="minor">
+            <a:schemeClr val="lt1"/>
+          </a:fontRef>
+        </p:style>
+        <p:txBody>
+          <a:bodyPr rtlCol="0" anchor="ctr"/>
+          <a:lstStyle/>
+          <a:p/>
+        </p:txBody>
+      </p:sp>
+      <p:sp>
+        <p:nvSpPr>
+          <p:cNvPr id="3" name="Cabecera"/>
+          <p:cNvSpPr/>
+          <p:nvPr/>
+        </p:nvSpPr>
+        <p:spPr>
+          <a:xfrm>
+            <a:off x="0" y="0"/>
+            <a:ext cx="12191695" cy="1078992"/>
+          </a:xfrm>
+          <a:prstGeom prst="rect">
+            <a:avLst/>
+          </a:prstGeom>
+          <a:solidFill>
+            <a:srgbClr val="1E9E74"/>
+          </a:solidFill>
+          <a:ln>
+            <a:noFill/>
+          </a:ln>
+          <a:effectLst/>
+        </p:spPr>
+        <p:style>
+          <a:lnRef idx="1">
+            <a:schemeClr val="accent1"/>
+          </a:lnRef>
+          <a:fillRef idx="3">
+            <a:schemeClr val="accent1"/>
+          </a:fillRef>
+          <a:effectRef idx="2">
+            <a:schemeClr val="accent1"/>
+          </a:effectRef>
+          <a:fontRef idx="minor">
+            <a:schemeClr val="lt1"/>
+          </a:fontRef>
+        </p:style>
+        <p:txBody>
+          <a:bodyPr rtlCol="0" anchor="ctr"/>
+          <a:lstStyle/>
+          <a:p/>
+        </p:txBody>
+      </p:sp>
+      <p:sp>
+        <p:nvSpPr>
+          <p:cNvPr id="4" name="Chip"/>
+          <p:cNvSpPr/>
+          <p:nvPr/>
+        </p:nvSpPr>
+        <p:spPr>
+          <a:xfrm>
+            <a:off x="457200" y="182880"/>
+            <a:ext cx="3017520" cy="292608"/>
+          </a:xfrm>
+          <a:prstGeom prst="roundRect">
+            <a:avLst>
+              <a:gd name="adj" fmla="val 50000"/>
+            </a:avLst>
+          </a:prstGeom>
+          <a:solidFill>
+            <a:srgbClr val="FFFFFF"/>
+          </a:solidFill>
+          <a:ln>
+            <a:noFill/>
+          </a:ln>
+          <a:effectLst/>
+        </p:spPr>
+        <p:style>
+          <a:lnRef idx="1">
+            <a:schemeClr val="accent1"/>
+          </a:lnRef>
+          <a:fillRef idx="3">
+            <a:schemeClr val="accent1"/>
+          </a:fillRef>
+          <a:effectRef idx="2">
+            <a:schemeClr val="accent1"/>
+          </a:effectRef>
+          <a:fontRef idx="minor">
+            <a:schemeClr val="lt1"/>
+          </a:fontRef>
+        </p:style>
+        <p:txBody>
+          <a:bodyPr rtlCol="0" anchor="ctr"/>
+          <a:lstStyle/>
+          <a:p/>
+        </p:txBody>
+      </p:sp>
+      <p:sp>
+        <p:nvSpPr>
+          <p:cNvPr id="5" name="ChipTxt"/>
+          <p:cNvSpPr txBox="1"/>
+          <p:nvPr/>
+        </p:nvSpPr>
+        <p:spPr>
+          <a:xfrm>
+            <a:off x="457200" y="173736"/>
+            <a:ext cx="3017520" cy="310896"/>
+          </a:xfrm>
+          <a:prstGeom prst="rect">
+            <a:avLst/>
+          </a:prstGeom>
+          <a:noFill/>
+        </p:spPr>
+        <p:txBody>
+          <a:bodyPr wrap="square" anchor="ctr" lIns="45720" rIns="45720" tIns="27432" bIns="27432">
+            <a:normAutofit/>
+          </a:bodyPr>
+          <a:lstStyle/>
+          <a:p>
+            <a:pPr algn="ctr"/>
+            <a:r>
+              <a:rPr sz="950" b="1">
+                <a:solidFill>
+                  <a:srgbClr val="157355"/>
+                </a:solidFill>
+                <a:latin typeface="Inter"/>
+              </a:rPr>
+              <a:t>RETO 3 · ONDERHANDELING &amp; DILEMMA</a:t>
+            </a:r>
+          </a:p>
+        </p:txBody>
+      </p:sp>
+      <p:sp>
+        <p:nvSpPr>
+          <p:cNvPr id="6" name="Titulo"/>
+          <p:cNvSpPr txBox="1"/>
+          <p:nvPr/>
+        </p:nvSpPr>
+        <p:spPr>
+          <a:xfrm>
+            <a:off x="457200" y="502920"/>
+            <a:ext cx="8412480" cy="475488"/>
+          </a:xfrm>
+          <a:prstGeom prst="rect">
+            <a:avLst/>
+          </a:prstGeom>
+          <a:noFill/>
+        </p:spPr>
+        <p:txBody>
+          <a:bodyPr wrap="square" anchor="t" lIns="45720" rIns="45720" tIns="27432" bIns="27432">
+            <a:normAutofit/>
+          </a:bodyPr>
+          <a:lstStyle/>
+          <a:p>
+            <a:pPr algn="l"/>
+            <a:r>
+              <a:rPr sz="2700" b="1">
+                <a:solidFill>
+                  <a:srgbClr val="FFFFFF"/>
+                </a:solidFill>
+                <a:latin typeface="Bricolage Grotesque"/>
+              </a:rPr>
+              <a:t>Herencia con condiciones</a:t>
+            </a:r>
+          </a:p>
+        </p:txBody>
+      </p:sp>
+      <p:sp>
+        <p:nvSpPr>
+          <p:cNvPr id="7" name="Badges"/>
+          <p:cNvSpPr txBox="1"/>
+          <p:nvPr/>
+        </p:nvSpPr>
+        <p:spPr>
+          <a:xfrm>
+            <a:off x="9052560" y="256032"/>
+            <a:ext cx="2651760" cy="640080"/>
+          </a:xfrm>
+          <a:prstGeom prst="rect">
+            <a:avLst/>
+          </a:prstGeom>
+          <a:noFill/>
+        </p:spPr>
+        <p:txBody>
+          <a:bodyPr wrap="square" anchor="t" lIns="45720" rIns="45720" tIns="27432" bIns="27432">
+            <a:normAutofit/>
+          </a:bodyPr>
+          <a:lstStyle/>
+          <a:p>
+            <a:pPr algn="r"/>
+            <a:r>
+              <a:rPr sz="1000">
+                <a:solidFill>
+                  <a:srgbClr val="E4F4EE"/>
+                </a:solidFill>
+                <a:latin typeface="Inter"/>
+              </a:rPr>
+              <a:t>👨‍👩‍👧 En grupos</a:t>
+            </a:r>
+          </a:p>
+          <a:p>
+            <a:pPr algn="r"/>
+            <a:r>
+              <a:rPr sz="1000">
+                <a:solidFill>
+                  <a:srgbClr val="E4F4EE"/>
+                </a:solidFill>
+                <a:latin typeface="Inter"/>
+              </a:rPr>
+              <a:t>± 15 min · ★★★</a:t>
+            </a:r>
+          </a:p>
+        </p:txBody>
+      </p:sp>
+      <p:sp>
+        <p:nvSpPr>
+          <p:cNvPr id="8" name="Gancho"/>
+          <p:cNvSpPr txBox="1"/>
+          <p:nvPr/>
+        </p:nvSpPr>
+        <p:spPr>
+          <a:xfrm>
+            <a:off x="457200" y="1225296"/>
+            <a:ext cx="11274552" cy="566928"/>
+          </a:xfrm>
+          <a:prstGeom prst="rect">
+            <a:avLst/>
+          </a:prstGeom>
+          <a:noFill/>
+        </p:spPr>
+        <p:txBody>
+          <a:bodyPr wrap="square" anchor="t" lIns="45720" rIns="45720" tIns="27432" bIns="27432">
+            <a:normAutofit/>
+          </a:bodyPr>
+          <a:lstStyle/>
+          <a:p>
+            <a:pPr algn="l"/>
+            <a:r>
+              <a:rPr sz="1600" b="1">
+                <a:solidFill>
+                  <a:srgbClr val="157355"/>
+                </a:solidFill>
+                <a:latin typeface="Bricolage Grotesque"/>
+              </a:rPr>
+              <a:t>La tía Amparo deja cinco cosas. Y una nota que no aclara nada.</a:t>
+            </a:r>
+          </a:p>
+          <a:p>
+            <a:pPr algn="l"/>
+            <a:r>
+              <a:rPr sz="1100" i="1">
+                <a:solidFill>
+                  <a:srgbClr val="6A6E78"/>
+                </a:solidFill>
+                <a:latin typeface="Inter"/>
+              </a:rPr>
+              <a:t>Tante Amparo laat vijf dingen na. En een briefje dat niets verduidelijkt.</a:t>
+            </a:r>
+          </a:p>
+        </p:txBody>
+      </p:sp>
+      <p:sp>
+        <p:nvSpPr>
+          <p:cNvPr id="9" name="ReglaCaja"/>
+          <p:cNvSpPr/>
+          <p:nvPr/>
+        </p:nvSpPr>
+        <p:spPr>
+          <a:xfrm>
+            <a:off x="457200" y="1847088"/>
+            <a:ext cx="11274552" cy="658368"/>
+          </a:xfrm>
+          <a:prstGeom prst="roundRect">
+            <a:avLst>
+              <a:gd name="adj" fmla="val 5000"/>
+            </a:avLst>
+          </a:prstGeom>
+          <a:solidFill>
+            <a:srgbClr val="FBF3D6"/>
+          </a:solidFill>
+          <a:ln>
+            <a:noFill/>
+          </a:ln>
+          <a:effectLst/>
+        </p:spPr>
+        <p:style>
+          <a:lnRef idx="1">
+            <a:schemeClr val="accent1"/>
+          </a:lnRef>
+          <a:fillRef idx="3">
+            <a:schemeClr val="accent1"/>
+          </a:fillRef>
+          <a:effectRef idx="2">
+            <a:schemeClr val="accent1"/>
+          </a:effectRef>
+          <a:fontRef idx="minor">
+            <a:schemeClr val="lt1"/>
+          </a:fontRef>
+        </p:style>
+        <p:txBody>
+          <a:bodyPr rtlCol="0" anchor="ctr"/>
+          <a:lstStyle/>
+          <a:p/>
+        </p:txBody>
+      </p:sp>
+      <p:sp>
+        <p:nvSpPr>
+          <p:cNvPr id="10" name="ReglaTxt"/>
+          <p:cNvSpPr txBox="1"/>
+          <p:nvPr/>
+        </p:nvSpPr>
+        <p:spPr>
+          <a:xfrm>
+            <a:off x="603504" y="1883664"/>
+            <a:ext cx="10972800" cy="585216"/>
+          </a:xfrm>
+          <a:prstGeom prst="rect">
+            <a:avLst/>
+          </a:prstGeom>
+          <a:noFill/>
+        </p:spPr>
+        <p:txBody>
+          <a:bodyPr wrap="square" anchor="t" lIns="45720" rIns="45720" tIns="27432" bIns="27432">
+            <a:normAutofit/>
+          </a:bodyPr>
+          <a:lstStyle/>
+          <a:p>
+            <a:pPr algn="l"/>
+            <a:r>
+              <a:rPr sz="850" b="1">
+                <a:solidFill>
+                  <a:srgbClr val="B7860B"/>
+                </a:solidFill>
+                <a:latin typeface="Inter"/>
+              </a:rPr>
+              <a:t>LA REGLA DEL RETO</a:t>
+            </a:r>
+          </a:p>
+          <a:p>
+            <a:pPr algn="l"/>
+            <a:r>
+              <a:rPr sz="1100">
+                <a:solidFill>
+                  <a:srgbClr val="20242E"/>
+                </a:solidFill>
+                <a:latin typeface="Inter"/>
+              </a:rPr>
+              <a:t>Alleen familieargumenten tellen. «Ik wil het» of «het past bij mij» is geen argument; «es de su hermana, no de la mía» wel.</a:t>
+            </a:r>
+          </a:p>
+        </p:txBody>
+      </p:sp>
+      <p:sp>
+        <p:nvSpPr>
+          <p:cNvPr id="11" name="Tarjeta 0"/>
+          <p:cNvSpPr/>
+          <p:nvPr/>
+        </p:nvSpPr>
+        <p:spPr>
+          <a:xfrm>
+            <a:off x="457200" y="2670048"/>
+            <a:ext cx="2708910" cy="1170432"/>
+          </a:xfrm>
+          <a:prstGeom prst="roundRect">
+            <a:avLst>
+              <a:gd name="adj" fmla="val 6000"/>
+            </a:avLst>
+          </a:prstGeom>
+          <a:solidFill>
+            <a:srgbClr val="FFFFFF"/>
+          </a:solidFill>
+          <a:ln w="12700">
+            <a:solidFill>
+              <a:srgbClr val="E4E3DE"/>
+            </a:solidFill>
+          </a:ln>
+          <a:effectLst/>
+        </p:spPr>
+        <p:style>
+          <a:lnRef idx="1">
+            <a:schemeClr val="accent1"/>
+          </a:lnRef>
+          <a:fillRef idx="3">
+            <a:schemeClr val="accent1"/>
+          </a:fillRef>
+          <a:effectRef idx="2">
+            <a:schemeClr val="accent1"/>
+          </a:effectRef>
+          <a:fontRef idx="minor">
+            <a:schemeClr val="lt1"/>
+          </a:fontRef>
+        </p:style>
+        <p:txBody>
+          <a:bodyPr rtlCol="0" anchor="ctr"/>
+          <a:lstStyle/>
+          <a:p/>
+        </p:txBody>
+      </p:sp>
+      <p:sp>
+        <p:nvSpPr>
+          <p:cNvPr id="12" name="TarjetaTxt 0"/>
+          <p:cNvSpPr txBox="1"/>
+          <p:nvPr/>
+        </p:nvSpPr>
+        <p:spPr>
+          <a:xfrm>
+            <a:off x="548640" y="2724912"/>
+            <a:ext cx="2526030" cy="1060704"/>
+          </a:xfrm>
+          <a:prstGeom prst="rect">
+            <a:avLst/>
+          </a:prstGeom>
+          <a:noFill/>
+        </p:spPr>
+        <p:txBody>
+          <a:bodyPr wrap="square" anchor="t" lIns="45720" rIns="45720" tIns="27432" bIns="27432">
+            <a:normAutofit/>
+          </a:bodyPr>
+          <a:lstStyle/>
+          <a:p>
+            <a:pPr algn="l"/>
+            <a:r>
+              <a:rPr sz="1100" b="1">
+                <a:solidFill>
+                  <a:srgbClr val="157355"/>
+                </a:solidFill>
+                <a:latin typeface="Bricolage Grotesque"/>
+              </a:rPr>
+              <a:t>la guitarra de Curro</a:t>
+            </a:r>
+          </a:p>
+          <a:p>
+            <a:pPr algn="l"/>
+            <a:r>
+              <a:rPr sz="1000">
+                <a:solidFill>
+                  <a:srgbClr val="20242E"/>
+                </a:solidFill>
+                <a:latin typeface="Inter"/>
+              </a:rPr>
+              <a:t>su marido la tocaba cada domingo</a:t>
+            </a:r>
+          </a:p>
+        </p:txBody>
+      </p:sp>
+      <p:sp>
+        <p:nvSpPr>
+          <p:cNvPr id="13" name="Tarjeta 1"/>
+          <p:cNvSpPr/>
+          <p:nvPr/>
+        </p:nvSpPr>
+        <p:spPr>
+          <a:xfrm>
+            <a:off x="3312414" y="2670048"/>
+            <a:ext cx="2708910" cy="1170432"/>
+          </a:xfrm>
+          <a:prstGeom prst="roundRect">
+            <a:avLst>
+              <a:gd name="adj" fmla="val 6000"/>
+            </a:avLst>
+          </a:prstGeom>
+          <a:solidFill>
+            <a:srgbClr val="FFFFFF"/>
+          </a:solidFill>
+          <a:ln w="12700">
+            <a:solidFill>
+              <a:srgbClr val="E4E3DE"/>
+            </a:solidFill>
+          </a:ln>
+          <a:effectLst/>
+        </p:spPr>
+        <p:style>
+          <a:lnRef idx="1">
+            <a:schemeClr val="accent1"/>
+          </a:lnRef>
+          <a:fillRef idx="3">
+            <a:schemeClr val="accent1"/>
+          </a:fillRef>
+          <a:effectRef idx="2">
+            <a:schemeClr val="accent1"/>
+          </a:effectRef>
+          <a:fontRef idx="minor">
+            <a:schemeClr val="lt1"/>
+          </a:fontRef>
+        </p:style>
+        <p:txBody>
+          <a:bodyPr rtlCol="0" anchor="ctr"/>
+          <a:lstStyle/>
+          <a:p/>
+        </p:txBody>
+      </p:sp>
+      <p:sp>
+        <p:nvSpPr>
+          <p:cNvPr id="14" name="TarjetaTxt 1"/>
+          <p:cNvSpPr txBox="1"/>
+          <p:nvPr/>
+        </p:nvSpPr>
+        <p:spPr>
+          <a:xfrm>
+            <a:off x="3403854" y="2724912"/>
+            <a:ext cx="2526030" cy="1060704"/>
+          </a:xfrm>
+          <a:prstGeom prst="rect">
+            <a:avLst/>
+          </a:prstGeom>
+          <a:noFill/>
+        </p:spPr>
+        <p:txBody>
+          <a:bodyPr wrap="square" anchor="t" lIns="45720" rIns="45720" tIns="27432" bIns="27432">
+            <a:normAutofit/>
+          </a:bodyPr>
+          <a:lstStyle/>
+          <a:p>
+            <a:pPr algn="l"/>
+            <a:r>
+              <a:rPr sz="1100" b="1">
+                <a:solidFill>
+                  <a:srgbClr val="157355"/>
+                </a:solidFill>
+                <a:latin typeface="Bricolage Grotesque"/>
+              </a:rPr>
+              <a:t>el anillo de la bisabuela</a:t>
+            </a:r>
+          </a:p>
+          <a:p>
+            <a:pPr algn="l"/>
+            <a:r>
+              <a:rPr sz="1000">
+                <a:solidFill>
+                  <a:srgbClr val="20242E"/>
+                </a:solidFill>
+                <a:latin typeface="Inter"/>
+              </a:rPr>
+              <a:t>pasa de madre a hija desde 1890</a:t>
+            </a:r>
+          </a:p>
+        </p:txBody>
+      </p:sp>
+      <p:sp>
+        <p:nvSpPr>
+          <p:cNvPr id="15" name="Tarjeta 2"/>
+          <p:cNvSpPr/>
+          <p:nvPr/>
+        </p:nvSpPr>
+        <p:spPr>
+          <a:xfrm>
+            <a:off x="6167628" y="2670048"/>
+            <a:ext cx="2708910" cy="1170432"/>
+          </a:xfrm>
+          <a:prstGeom prst="roundRect">
+            <a:avLst>
+              <a:gd name="adj" fmla="val 6000"/>
+            </a:avLst>
+          </a:prstGeom>
+          <a:solidFill>
+            <a:srgbClr val="FFFFFF"/>
+          </a:solidFill>
+          <a:ln w="12700">
+            <a:solidFill>
+              <a:srgbClr val="E4E3DE"/>
+            </a:solidFill>
+          </a:ln>
+          <a:effectLst/>
+        </p:spPr>
+        <p:style>
+          <a:lnRef idx="1">
+            <a:schemeClr val="accent1"/>
+          </a:lnRef>
+          <a:fillRef idx="3">
+            <a:schemeClr val="accent1"/>
+          </a:fillRef>
+          <a:effectRef idx="2">
+            <a:schemeClr val="accent1"/>
+          </a:effectRef>
+          <a:fontRef idx="minor">
+            <a:schemeClr val="lt1"/>
+          </a:fontRef>
+        </p:style>
+        <p:txBody>
+          <a:bodyPr rtlCol="0" anchor="ctr"/>
+          <a:lstStyle/>
+          <a:p/>
+        </p:txBody>
+      </p:sp>
+      <p:sp>
+        <p:nvSpPr>
+          <p:cNvPr id="16" name="TarjetaTxt 2"/>
+          <p:cNvSpPr txBox="1"/>
+          <p:nvPr/>
+        </p:nvSpPr>
+        <p:spPr>
+          <a:xfrm>
+            <a:off x="6259068" y="2724912"/>
+            <a:ext cx="2526030" cy="1060704"/>
+          </a:xfrm>
+          <a:prstGeom prst="rect">
+            <a:avLst/>
+          </a:prstGeom>
+          <a:noFill/>
+        </p:spPr>
+        <p:txBody>
+          <a:bodyPr wrap="square" anchor="t" lIns="45720" rIns="45720" tIns="27432" bIns="27432">
+            <a:normAutofit/>
+          </a:bodyPr>
+          <a:lstStyle/>
+          <a:p>
+            <a:pPr algn="l"/>
+            <a:r>
+              <a:rPr sz="1100" b="1">
+                <a:solidFill>
+                  <a:srgbClr val="157355"/>
+                </a:solidFill>
+                <a:latin typeface="Bricolage Grotesque"/>
+              </a:rPr>
+              <a:t>las fotos del pueblo</a:t>
+            </a:r>
+          </a:p>
+          <a:p>
+            <a:pPr algn="l"/>
+            <a:r>
+              <a:rPr sz="1000">
+                <a:solidFill>
+                  <a:srgbClr val="20242E"/>
+                </a:solidFill>
+                <a:latin typeface="Inter"/>
+              </a:rPr>
+              <a:t>las hizo su hermano Paco</a:t>
+            </a:r>
+          </a:p>
+        </p:txBody>
+      </p:sp>
+      <p:sp>
+        <p:nvSpPr>
+          <p:cNvPr id="17" name="Tarjeta 3"/>
+          <p:cNvSpPr/>
+          <p:nvPr/>
+        </p:nvSpPr>
+        <p:spPr>
+          <a:xfrm>
+            <a:off x="9022842" y="2670048"/>
+            <a:ext cx="2708910" cy="1170432"/>
+          </a:xfrm>
+          <a:prstGeom prst="roundRect">
+            <a:avLst>
+              <a:gd name="adj" fmla="val 6000"/>
+            </a:avLst>
+          </a:prstGeom>
+          <a:solidFill>
+            <a:srgbClr val="FFFFFF"/>
+          </a:solidFill>
+          <a:ln w="12700">
+            <a:solidFill>
+              <a:srgbClr val="E4E3DE"/>
+            </a:solidFill>
+          </a:ln>
+          <a:effectLst/>
+        </p:spPr>
+        <p:style>
+          <a:lnRef idx="1">
+            <a:schemeClr val="accent1"/>
+          </a:lnRef>
+          <a:fillRef idx="3">
+            <a:schemeClr val="accent1"/>
+          </a:fillRef>
+          <a:effectRef idx="2">
+            <a:schemeClr val="accent1"/>
+          </a:effectRef>
+          <a:fontRef idx="minor">
+            <a:schemeClr val="lt1"/>
+          </a:fontRef>
+        </p:style>
+        <p:txBody>
+          <a:bodyPr rtlCol="0" anchor="ctr"/>
+          <a:lstStyle/>
+          <a:p/>
+        </p:txBody>
+      </p:sp>
+      <p:sp>
+        <p:nvSpPr>
+          <p:cNvPr id="18" name="TarjetaTxt 3"/>
+          <p:cNvSpPr txBox="1"/>
+          <p:nvPr/>
+        </p:nvSpPr>
+        <p:spPr>
+          <a:xfrm>
+            <a:off x="9114282" y="2724912"/>
+            <a:ext cx="2526030" cy="1060704"/>
+          </a:xfrm>
+          <a:prstGeom prst="rect">
+            <a:avLst/>
+          </a:prstGeom>
+          <a:noFill/>
+        </p:spPr>
+        <p:txBody>
+          <a:bodyPr wrap="square" anchor="t" lIns="45720" rIns="45720" tIns="27432" bIns="27432">
+            <a:normAutofit/>
+          </a:bodyPr>
+          <a:lstStyle/>
+          <a:p>
+            <a:pPr algn="l"/>
+            <a:r>
+              <a:rPr sz="1100" b="1">
+                <a:solidFill>
+                  <a:srgbClr val="157355"/>
+                </a:solidFill>
+                <a:latin typeface="Bricolage Grotesque"/>
+              </a:rPr>
+              <a:t>la casa de Triana</a:t>
+            </a:r>
+          </a:p>
+          <a:p>
+            <a:pPr algn="l"/>
+            <a:r>
+              <a:rPr sz="1000">
+                <a:solidFill>
+                  <a:srgbClr val="20242E"/>
+                </a:solidFill>
+                <a:latin typeface="Inter"/>
+              </a:rPr>
+              <a:t>vale mucho dinero</a:t>
+            </a:r>
+          </a:p>
+        </p:txBody>
+      </p:sp>
+      <p:sp>
+        <p:nvSpPr>
+          <p:cNvPr id="19" name="Tarjeta 4"/>
+          <p:cNvSpPr/>
+          <p:nvPr/>
+        </p:nvSpPr>
+        <p:spPr>
+          <a:xfrm>
+            <a:off x="457200" y="3968496"/>
+            <a:ext cx="2708910" cy="1170432"/>
+          </a:xfrm>
+          <a:prstGeom prst="roundRect">
+            <a:avLst>
+              <a:gd name="adj" fmla="val 6000"/>
+            </a:avLst>
+          </a:prstGeom>
+          <a:solidFill>
+            <a:srgbClr val="FFFFFF"/>
+          </a:solidFill>
+          <a:ln w="12700">
+            <a:solidFill>
+              <a:srgbClr val="E4E3DE"/>
+            </a:solidFill>
+          </a:ln>
+          <a:effectLst/>
+        </p:spPr>
+        <p:style>
+          <a:lnRef idx="1">
+            <a:schemeClr val="accent1"/>
+          </a:lnRef>
+          <a:fillRef idx="3">
+            <a:schemeClr val="accent1"/>
+          </a:fillRef>
+          <a:effectRef idx="2">
+            <a:schemeClr val="accent1"/>
+          </a:effectRef>
+          <a:fontRef idx="minor">
+            <a:schemeClr val="lt1"/>
+          </a:fontRef>
+        </p:style>
+        <p:txBody>
+          <a:bodyPr rtlCol="0" anchor="ctr"/>
+          <a:lstStyle/>
+          <a:p/>
+        </p:txBody>
+      </p:sp>
+      <p:sp>
+        <p:nvSpPr>
+          <p:cNvPr id="20" name="TarjetaTxt 4"/>
+          <p:cNvSpPr txBox="1"/>
+          <p:nvPr/>
+        </p:nvSpPr>
+        <p:spPr>
+          <a:xfrm>
+            <a:off x="548640" y="4023360"/>
+            <a:ext cx="2526030" cy="1060704"/>
+          </a:xfrm>
+          <a:prstGeom prst="rect">
+            <a:avLst/>
+          </a:prstGeom>
+          <a:noFill/>
+        </p:spPr>
+        <p:txBody>
+          <a:bodyPr wrap="square" anchor="t" lIns="45720" rIns="45720" tIns="27432" bIns="27432">
+            <a:normAutofit/>
+          </a:bodyPr>
+          <a:lstStyle/>
+          <a:p>
+            <a:pPr algn="l"/>
+            <a:r>
+              <a:rPr sz="1100" b="1">
+                <a:solidFill>
+                  <a:srgbClr val="157355"/>
+                </a:solidFill>
+                <a:latin typeface="Bricolage Grotesque"/>
+              </a:rPr>
+              <a:t>el gato Manolo</a:t>
+            </a:r>
+          </a:p>
+          <a:p>
+            <a:pPr algn="l"/>
+            <a:r>
+              <a:rPr sz="1000">
+                <a:solidFill>
+                  <a:srgbClr val="20242E"/>
+                </a:solidFill>
+                <a:latin typeface="Inter"/>
+              </a:rPr>
+              <a:t>tiene catorce años y muerde</a:t>
+            </a:r>
+          </a:p>
+        </p:txBody>
+      </p:sp>
+      <p:sp>
+        <p:nvSpPr>
+          <p:cNvPr id="21" name="Tarjeta 5"/>
+          <p:cNvSpPr/>
+          <p:nvPr/>
+        </p:nvSpPr>
+        <p:spPr>
+          <a:xfrm>
+            <a:off x="3312414" y="3968496"/>
+            <a:ext cx="2708910" cy="1170432"/>
+          </a:xfrm>
+          <a:prstGeom prst="roundRect">
+            <a:avLst>
+              <a:gd name="adj" fmla="val 6000"/>
+            </a:avLst>
+          </a:prstGeom>
+          <a:solidFill>
+            <a:srgbClr val="FFFFFF"/>
+          </a:solidFill>
+          <a:ln w="12700">
+            <a:solidFill>
+              <a:srgbClr val="E4E3DE"/>
+            </a:solidFill>
+          </a:ln>
+          <a:effectLst/>
+        </p:spPr>
+        <p:style>
+          <a:lnRef idx="1">
+            <a:schemeClr val="accent1"/>
+          </a:lnRef>
+          <a:fillRef idx="3">
+            <a:schemeClr val="accent1"/>
+          </a:fillRef>
+          <a:effectRef idx="2">
+            <a:schemeClr val="accent1"/>
+          </a:effectRef>
+          <a:fontRef idx="minor">
+            <a:schemeClr val="lt1"/>
+          </a:fontRef>
+        </p:style>
+        <p:txBody>
+          <a:bodyPr rtlCol="0" anchor="ctr"/>
+          <a:lstStyle/>
+          <a:p/>
+        </p:txBody>
+      </p:sp>
+      <p:sp>
+        <p:nvSpPr>
+          <p:cNvPr id="22" name="TarjetaTxt 5"/>
+          <p:cNvSpPr txBox="1"/>
+          <p:nvPr/>
+        </p:nvSpPr>
+        <p:spPr>
+          <a:xfrm>
+            <a:off x="3403854" y="4023360"/>
+            <a:ext cx="2526030" cy="1060704"/>
+          </a:xfrm>
+          <a:prstGeom prst="rect">
+            <a:avLst/>
+          </a:prstGeom>
+          <a:noFill/>
+        </p:spPr>
+        <p:txBody>
+          <a:bodyPr wrap="square" anchor="t" lIns="45720" rIns="45720" tIns="27432" bIns="27432">
+            <a:normAutofit/>
+          </a:bodyPr>
+          <a:lstStyle/>
+          <a:p>
+            <a:pPr algn="l"/>
+            <a:r>
+              <a:rPr sz="1100" b="1">
+                <a:solidFill>
+                  <a:srgbClr val="157355"/>
+                </a:solidFill>
+                <a:latin typeface="Bricolage Grotesque"/>
+              </a:rPr>
+              <a:t>marco</a:t>
+            </a:r>
+          </a:p>
+          <a:p>
+            <a:pPr algn="l"/>
+            <a:r>
+              <a:rPr sz="1000">
+                <a:solidFill>
+                  <a:srgbClr val="20242E"/>
+                </a:solidFill>
+                <a:latin typeface="Inter"/>
+              </a:rPr>
+              <a:t>Es de mi …, no de la tuya.</a:t>
+            </a:r>
+          </a:p>
+        </p:txBody>
+      </p:sp>
+      <p:sp>
+        <p:nvSpPr>
+          <p:cNvPr id="23" name="Tarjeta 6"/>
+          <p:cNvSpPr/>
+          <p:nvPr/>
+        </p:nvSpPr>
+        <p:spPr>
+          <a:xfrm>
+            <a:off x="6167628" y="3968496"/>
+            <a:ext cx="2708910" cy="1170432"/>
+          </a:xfrm>
+          <a:prstGeom prst="roundRect">
+            <a:avLst>
+              <a:gd name="adj" fmla="val 6000"/>
+            </a:avLst>
+          </a:prstGeom>
+          <a:solidFill>
+            <a:srgbClr val="FFFFFF"/>
+          </a:solidFill>
+          <a:ln w="12700">
+            <a:solidFill>
+              <a:srgbClr val="E4E3DE"/>
+            </a:solidFill>
+          </a:ln>
+          <a:effectLst/>
+        </p:spPr>
+        <p:style>
+          <a:lnRef idx="1">
+            <a:schemeClr val="accent1"/>
+          </a:lnRef>
+          <a:fillRef idx="3">
+            <a:schemeClr val="accent1"/>
+          </a:fillRef>
+          <a:effectRef idx="2">
+            <a:schemeClr val="accent1"/>
+          </a:effectRef>
+          <a:fontRef idx="minor">
+            <a:schemeClr val="lt1"/>
+          </a:fontRef>
+        </p:style>
+        <p:txBody>
+          <a:bodyPr rtlCol="0" anchor="ctr"/>
+          <a:lstStyle/>
+          <a:p/>
+        </p:txBody>
+      </p:sp>
+      <p:sp>
+        <p:nvSpPr>
+          <p:cNvPr id="24" name="TarjetaTxt 6"/>
+          <p:cNvSpPr txBox="1"/>
+          <p:nvPr/>
+        </p:nvSpPr>
+        <p:spPr>
+          <a:xfrm>
+            <a:off x="6259068" y="4023360"/>
+            <a:ext cx="2526030" cy="1060704"/>
+          </a:xfrm>
+          <a:prstGeom prst="rect">
+            <a:avLst/>
+          </a:prstGeom>
+          <a:noFill/>
+        </p:spPr>
+        <p:txBody>
+          <a:bodyPr wrap="square" anchor="t" lIns="45720" rIns="45720" tIns="27432" bIns="27432">
+            <a:normAutofit/>
+          </a:bodyPr>
+          <a:lstStyle/>
+          <a:p>
+            <a:pPr algn="l"/>
+            <a:r>
+              <a:rPr sz="1100" b="1">
+                <a:solidFill>
+                  <a:srgbClr val="157355"/>
+                </a:solidFill>
+                <a:latin typeface="Bricolage Grotesque"/>
+              </a:rPr>
+              <a:t>marco</a:t>
+            </a:r>
+          </a:p>
+          <a:p>
+            <a:pPr algn="l"/>
+            <a:r>
+              <a:rPr sz="1000">
+                <a:solidFill>
+                  <a:srgbClr val="20242E"/>
+                </a:solidFill>
+                <a:latin typeface="Inter"/>
+              </a:rPr>
+              <a:t>Su … la tocaba, entonces …</a:t>
+            </a:r>
+          </a:p>
+        </p:txBody>
+      </p:sp>
+      <p:sp>
+        <p:nvSpPr>
+          <p:cNvPr id="25" name="Tarjeta 7"/>
+          <p:cNvSpPr/>
+          <p:nvPr/>
+        </p:nvSpPr>
+        <p:spPr>
+          <a:xfrm>
+            <a:off x="9022842" y="3968496"/>
+            <a:ext cx="2708910" cy="1170432"/>
+          </a:xfrm>
+          <a:prstGeom prst="roundRect">
+            <a:avLst>
+              <a:gd name="adj" fmla="val 6000"/>
+            </a:avLst>
+          </a:prstGeom>
+          <a:solidFill>
+            <a:srgbClr val="FFFFFF"/>
+          </a:solidFill>
+          <a:ln w="12700">
+            <a:solidFill>
+              <a:srgbClr val="E4E3DE"/>
+            </a:solidFill>
+          </a:ln>
+          <a:effectLst/>
+        </p:spPr>
+        <p:style>
+          <a:lnRef idx="1">
+            <a:schemeClr val="accent1"/>
+          </a:lnRef>
+          <a:fillRef idx="3">
+            <a:schemeClr val="accent1"/>
+          </a:fillRef>
+          <a:effectRef idx="2">
+            <a:schemeClr val="accent1"/>
+          </a:effectRef>
+          <a:fontRef idx="minor">
+            <a:schemeClr val="lt1"/>
+          </a:fontRef>
+        </p:style>
+        <p:txBody>
+          <a:bodyPr rtlCol="0" anchor="ctr"/>
+          <a:lstStyle/>
+          <a:p/>
+        </p:txBody>
+      </p:sp>
+      <p:sp>
+        <p:nvSpPr>
+          <p:cNvPr id="26" name="TarjetaTxt 7"/>
+          <p:cNvSpPr txBox="1"/>
+          <p:nvPr/>
+        </p:nvSpPr>
+        <p:spPr>
+          <a:xfrm>
+            <a:off x="9114282" y="4023360"/>
+            <a:ext cx="2526030" cy="1060704"/>
+          </a:xfrm>
+          <a:prstGeom prst="rect">
+            <a:avLst/>
+          </a:prstGeom>
+          <a:noFill/>
+        </p:spPr>
+        <p:txBody>
+          <a:bodyPr wrap="square" anchor="t" lIns="45720" rIns="45720" tIns="27432" bIns="27432">
+            <a:normAutofit/>
+          </a:bodyPr>
+          <a:lstStyle/>
+          <a:p>
+            <a:pPr algn="l"/>
+            <a:r>
+              <a:rPr sz="1100" b="1">
+                <a:solidFill>
+                  <a:srgbClr val="157355"/>
+                </a:solidFill>
+                <a:latin typeface="Bricolage Grotesque"/>
+              </a:rPr>
+              <a:t>marco</a:t>
+            </a:r>
+          </a:p>
+          <a:p>
+            <a:pPr algn="l"/>
+            <a:r>
+              <a:rPr sz="1000">
+                <a:solidFill>
+                  <a:srgbClr val="20242E"/>
+                </a:solidFill>
+                <a:latin typeface="Inter"/>
+              </a:rPr>
+              <a:t>Nuestros … la usaban.</a:t>
+            </a:r>
+          </a:p>
+        </p:txBody>
+      </p:sp>
+      <p:sp>
+        <p:nvSpPr>
+          <p:cNvPr id="27" name="Tarjeta 8"/>
+          <p:cNvSpPr/>
+          <p:nvPr/>
+        </p:nvSpPr>
+        <p:spPr>
+          <a:xfrm>
+            <a:off x="457200" y="5266944"/>
+            <a:ext cx="2708910" cy="1170432"/>
+          </a:xfrm>
+          <a:prstGeom prst="roundRect">
+            <a:avLst>
+              <a:gd name="adj" fmla="val 6000"/>
+            </a:avLst>
+          </a:prstGeom>
+          <a:solidFill>
+            <a:srgbClr val="FFFFFF"/>
+          </a:solidFill>
+          <a:ln w="12700">
+            <a:solidFill>
+              <a:srgbClr val="E4E3DE"/>
+            </a:solidFill>
+          </a:ln>
+          <a:effectLst/>
+        </p:spPr>
+        <p:style>
+          <a:lnRef idx="1">
+            <a:schemeClr val="accent1"/>
+          </a:lnRef>
+          <a:fillRef idx="3">
+            <a:schemeClr val="accent1"/>
+          </a:fillRef>
+          <a:effectRef idx="2">
+            <a:schemeClr val="accent1"/>
+          </a:effectRef>
+          <a:fontRef idx="minor">
+            <a:schemeClr val="lt1"/>
+          </a:fontRef>
+        </p:style>
+        <p:txBody>
+          <a:bodyPr rtlCol="0" anchor="ctr"/>
+          <a:lstStyle/>
+          <a:p/>
+        </p:txBody>
+      </p:sp>
+      <p:sp>
+        <p:nvSpPr>
+          <p:cNvPr id="28" name="TarjetaTxt 8"/>
+          <p:cNvSpPr txBox="1"/>
+          <p:nvPr/>
+        </p:nvSpPr>
+        <p:spPr>
+          <a:xfrm>
+            <a:off x="548640" y="5321808"/>
+            <a:ext cx="2526030" cy="1060704"/>
+          </a:xfrm>
+          <a:prstGeom prst="rect">
+            <a:avLst/>
+          </a:prstGeom>
+          <a:noFill/>
+        </p:spPr>
+        <p:txBody>
+          <a:bodyPr wrap="square" anchor="t" lIns="45720" rIns="45720" tIns="27432" bIns="27432">
+            <a:normAutofit/>
+          </a:bodyPr>
+          <a:lstStyle/>
+          <a:p>
+            <a:pPr algn="l"/>
+            <a:r>
+              <a:rPr sz="1100" b="1">
+                <a:solidFill>
+                  <a:srgbClr val="157355"/>
+                </a:solidFill>
+                <a:latin typeface="Bricolage Grotesque"/>
+              </a:rPr>
+              <a:t>marco</a:t>
+            </a:r>
+          </a:p>
+          <a:p>
+            <a:pPr algn="l"/>
+            <a:r>
+              <a:rPr sz="1000">
+                <a:solidFill>
+                  <a:srgbClr val="20242E"/>
+                </a:solidFill>
+                <a:latin typeface="Inter"/>
+              </a:rPr>
+              <a:t>No estoy de acuerdo: sus … </a:t>
+            </a:r>
+          </a:p>
+        </p:txBody>
+      </p:sp>
+    </p:spTree>
+  </p:cSld>
+  <p:clrMapOvr>
+    <a:masterClrMapping/>
+  </p:clrMapOvr>
+</p:sld>
+</file>
+
+<file path=ppt/slides/slide27.xml><?xml version="1.0" encoding="utf-8"?>
+<p:sld xmlns:a="http://schemas.openxmlformats.org/drawingml/2006/main" xmlns:p="http://schemas.openxmlformats.org/presentationml/2006/main" xmlns:r="http://schemas.openxmlformats.org/officeDocument/2006/relationships">
+  <p:cSld>
+    <p:spTree>
+      <p:nvGrpSpPr>
+        <p:cNvPr id="1" name=""/>
+        <p:cNvGrpSpPr/>
+        <p:nvPr/>
+      </p:nvGrpSpPr>
+      <p:grpSpPr/>
+      <p:sp>
+        <p:nvSpPr>
+          <p:cNvPr id="2" name="Fondo"/>
+          <p:cNvSpPr/>
+          <p:nvPr/>
+        </p:nvSpPr>
+        <p:spPr>
+          <a:xfrm>
+            <a:off x="0" y="0"/>
+            <a:ext cx="12191695" cy="6858000"/>
+          </a:xfrm>
+          <a:prstGeom prst="rect">
+            <a:avLst/>
+          </a:prstGeom>
+          <a:solidFill>
+            <a:srgbClr val="FCFBF8"/>
+          </a:solidFill>
+          <a:ln>
+            <a:noFill/>
+          </a:ln>
+          <a:effectLst/>
+        </p:spPr>
+        <p:style>
+          <a:lnRef idx="1">
+            <a:schemeClr val="accent1"/>
+          </a:lnRef>
+          <a:fillRef idx="3">
+            <a:schemeClr val="accent1"/>
+          </a:fillRef>
+          <a:effectRef idx="2">
+            <a:schemeClr val="accent1"/>
+          </a:effectRef>
+          <a:fontRef idx="minor">
+            <a:schemeClr val="lt1"/>
+          </a:fontRef>
+        </p:style>
+        <p:txBody>
+          <a:bodyPr rtlCol="0" anchor="ctr"/>
+          <a:lstStyle/>
+          <a:p/>
+        </p:txBody>
+      </p:sp>
+      <p:sp>
+        <p:nvSpPr>
+          <p:cNvPr id="3" name="Cabecera"/>
+          <p:cNvSpPr/>
+          <p:nvPr/>
+        </p:nvSpPr>
+        <p:spPr>
+          <a:xfrm>
+            <a:off x="0" y="0"/>
+            <a:ext cx="12191695" cy="1078992"/>
+          </a:xfrm>
+          <a:prstGeom prst="rect">
+            <a:avLst/>
+          </a:prstGeom>
+          <a:solidFill>
+            <a:srgbClr val="1E9E74"/>
+          </a:solidFill>
+          <a:ln>
+            <a:noFill/>
+          </a:ln>
+          <a:effectLst/>
+        </p:spPr>
+        <p:style>
+          <a:lnRef idx="1">
+            <a:schemeClr val="accent1"/>
+          </a:lnRef>
+          <a:fillRef idx="3">
+            <a:schemeClr val="accent1"/>
+          </a:fillRef>
+          <a:effectRef idx="2">
+            <a:schemeClr val="accent1"/>
+          </a:effectRef>
+          <a:fontRef idx="minor">
+            <a:schemeClr val="lt1"/>
+          </a:fontRef>
+        </p:style>
+        <p:txBody>
+          <a:bodyPr rtlCol="0" anchor="ctr"/>
+          <a:lstStyle/>
+          <a:p/>
+        </p:txBody>
+      </p:sp>
+      <p:sp>
+        <p:nvSpPr>
+          <p:cNvPr id="4" name="Chip"/>
+          <p:cNvSpPr/>
+          <p:nvPr/>
+        </p:nvSpPr>
+        <p:spPr>
+          <a:xfrm>
+            <a:off x="457200" y="182880"/>
+            <a:ext cx="3017520" cy="292608"/>
+          </a:xfrm>
+          <a:prstGeom prst="roundRect">
+            <a:avLst>
+              <a:gd name="adj" fmla="val 50000"/>
+            </a:avLst>
+          </a:prstGeom>
+          <a:solidFill>
+            <a:srgbClr val="FFFFFF"/>
+          </a:solidFill>
+          <a:ln>
+            <a:noFill/>
+          </a:ln>
+          <a:effectLst/>
+        </p:spPr>
+        <p:style>
+          <a:lnRef idx="1">
+            <a:schemeClr val="accent1"/>
+          </a:lnRef>
+          <a:fillRef idx="3">
+            <a:schemeClr val="accent1"/>
+          </a:fillRef>
+          <a:effectRef idx="2">
+            <a:schemeClr val="accent1"/>
+          </a:effectRef>
+          <a:fontRef idx="minor">
+            <a:schemeClr val="lt1"/>
+          </a:fontRef>
+        </p:style>
+        <p:txBody>
+          <a:bodyPr rtlCol="0" anchor="ctr"/>
+          <a:lstStyle/>
+          <a:p/>
+        </p:txBody>
+      </p:sp>
+      <p:sp>
+        <p:nvSpPr>
+          <p:cNvPr id="5" name="ChipTxt"/>
+          <p:cNvSpPr txBox="1"/>
+          <p:nvPr/>
+        </p:nvSpPr>
+        <p:spPr>
+          <a:xfrm>
+            <a:off x="457200" y="173736"/>
+            <a:ext cx="3017520" cy="310896"/>
+          </a:xfrm>
+          <a:prstGeom prst="rect">
+            <a:avLst/>
+          </a:prstGeom>
+          <a:noFill/>
+        </p:spPr>
+        <p:txBody>
+          <a:bodyPr wrap="square" anchor="ctr" lIns="45720" rIns="45720" tIns="27432" bIns="27432">
+            <a:normAutofit/>
+          </a:bodyPr>
+          <a:lstStyle/>
+          <a:p>
+            <a:pPr algn="ctr"/>
+            <a:r>
+              <a:rPr sz="950" b="1">
+                <a:solidFill>
+                  <a:srgbClr val="157355"/>
+                </a:solidFill>
+                <a:latin typeface="Inter"/>
+              </a:rPr>
+              <a:t>RETO 8 · FORENSISCH</a:t>
+            </a:r>
+          </a:p>
+        </p:txBody>
+      </p:sp>
+      <p:sp>
+        <p:nvSpPr>
+          <p:cNvPr id="6" name="Titulo"/>
+          <p:cNvSpPr txBox="1"/>
+          <p:nvPr/>
+        </p:nvSpPr>
+        <p:spPr>
+          <a:xfrm>
+            <a:off x="457200" y="502920"/>
+            <a:ext cx="8412480" cy="475488"/>
+          </a:xfrm>
+          <a:prstGeom prst="rect">
+            <a:avLst/>
+          </a:prstGeom>
+          <a:noFill/>
+        </p:spPr>
+        <p:txBody>
+          <a:bodyPr wrap="square" anchor="t" lIns="45720" rIns="45720" tIns="27432" bIns="27432">
+            <a:normAutofit/>
+          </a:bodyPr>
+          <a:lstStyle/>
+          <a:p>
+            <a:pPr algn="l"/>
+            <a:r>
+              <a:rPr sz="2700" b="1">
+                <a:solidFill>
+                  <a:srgbClr val="FFFFFF"/>
+                </a:solidFill>
+                <a:latin typeface="Bricolage Grotesque"/>
+              </a:rPr>
+              <a:t>La foto sin pie</a:t>
+            </a:r>
+          </a:p>
+        </p:txBody>
+      </p:sp>
+      <p:sp>
+        <p:nvSpPr>
+          <p:cNvPr id="7" name="Badges"/>
+          <p:cNvSpPr txBox="1"/>
+          <p:nvPr/>
+        </p:nvSpPr>
+        <p:spPr>
+          <a:xfrm>
+            <a:off x="9052560" y="256032"/>
+            <a:ext cx="2651760" cy="640080"/>
+          </a:xfrm>
+          <a:prstGeom prst="rect">
+            <a:avLst/>
+          </a:prstGeom>
+          <a:noFill/>
+        </p:spPr>
+        <p:txBody>
+          <a:bodyPr wrap="square" anchor="t" lIns="45720" rIns="45720" tIns="27432" bIns="27432">
+            <a:normAutofit/>
+          </a:bodyPr>
+          <a:lstStyle/>
+          <a:p>
+            <a:pPr algn="r"/>
+            <a:r>
+              <a:rPr sz="1000">
+                <a:solidFill>
+                  <a:srgbClr val="E4F4EE"/>
+                </a:solidFill>
+                <a:latin typeface="Inter"/>
+              </a:rPr>
+              <a:t>👥 En parejas</a:t>
+            </a:r>
+          </a:p>
+          <a:p>
+            <a:pPr algn="r"/>
+            <a:r>
+              <a:rPr sz="1000">
+                <a:solidFill>
+                  <a:srgbClr val="E4F4EE"/>
+                </a:solidFill>
+                <a:latin typeface="Inter"/>
+              </a:rPr>
+              <a:t>± 10 min · ★★★</a:t>
+            </a:r>
+          </a:p>
+        </p:txBody>
+      </p:sp>
+      <p:sp>
+        <p:nvSpPr>
+          <p:cNvPr id="8" name="Gancho"/>
+          <p:cNvSpPr txBox="1"/>
+          <p:nvPr/>
+        </p:nvSpPr>
+        <p:spPr>
+          <a:xfrm>
+            <a:off x="457200" y="1225296"/>
+            <a:ext cx="11274552" cy="566928"/>
+          </a:xfrm>
+          <a:prstGeom prst="rect">
+            <a:avLst/>
+          </a:prstGeom>
+          <a:noFill/>
+        </p:spPr>
+        <p:txBody>
+          <a:bodyPr wrap="square" anchor="t" lIns="45720" rIns="45720" tIns="27432" bIns="27432">
+            <a:normAutofit/>
+          </a:bodyPr>
+          <a:lstStyle/>
+          <a:p>
+            <a:pPr algn="l"/>
+            <a:r>
+              <a:rPr sz="1600" b="1">
+                <a:solidFill>
+                  <a:srgbClr val="157355"/>
+                </a:solidFill>
+                <a:latin typeface="Bricolage Grotesque"/>
+              </a:rPr>
+              <a:t>Una foto, tres pies de foto. Solo uno dice la verdad.</a:t>
+            </a:r>
+          </a:p>
+          <a:p>
+            <a:pPr algn="l"/>
+            <a:r>
+              <a:rPr sz="1100" i="1">
+                <a:solidFill>
+                  <a:srgbClr val="6A6E78"/>
+                </a:solidFill>
+                <a:latin typeface="Inter"/>
+              </a:rPr>
+              <a:t>Eén foto, drie onderschriften. Maar één ervan klopt.</a:t>
+            </a:r>
+          </a:p>
+        </p:txBody>
+      </p:sp>
+      <p:sp>
+        <p:nvSpPr>
+          <p:cNvPr id="9" name="ReglaCaja"/>
+          <p:cNvSpPr/>
+          <p:nvPr/>
+        </p:nvSpPr>
+        <p:spPr>
+          <a:xfrm>
+            <a:off x="457200" y="1847088"/>
+            <a:ext cx="11274552" cy="658368"/>
+          </a:xfrm>
+          <a:prstGeom prst="roundRect">
+            <a:avLst>
+              <a:gd name="adj" fmla="val 5000"/>
+            </a:avLst>
+          </a:prstGeom>
+          <a:solidFill>
+            <a:srgbClr val="FBF3D6"/>
+          </a:solidFill>
+          <a:ln>
+            <a:noFill/>
+          </a:ln>
+          <a:effectLst/>
+        </p:spPr>
+        <p:style>
+          <a:lnRef idx="1">
+            <a:schemeClr val="accent1"/>
+          </a:lnRef>
+          <a:fillRef idx="3">
+            <a:schemeClr val="accent1"/>
+          </a:fillRef>
+          <a:effectRef idx="2">
+            <a:schemeClr val="accent1"/>
+          </a:effectRef>
+          <a:fontRef idx="minor">
+            <a:schemeClr val="lt1"/>
+          </a:fontRef>
+        </p:style>
+        <p:txBody>
+          <a:bodyPr rtlCol="0" anchor="ctr"/>
+          <a:lstStyle/>
+          <a:p/>
+        </p:txBody>
+      </p:sp>
+      <p:sp>
+        <p:nvSpPr>
+          <p:cNvPr id="10" name="ReglaTxt"/>
+          <p:cNvSpPr txBox="1"/>
+          <p:nvPr/>
+        </p:nvSpPr>
+        <p:spPr>
+          <a:xfrm>
+            <a:off x="603504" y="1883664"/>
+            <a:ext cx="10972800" cy="585216"/>
+          </a:xfrm>
+          <a:prstGeom prst="rect">
+            <a:avLst/>
+          </a:prstGeom>
+          <a:noFill/>
+        </p:spPr>
+        <p:txBody>
+          <a:bodyPr wrap="square" anchor="t" lIns="45720" rIns="45720" tIns="27432" bIns="27432">
+            <a:normAutofit/>
+          </a:bodyPr>
+          <a:lstStyle/>
+          <a:p>
+            <a:pPr algn="l"/>
+            <a:r>
+              <a:rPr sz="850" b="1">
+                <a:solidFill>
+                  <a:srgbClr val="B7860B"/>
+                </a:solidFill>
+                <a:latin typeface="Inter"/>
+              </a:rPr>
+              <a:t>LA REGLA DEL RETO</a:t>
+            </a:r>
+          </a:p>
+          <a:p>
+            <a:pPr algn="l"/>
+            <a:r>
+              <a:rPr sz="1100">
+                <a:solidFill>
+                  <a:srgbClr val="20242E"/>
+                </a:solidFill>
+                <a:latin typeface="Inter"/>
+              </a:rPr>
+              <a:t>Je moet het verraderlijke wóórd aanwijzen, niet het onderschrift. Wie het juiste kiest maar het woord niet vindt, heeft geraden.</a:t>
+            </a:r>
+          </a:p>
+        </p:txBody>
+      </p:sp>
+      <p:sp>
+        <p:nvSpPr>
+          <p:cNvPr id="11" name="Tarjeta 0"/>
+          <p:cNvSpPr/>
+          <p:nvPr/>
+        </p:nvSpPr>
+        <p:spPr>
+          <a:xfrm>
+            <a:off x="457200" y="2670048"/>
+            <a:ext cx="2708910" cy="1170432"/>
+          </a:xfrm>
+          <a:prstGeom prst="roundRect">
+            <a:avLst>
+              <a:gd name="adj" fmla="val 6000"/>
+            </a:avLst>
+          </a:prstGeom>
+          <a:solidFill>
+            <a:srgbClr val="FFFFFF"/>
+          </a:solidFill>
+          <a:ln w="12700">
+            <a:solidFill>
+              <a:srgbClr val="E4E3DE"/>
+            </a:solidFill>
+          </a:ln>
+          <a:effectLst/>
+        </p:spPr>
+        <p:style>
+          <a:lnRef idx="1">
+            <a:schemeClr val="accent1"/>
+          </a:lnRef>
+          <a:fillRef idx="3">
+            <a:schemeClr val="accent1"/>
+          </a:fillRef>
+          <a:effectRef idx="2">
+            <a:schemeClr val="accent1"/>
+          </a:effectRef>
+          <a:fontRef idx="minor">
+            <a:schemeClr val="lt1"/>
+          </a:fontRef>
+        </p:style>
+        <p:txBody>
+          <a:bodyPr rtlCol="0" anchor="ctr"/>
+          <a:lstStyle/>
+          <a:p/>
+        </p:txBody>
+      </p:sp>
+      <p:sp>
+        <p:nvSpPr>
+          <p:cNvPr id="12" name="TarjetaTxt 0"/>
+          <p:cNvSpPr txBox="1"/>
+          <p:nvPr/>
+        </p:nvSpPr>
+        <p:spPr>
+          <a:xfrm>
+            <a:off x="548640" y="2724912"/>
+            <a:ext cx="2526030" cy="1060704"/>
+          </a:xfrm>
+          <a:prstGeom prst="rect">
+            <a:avLst/>
+          </a:prstGeom>
+          <a:noFill/>
+        </p:spPr>
+        <p:txBody>
+          <a:bodyPr wrap="square" anchor="t" lIns="45720" rIns="45720" tIns="27432" bIns="27432">
+            <a:normAutofit/>
+          </a:bodyPr>
+          <a:lstStyle/>
+          <a:p>
+            <a:pPr algn="l"/>
+            <a:r>
+              <a:rPr sz="1100" b="1">
+                <a:solidFill>
+                  <a:srgbClr val="157355"/>
+                </a:solidFill>
+                <a:latin typeface="Bricolage Grotesque"/>
+              </a:rPr>
+              <a:t>Foto 1</a:t>
+            </a:r>
+          </a:p>
+          <a:p>
+            <a:pPr algn="l"/>
+            <a:r>
+              <a:rPr sz="1000">
+                <a:solidFill>
+                  <a:srgbClr val="20242E"/>
+                </a:solidFill>
+                <a:latin typeface="Inter"/>
+              </a:rPr>
+              <a:t>Una chica sonríe en una fiesta, rodeada de gente.</a:t>
+            </a:r>
+          </a:p>
+        </p:txBody>
+      </p:sp>
+      <p:sp>
+        <p:nvSpPr>
+          <p:cNvPr id="13" name="Tarjeta 1"/>
+          <p:cNvSpPr/>
+          <p:nvPr/>
+        </p:nvSpPr>
+        <p:spPr>
+          <a:xfrm>
+            <a:off x="3312414" y="2670048"/>
+            <a:ext cx="2708910" cy="1170432"/>
+          </a:xfrm>
+          <a:prstGeom prst="roundRect">
+            <a:avLst>
+              <a:gd name="adj" fmla="val 6000"/>
+            </a:avLst>
+          </a:prstGeom>
+          <a:solidFill>
+            <a:srgbClr val="FFFFFF"/>
+          </a:solidFill>
+          <a:ln w="12700">
+            <a:solidFill>
+              <a:srgbClr val="E4E3DE"/>
+            </a:solidFill>
+          </a:ln>
+          <a:effectLst/>
+        </p:spPr>
+        <p:style>
+          <a:lnRef idx="1">
+            <a:schemeClr val="accent1"/>
+          </a:lnRef>
+          <a:fillRef idx="3">
+            <a:schemeClr val="accent1"/>
+          </a:fillRef>
+          <a:effectRef idx="2">
+            <a:schemeClr val="accent1"/>
+          </a:effectRef>
+          <a:fontRef idx="minor">
+            <a:schemeClr val="lt1"/>
+          </a:fontRef>
+        </p:style>
+        <p:txBody>
+          <a:bodyPr rtlCol="0" anchor="ctr"/>
+          <a:lstStyle/>
+          <a:p/>
+        </p:txBody>
+      </p:sp>
+      <p:sp>
+        <p:nvSpPr>
+          <p:cNvPr id="14" name="TarjetaTxt 1"/>
+          <p:cNvSpPr txBox="1"/>
+          <p:nvPr/>
+        </p:nvSpPr>
+        <p:spPr>
+          <a:xfrm>
+            <a:off x="3403854" y="2724912"/>
+            <a:ext cx="2526030" cy="859536"/>
+          </a:xfrm>
+          <a:prstGeom prst="rect">
+            <a:avLst/>
+          </a:prstGeom>
+          <a:noFill/>
+        </p:spPr>
+        <p:txBody>
+          <a:bodyPr wrap="square" anchor="t" lIns="45720" rIns="45720" tIns="27432" bIns="27432">
+            <a:normAutofit/>
+          </a:bodyPr>
+          <a:lstStyle/>
+          <a:p>
+            <a:pPr algn="l"/>
+            <a:r>
+              <a:rPr sz="1100" b="1">
+                <a:solidFill>
+                  <a:srgbClr val="157355"/>
+                </a:solidFill>
+                <a:latin typeface="Bricolage Grotesque"/>
+              </a:rPr>
+              <a:t/>
+            </a:r>
+          </a:p>
+          <a:p>
+            <a:pPr algn="l"/>
+            <a:r>
+              <a:rPr sz="1000">
+                <a:solidFill>
+                  <a:srgbClr val="20242E"/>
+                </a:solidFill>
+                <a:latin typeface="Inter"/>
+              </a:rPr>
+              <a:t>Está contenta porque es su cumpleaños.</a:t>
+            </a:r>
+          </a:p>
+        </p:txBody>
+      </p:sp>
+      <p:sp>
+        <p:nvSpPr>
+          <p:cNvPr id="15" name="Onthul 1"/>
+          <p:cNvSpPr/>
+          <p:nvPr/>
+        </p:nvSpPr>
+        <p:spPr>
+          <a:xfrm>
+            <a:off x="3403854" y="3547872"/>
+            <a:ext cx="2526030" cy="237744"/>
+          </a:xfrm>
+          <a:prstGeom prst="roundRect">
+            <a:avLst>
+              <a:gd name="adj" fmla="val 20000"/>
+            </a:avLst>
+          </a:prstGeom>
+          <a:solidFill>
+            <a:srgbClr val="E4F4EE"/>
+          </a:solidFill>
+          <a:ln>
+            <a:noFill/>
+          </a:ln>
+          <a:effectLst/>
+        </p:spPr>
+        <p:style>
+          <a:lnRef idx="1">
+            <a:schemeClr val="accent1"/>
+          </a:lnRef>
+          <a:fillRef idx="3">
+            <a:schemeClr val="accent1"/>
+          </a:fillRef>
+          <a:effectRef idx="2">
+            <a:schemeClr val="accent1"/>
+          </a:effectRef>
+          <a:fontRef idx="minor">
+            <a:schemeClr val="lt1"/>
+          </a:fontRef>
+        </p:style>
+        <p:txBody>
+          <a:bodyPr rtlCol="0" anchor="ctr"/>
+          <a:lstStyle/>
+          <a:p/>
+        </p:txBody>
+      </p:sp>
+      <p:sp>
+        <p:nvSpPr>
+          <p:cNvPr id="16" name="OnthulTxt 1"/>
+          <p:cNvSpPr txBox="1"/>
+          <p:nvPr/>
+        </p:nvSpPr>
+        <p:spPr>
+          <a:xfrm>
+            <a:off x="3422142" y="3547872"/>
+            <a:ext cx="2489454" cy="237744"/>
+          </a:xfrm>
+          <a:prstGeom prst="rect">
+            <a:avLst/>
+          </a:prstGeom>
+          <a:noFill/>
+        </p:spPr>
+        <p:txBody>
+          <a:bodyPr wrap="square" anchor="ctr" lIns="45720" rIns="45720" tIns="27432" bIns="27432">
+            <a:normAutofit/>
+          </a:bodyPr>
+          <a:lstStyle/>
+          <a:p>
+            <a:pPr algn="l"/>
+            <a:r>
+              <a:rPr sz="850" b="1">
+                <a:solidFill>
+                  <a:srgbClr val="157355"/>
+                </a:solidFill>
+                <a:latin typeface="Inter"/>
+              </a:rPr>
+              <a:t>✓ está = hoe ze zich nu voelt</a:t>
+            </a:r>
+          </a:p>
+        </p:txBody>
+      </p:sp>
+      <p:sp>
+        <p:nvSpPr>
+          <p:cNvPr id="17" name="Tarjeta 2"/>
+          <p:cNvSpPr/>
+          <p:nvPr/>
+        </p:nvSpPr>
+        <p:spPr>
+          <a:xfrm>
+            <a:off x="6167628" y="2670048"/>
+            <a:ext cx="2708910" cy="1170432"/>
+          </a:xfrm>
+          <a:prstGeom prst="roundRect">
+            <a:avLst>
+              <a:gd name="adj" fmla="val 6000"/>
+            </a:avLst>
+          </a:prstGeom>
+          <a:solidFill>
+            <a:srgbClr val="FFFFFF"/>
+          </a:solidFill>
+          <a:ln w="12700">
+            <a:solidFill>
+              <a:srgbClr val="E4E3DE"/>
+            </a:solidFill>
+          </a:ln>
+          <a:effectLst/>
+        </p:spPr>
+        <p:style>
+          <a:lnRef idx="1">
+            <a:schemeClr val="accent1"/>
+          </a:lnRef>
+          <a:fillRef idx="3">
+            <a:schemeClr val="accent1"/>
+          </a:fillRef>
+          <a:effectRef idx="2">
+            <a:schemeClr val="accent1"/>
+          </a:effectRef>
+          <a:fontRef idx="minor">
+            <a:schemeClr val="lt1"/>
+          </a:fontRef>
+        </p:style>
+        <p:txBody>
+          <a:bodyPr rtlCol="0" anchor="ctr"/>
+          <a:lstStyle/>
+          <a:p/>
+        </p:txBody>
+      </p:sp>
+      <p:sp>
+        <p:nvSpPr>
+          <p:cNvPr id="18" name="TarjetaTxt 2"/>
+          <p:cNvSpPr txBox="1"/>
+          <p:nvPr/>
+        </p:nvSpPr>
+        <p:spPr>
+          <a:xfrm>
+            <a:off x="6259068" y="2724912"/>
+            <a:ext cx="2526030" cy="859536"/>
+          </a:xfrm>
+          <a:prstGeom prst="rect">
+            <a:avLst/>
+          </a:prstGeom>
+          <a:noFill/>
+        </p:spPr>
+        <p:txBody>
+          <a:bodyPr wrap="square" anchor="t" lIns="45720" rIns="45720" tIns="27432" bIns="27432">
+            <a:normAutofit/>
+          </a:bodyPr>
+          <a:lstStyle/>
+          <a:p>
+            <a:pPr algn="l"/>
+            <a:r>
+              <a:rPr sz="1100" b="1">
+                <a:solidFill>
+                  <a:srgbClr val="157355"/>
+                </a:solidFill>
+                <a:latin typeface="Bricolage Grotesque"/>
+              </a:rPr>
+              <a:t/>
+            </a:r>
+          </a:p>
+          <a:p>
+            <a:pPr algn="l"/>
+            <a:r>
+              <a:rPr sz="1000">
+                <a:solidFill>
+                  <a:srgbClr val="20242E"/>
+                </a:solidFill>
+                <a:latin typeface="Inter"/>
+              </a:rPr>
+              <a:t>Es contenta porque está su cumpleaños.</a:t>
+            </a:r>
+          </a:p>
+        </p:txBody>
+      </p:sp>
+      <p:sp>
+        <p:nvSpPr>
+          <p:cNvPr id="19" name="Onthul 2"/>
+          <p:cNvSpPr/>
+          <p:nvPr/>
+        </p:nvSpPr>
+        <p:spPr>
+          <a:xfrm>
+            <a:off x="6259068" y="3547872"/>
+            <a:ext cx="2526030" cy="237744"/>
+          </a:xfrm>
+          <a:prstGeom prst="roundRect">
+            <a:avLst>
+              <a:gd name="adj" fmla="val 20000"/>
+            </a:avLst>
+          </a:prstGeom>
+          <a:solidFill>
+            <a:srgbClr val="E4F4EE"/>
+          </a:solidFill>
+          <a:ln>
+            <a:noFill/>
+          </a:ln>
+          <a:effectLst/>
+        </p:spPr>
+        <p:style>
+          <a:lnRef idx="1">
+            <a:schemeClr val="accent1"/>
+          </a:lnRef>
+          <a:fillRef idx="3">
+            <a:schemeClr val="accent1"/>
+          </a:fillRef>
+          <a:effectRef idx="2">
+            <a:schemeClr val="accent1"/>
+          </a:effectRef>
+          <a:fontRef idx="minor">
+            <a:schemeClr val="lt1"/>
+          </a:fontRef>
+        </p:style>
+        <p:txBody>
+          <a:bodyPr rtlCol="0" anchor="ctr"/>
+          <a:lstStyle/>
+          <a:p/>
+        </p:txBody>
+      </p:sp>
+      <p:sp>
+        <p:nvSpPr>
+          <p:cNvPr id="20" name="OnthulTxt 2"/>
+          <p:cNvSpPr txBox="1"/>
+          <p:nvPr/>
+        </p:nvSpPr>
+        <p:spPr>
+          <a:xfrm>
+            <a:off x="6277356" y="3547872"/>
+            <a:ext cx="2489454" cy="237744"/>
+          </a:xfrm>
+          <a:prstGeom prst="rect">
+            <a:avLst/>
+          </a:prstGeom>
+          <a:noFill/>
+        </p:spPr>
+        <p:txBody>
+          <a:bodyPr wrap="square" anchor="ctr" lIns="45720" rIns="45720" tIns="27432" bIns="27432">
+            <a:normAutofit/>
+          </a:bodyPr>
+          <a:lstStyle/>
+          <a:p>
+            <a:pPr algn="l"/>
+            <a:r>
+              <a:rPr sz="850" b="1">
+                <a:solidFill>
+                  <a:srgbClr val="157355"/>
+                </a:solidFill>
+                <a:latin typeface="Inter"/>
+              </a:rPr>
+              <a:t>✗ ser/estar omgewisseld</a:t>
+            </a:r>
+          </a:p>
+        </p:txBody>
+      </p:sp>
+      <p:sp>
+        <p:nvSpPr>
+          <p:cNvPr id="21" name="Tarjeta 3"/>
+          <p:cNvSpPr/>
+          <p:nvPr/>
+        </p:nvSpPr>
+        <p:spPr>
+          <a:xfrm>
+            <a:off x="9022842" y="2670048"/>
+            <a:ext cx="2708910" cy="1170432"/>
+          </a:xfrm>
+          <a:prstGeom prst="roundRect">
+            <a:avLst>
+              <a:gd name="adj" fmla="val 6000"/>
+            </a:avLst>
+          </a:prstGeom>
+          <a:solidFill>
+            <a:srgbClr val="FFFFFF"/>
+          </a:solidFill>
+          <a:ln w="12700">
+            <a:solidFill>
+              <a:srgbClr val="E4E3DE"/>
+            </a:solidFill>
+          </a:ln>
+          <a:effectLst/>
+        </p:spPr>
+        <p:style>
+          <a:lnRef idx="1">
+            <a:schemeClr val="accent1"/>
+          </a:lnRef>
+          <a:fillRef idx="3">
+            <a:schemeClr val="accent1"/>
+          </a:fillRef>
+          <a:effectRef idx="2">
+            <a:schemeClr val="accent1"/>
+          </a:effectRef>
+          <a:fontRef idx="minor">
+            <a:schemeClr val="lt1"/>
+          </a:fontRef>
+        </p:style>
+        <p:txBody>
+          <a:bodyPr rtlCol="0" anchor="ctr"/>
+          <a:lstStyle/>
+          <a:p/>
+        </p:txBody>
+      </p:sp>
+      <p:sp>
+        <p:nvSpPr>
+          <p:cNvPr id="22" name="TarjetaTxt 3"/>
+          <p:cNvSpPr txBox="1"/>
+          <p:nvPr/>
+        </p:nvSpPr>
+        <p:spPr>
+          <a:xfrm>
+            <a:off x="9114282" y="2724912"/>
+            <a:ext cx="2526030" cy="859536"/>
+          </a:xfrm>
+          <a:prstGeom prst="rect">
+            <a:avLst/>
+          </a:prstGeom>
+          <a:noFill/>
+        </p:spPr>
+        <p:txBody>
+          <a:bodyPr wrap="square" anchor="t" lIns="45720" rIns="45720" tIns="27432" bIns="27432">
+            <a:normAutofit/>
+          </a:bodyPr>
+          <a:lstStyle/>
+          <a:p>
+            <a:pPr algn="l"/>
+            <a:r>
+              <a:rPr sz="1100" b="1">
+                <a:solidFill>
+                  <a:srgbClr val="157355"/>
+                </a:solidFill>
+                <a:latin typeface="Bricolage Grotesque"/>
+              </a:rPr>
+              <a:t/>
+            </a:r>
+          </a:p>
+          <a:p>
+            <a:pPr algn="l"/>
+            <a:r>
+              <a:rPr sz="1000">
+                <a:solidFill>
+                  <a:srgbClr val="20242E"/>
+                </a:solidFill>
+                <a:latin typeface="Inter"/>
+              </a:rPr>
+              <a:t>Está simpática y es cansada.</a:t>
+            </a:r>
+          </a:p>
+        </p:txBody>
+      </p:sp>
+      <p:sp>
+        <p:nvSpPr>
+          <p:cNvPr id="23" name="Onthul 3"/>
+          <p:cNvSpPr/>
+          <p:nvPr/>
+        </p:nvSpPr>
+        <p:spPr>
+          <a:xfrm>
+            <a:off x="9114282" y="3547872"/>
+            <a:ext cx="2526030" cy="237744"/>
+          </a:xfrm>
+          <a:prstGeom prst="roundRect">
+            <a:avLst>
+              <a:gd name="adj" fmla="val 20000"/>
+            </a:avLst>
+          </a:prstGeom>
+          <a:solidFill>
+            <a:srgbClr val="E4F4EE"/>
+          </a:solidFill>
+          <a:ln>
+            <a:noFill/>
+          </a:ln>
+          <a:effectLst/>
+        </p:spPr>
+        <p:style>
+          <a:lnRef idx="1">
+            <a:schemeClr val="accent1"/>
+          </a:lnRef>
+          <a:fillRef idx="3">
+            <a:schemeClr val="accent1"/>
+          </a:fillRef>
+          <a:effectRef idx="2">
+            <a:schemeClr val="accent1"/>
+          </a:effectRef>
+          <a:fontRef idx="minor">
+            <a:schemeClr val="lt1"/>
+          </a:fontRef>
+        </p:style>
+        <p:txBody>
+          <a:bodyPr rtlCol="0" anchor="ctr"/>
+          <a:lstStyle/>
+          <a:p/>
+        </p:txBody>
+      </p:sp>
+      <p:sp>
+        <p:nvSpPr>
+          <p:cNvPr id="24" name="OnthulTxt 3"/>
+          <p:cNvSpPr txBox="1"/>
+          <p:nvPr/>
+        </p:nvSpPr>
+        <p:spPr>
+          <a:xfrm>
+            <a:off x="9132570" y="3547872"/>
+            <a:ext cx="2489454" cy="237744"/>
+          </a:xfrm>
+          <a:prstGeom prst="rect">
+            <a:avLst/>
+          </a:prstGeom>
+          <a:noFill/>
+        </p:spPr>
+        <p:txBody>
+          <a:bodyPr wrap="square" anchor="ctr" lIns="45720" rIns="45720" tIns="27432" bIns="27432">
+            <a:normAutofit/>
+          </a:bodyPr>
+          <a:lstStyle/>
+          <a:p>
+            <a:pPr algn="l"/>
+            <a:r>
+              <a:rPr sz="850" b="1">
+                <a:solidFill>
+                  <a:srgbClr val="157355"/>
+                </a:solidFill>
+                <a:latin typeface="Inter"/>
+              </a:rPr>
+              <a:t>✗ eigenschap met estar, toestand…</a:t>
+            </a:r>
+          </a:p>
+        </p:txBody>
+      </p:sp>
+      <p:sp>
+        <p:nvSpPr>
+          <p:cNvPr id="25" name="Tarjeta 4"/>
+          <p:cNvSpPr/>
+          <p:nvPr/>
+        </p:nvSpPr>
+        <p:spPr>
+          <a:xfrm>
+            <a:off x="457200" y="3968496"/>
+            <a:ext cx="2708910" cy="1170432"/>
+          </a:xfrm>
+          <a:prstGeom prst="roundRect">
+            <a:avLst>
+              <a:gd name="adj" fmla="val 6000"/>
+            </a:avLst>
+          </a:prstGeom>
+          <a:solidFill>
+            <a:srgbClr val="FFFFFF"/>
+          </a:solidFill>
+          <a:ln w="12700">
+            <a:solidFill>
+              <a:srgbClr val="E4E3DE"/>
+            </a:solidFill>
+          </a:ln>
+          <a:effectLst/>
+        </p:spPr>
+        <p:style>
+          <a:lnRef idx="1">
+            <a:schemeClr val="accent1"/>
+          </a:lnRef>
+          <a:fillRef idx="3">
+            <a:schemeClr val="accent1"/>
+          </a:fillRef>
+          <a:effectRef idx="2">
+            <a:schemeClr val="accent1"/>
+          </a:effectRef>
+          <a:fontRef idx="minor">
+            <a:schemeClr val="lt1"/>
+          </a:fontRef>
+        </p:style>
+        <p:txBody>
+          <a:bodyPr rtlCol="0" anchor="ctr"/>
+          <a:lstStyle/>
+          <a:p/>
+        </p:txBody>
+      </p:sp>
+      <p:sp>
+        <p:nvSpPr>
+          <p:cNvPr id="26" name="TarjetaTxt 4"/>
+          <p:cNvSpPr txBox="1"/>
+          <p:nvPr/>
+        </p:nvSpPr>
+        <p:spPr>
+          <a:xfrm>
+            <a:off x="548640" y="4023360"/>
+            <a:ext cx="2526030" cy="1060704"/>
+          </a:xfrm>
+          <a:prstGeom prst="rect">
+            <a:avLst/>
+          </a:prstGeom>
+          <a:noFill/>
+        </p:spPr>
+        <p:txBody>
+          <a:bodyPr wrap="square" anchor="t" lIns="45720" rIns="45720" tIns="27432" bIns="27432">
+            <a:normAutofit/>
+          </a:bodyPr>
+          <a:lstStyle/>
+          <a:p>
+            <a:pPr algn="l"/>
+            <a:r>
+              <a:rPr sz="1100" b="1">
+                <a:solidFill>
+                  <a:srgbClr val="157355"/>
+                </a:solidFill>
+                <a:latin typeface="Bricolage Grotesque"/>
+              </a:rPr>
+              <a:t>Foto 2</a:t>
+            </a:r>
+          </a:p>
+          <a:p>
+            <a:pPr algn="l"/>
+            <a:r>
+              <a:rPr sz="1000">
+                <a:solidFill>
+                  <a:srgbClr val="20242E"/>
+                </a:solidFill>
+                <a:latin typeface="Inter"/>
+              </a:rPr>
+              <a:t>Un abuelo con delantal, en la cocina, cortando cebolla.</a:t>
+            </a:r>
+          </a:p>
+        </p:txBody>
+      </p:sp>
+      <p:sp>
+        <p:nvSpPr>
+          <p:cNvPr id="27" name="Tarjeta 5"/>
+          <p:cNvSpPr/>
+          <p:nvPr/>
+        </p:nvSpPr>
+        <p:spPr>
+          <a:xfrm>
+            <a:off x="3312414" y="3968496"/>
+            <a:ext cx="2708910" cy="1170432"/>
+          </a:xfrm>
+          <a:prstGeom prst="roundRect">
+            <a:avLst>
+              <a:gd name="adj" fmla="val 6000"/>
+            </a:avLst>
+          </a:prstGeom>
+          <a:solidFill>
+            <a:srgbClr val="FFFFFF"/>
+          </a:solidFill>
+          <a:ln w="12700">
+            <a:solidFill>
+              <a:srgbClr val="E4E3DE"/>
+            </a:solidFill>
+          </a:ln>
+          <a:effectLst/>
+        </p:spPr>
+        <p:style>
+          <a:lnRef idx="1">
+            <a:schemeClr val="accent1"/>
+          </a:lnRef>
+          <a:fillRef idx="3">
+            <a:schemeClr val="accent1"/>
+          </a:fillRef>
+          <a:effectRef idx="2">
+            <a:schemeClr val="accent1"/>
+          </a:effectRef>
+          <a:fontRef idx="minor">
+            <a:schemeClr val="lt1"/>
+          </a:fontRef>
+        </p:style>
+        <p:txBody>
+          <a:bodyPr rtlCol="0" anchor="ctr"/>
+          <a:lstStyle/>
+          <a:p/>
+        </p:txBody>
+      </p:sp>
+      <p:sp>
+        <p:nvSpPr>
+          <p:cNvPr id="28" name="TarjetaTxt 5"/>
+          <p:cNvSpPr txBox="1"/>
+          <p:nvPr/>
+        </p:nvSpPr>
+        <p:spPr>
+          <a:xfrm>
+            <a:off x="3403854" y="4023360"/>
+            <a:ext cx="2526030" cy="859536"/>
+          </a:xfrm>
+          <a:prstGeom prst="rect">
+            <a:avLst/>
+          </a:prstGeom>
+          <a:noFill/>
+        </p:spPr>
+        <p:txBody>
+          <a:bodyPr wrap="square" anchor="t" lIns="45720" rIns="45720" tIns="27432" bIns="27432">
+            <a:normAutofit/>
+          </a:bodyPr>
+          <a:lstStyle/>
+          <a:p>
+            <a:pPr algn="l"/>
+            <a:r>
+              <a:rPr sz="1100" b="1">
+                <a:solidFill>
+                  <a:srgbClr val="157355"/>
+                </a:solidFill>
+                <a:latin typeface="Bricolage Grotesque"/>
+              </a:rPr>
+              <a:t/>
+            </a:r>
+          </a:p>
+          <a:p>
+            <a:pPr algn="l"/>
+            <a:r>
+              <a:rPr sz="1000">
+                <a:solidFill>
+                  <a:srgbClr val="20242E"/>
+                </a:solidFill>
+                <a:latin typeface="Inter"/>
+              </a:rPr>
+              <a:t>Es cocinero y está en la cocina.</a:t>
+            </a:r>
+          </a:p>
+        </p:txBody>
+      </p:sp>
+      <p:sp>
+        <p:nvSpPr>
+          <p:cNvPr id="29" name="Onthul 5"/>
+          <p:cNvSpPr/>
+          <p:nvPr/>
+        </p:nvSpPr>
+        <p:spPr>
+          <a:xfrm>
+            <a:off x="3403854" y="4846320"/>
+            <a:ext cx="2526030" cy="237744"/>
+          </a:xfrm>
+          <a:prstGeom prst="roundRect">
+            <a:avLst>
+              <a:gd name="adj" fmla="val 20000"/>
+            </a:avLst>
+          </a:prstGeom>
+          <a:solidFill>
+            <a:srgbClr val="E4F4EE"/>
+          </a:solidFill>
+          <a:ln>
+            <a:noFill/>
+          </a:ln>
+          <a:effectLst/>
+        </p:spPr>
+        <p:style>
+          <a:lnRef idx="1">
+            <a:schemeClr val="accent1"/>
+          </a:lnRef>
+          <a:fillRef idx="3">
+            <a:schemeClr val="accent1"/>
+          </a:fillRef>
+          <a:effectRef idx="2">
+            <a:schemeClr val="accent1"/>
+          </a:effectRef>
+          <a:fontRef idx="minor">
+            <a:schemeClr val="lt1"/>
+          </a:fontRef>
+        </p:style>
+        <p:txBody>
+          <a:bodyPr rtlCol="0" anchor="ctr"/>
+          <a:lstStyle/>
+          <a:p/>
+        </p:txBody>
+      </p:sp>
+      <p:sp>
+        <p:nvSpPr>
+          <p:cNvPr id="30" name="OnthulTxt 5"/>
+          <p:cNvSpPr txBox="1"/>
+          <p:nvPr/>
+        </p:nvSpPr>
+        <p:spPr>
+          <a:xfrm>
+            <a:off x="3422142" y="4846320"/>
+            <a:ext cx="2489454" cy="237744"/>
+          </a:xfrm>
+          <a:prstGeom prst="rect">
+            <a:avLst/>
+          </a:prstGeom>
+          <a:noFill/>
+        </p:spPr>
+        <p:txBody>
+          <a:bodyPr wrap="square" anchor="ctr" lIns="45720" rIns="45720" tIns="27432" bIns="27432">
+            <a:normAutofit/>
+          </a:bodyPr>
+          <a:lstStyle/>
+          <a:p>
+            <a:pPr algn="l"/>
+            <a:r>
+              <a:rPr sz="850" b="1">
+                <a:solidFill>
+                  <a:srgbClr val="157355"/>
+                </a:solidFill>
+                <a:latin typeface="Inter"/>
+              </a:rPr>
+              <a:t>✓ beroep = ser, plaats = estar</a:t>
+            </a:r>
+          </a:p>
+        </p:txBody>
+      </p:sp>
+      <p:sp>
+        <p:nvSpPr>
+          <p:cNvPr id="31" name="Tarjeta 6"/>
+          <p:cNvSpPr/>
+          <p:nvPr/>
+        </p:nvSpPr>
+        <p:spPr>
+          <a:xfrm>
+            <a:off x="6167628" y="3968496"/>
+            <a:ext cx="2708910" cy="1170432"/>
+          </a:xfrm>
+          <a:prstGeom prst="roundRect">
+            <a:avLst>
+              <a:gd name="adj" fmla="val 6000"/>
+            </a:avLst>
+          </a:prstGeom>
+          <a:solidFill>
+            <a:srgbClr val="FFFFFF"/>
+          </a:solidFill>
+          <a:ln w="12700">
+            <a:solidFill>
+              <a:srgbClr val="E4E3DE"/>
+            </a:solidFill>
+          </a:ln>
+          <a:effectLst/>
+        </p:spPr>
+        <p:style>
+          <a:lnRef idx="1">
+            <a:schemeClr val="accent1"/>
+          </a:lnRef>
+          <a:fillRef idx="3">
+            <a:schemeClr val="accent1"/>
+          </a:fillRef>
+          <a:effectRef idx="2">
+            <a:schemeClr val="accent1"/>
+          </a:effectRef>
+          <a:fontRef idx="minor">
+            <a:schemeClr val="lt1"/>
+          </a:fontRef>
+        </p:style>
+        <p:txBody>
+          <a:bodyPr rtlCol="0" anchor="ctr"/>
+          <a:lstStyle/>
+          <a:p/>
+        </p:txBody>
+      </p:sp>
+      <p:sp>
+        <p:nvSpPr>
+          <p:cNvPr id="32" name="TarjetaTxt 6"/>
+          <p:cNvSpPr txBox="1"/>
+          <p:nvPr/>
+        </p:nvSpPr>
+        <p:spPr>
+          <a:xfrm>
+            <a:off x="6259068" y="4023360"/>
+            <a:ext cx="2526030" cy="859536"/>
+          </a:xfrm>
+          <a:prstGeom prst="rect">
+            <a:avLst/>
+          </a:prstGeom>
+          <a:noFill/>
+        </p:spPr>
+        <p:txBody>
+          <a:bodyPr wrap="square" anchor="t" lIns="45720" rIns="45720" tIns="27432" bIns="27432">
+            <a:normAutofit/>
+          </a:bodyPr>
+          <a:lstStyle/>
+          <a:p>
+            <a:pPr algn="l"/>
+            <a:r>
+              <a:rPr sz="1100" b="1">
+                <a:solidFill>
+                  <a:srgbClr val="157355"/>
+                </a:solidFill>
+                <a:latin typeface="Bricolage Grotesque"/>
+              </a:rPr>
+              <a:t/>
+            </a:r>
+          </a:p>
+          <a:p>
+            <a:pPr algn="l"/>
+            <a:r>
+              <a:rPr sz="1000">
+                <a:solidFill>
+                  <a:srgbClr val="20242E"/>
+                </a:solidFill>
+                <a:latin typeface="Inter"/>
+              </a:rPr>
+              <a:t>Está cocinero y es en la cocina.</a:t>
+            </a:r>
+          </a:p>
+        </p:txBody>
+      </p:sp>
+      <p:sp>
+        <p:nvSpPr>
+          <p:cNvPr id="33" name="Onthul 6"/>
+          <p:cNvSpPr/>
+          <p:nvPr/>
+        </p:nvSpPr>
+        <p:spPr>
+          <a:xfrm>
+            <a:off x="6259068" y="4846320"/>
+            <a:ext cx="2526030" cy="237744"/>
+          </a:xfrm>
+          <a:prstGeom prst="roundRect">
+            <a:avLst>
+              <a:gd name="adj" fmla="val 20000"/>
+            </a:avLst>
+          </a:prstGeom>
+          <a:solidFill>
+            <a:srgbClr val="E4F4EE"/>
+          </a:solidFill>
+          <a:ln>
+            <a:noFill/>
+          </a:ln>
+          <a:effectLst/>
+        </p:spPr>
+        <p:style>
+          <a:lnRef idx="1">
+            <a:schemeClr val="accent1"/>
+          </a:lnRef>
+          <a:fillRef idx="3">
+            <a:schemeClr val="accent1"/>
+          </a:fillRef>
+          <a:effectRef idx="2">
+            <a:schemeClr val="accent1"/>
+          </a:effectRef>
+          <a:fontRef idx="minor">
+            <a:schemeClr val="lt1"/>
+          </a:fontRef>
+        </p:style>
+        <p:txBody>
+          <a:bodyPr rtlCol="0" anchor="ctr"/>
+          <a:lstStyle/>
+          <a:p/>
+        </p:txBody>
+      </p:sp>
+      <p:sp>
+        <p:nvSpPr>
+          <p:cNvPr id="34" name="OnthulTxt 6"/>
+          <p:cNvSpPr txBox="1"/>
+          <p:nvPr/>
+        </p:nvSpPr>
+        <p:spPr>
+          <a:xfrm>
+            <a:off x="6277356" y="4846320"/>
+            <a:ext cx="2489454" cy="237744"/>
+          </a:xfrm>
+          <a:prstGeom prst="rect">
+            <a:avLst/>
+          </a:prstGeom>
+          <a:noFill/>
+        </p:spPr>
+        <p:txBody>
+          <a:bodyPr wrap="square" anchor="ctr" lIns="45720" rIns="45720" tIns="27432" bIns="27432">
+            <a:normAutofit/>
+          </a:bodyPr>
+          <a:lstStyle/>
+          <a:p>
+            <a:pPr algn="l"/>
+            <a:r>
+              <a:rPr sz="850" b="1">
+                <a:solidFill>
+                  <a:srgbClr val="157355"/>
+                </a:solidFill>
+                <a:latin typeface="Inter"/>
+              </a:rPr>
+              <a:t>✗ allebei omgewisseld</a:t>
+            </a:r>
+          </a:p>
+        </p:txBody>
+      </p:sp>
+      <p:sp>
+        <p:nvSpPr>
+          <p:cNvPr id="35" name="Tarjeta 7"/>
+          <p:cNvSpPr/>
+          <p:nvPr/>
+        </p:nvSpPr>
+        <p:spPr>
+          <a:xfrm>
+            <a:off x="9022842" y="3968496"/>
+            <a:ext cx="2708910" cy="1170432"/>
+          </a:xfrm>
+          <a:prstGeom prst="roundRect">
+            <a:avLst>
+              <a:gd name="adj" fmla="val 6000"/>
+            </a:avLst>
+          </a:prstGeom>
+          <a:solidFill>
+            <a:srgbClr val="FFFFFF"/>
+          </a:solidFill>
+          <a:ln w="12700">
+            <a:solidFill>
+              <a:srgbClr val="E4E3DE"/>
+            </a:solidFill>
+          </a:ln>
+          <a:effectLst/>
+        </p:spPr>
+        <p:style>
+          <a:lnRef idx="1">
+            <a:schemeClr val="accent1"/>
+          </a:lnRef>
+          <a:fillRef idx="3">
+            <a:schemeClr val="accent1"/>
+          </a:fillRef>
+          <a:effectRef idx="2">
+            <a:schemeClr val="accent1"/>
+          </a:effectRef>
+          <a:fontRef idx="minor">
+            <a:schemeClr val="lt1"/>
+          </a:fontRef>
+        </p:style>
+        <p:txBody>
+          <a:bodyPr rtlCol="0" anchor="ctr"/>
+          <a:lstStyle/>
+          <a:p/>
+        </p:txBody>
+      </p:sp>
+      <p:sp>
+        <p:nvSpPr>
+          <p:cNvPr id="36" name="TarjetaTxt 7"/>
+          <p:cNvSpPr txBox="1"/>
+          <p:nvPr/>
+        </p:nvSpPr>
+        <p:spPr>
+          <a:xfrm>
+            <a:off x="9114282" y="4023360"/>
+            <a:ext cx="2526030" cy="859536"/>
+          </a:xfrm>
+          <a:prstGeom prst="rect">
+            <a:avLst/>
+          </a:prstGeom>
+          <a:noFill/>
+        </p:spPr>
+        <p:txBody>
+          <a:bodyPr wrap="square" anchor="t" lIns="45720" rIns="45720" tIns="27432" bIns="27432">
+            <a:normAutofit/>
+          </a:bodyPr>
+          <a:lstStyle/>
+          <a:p>
+            <a:pPr algn="l"/>
+            <a:r>
+              <a:rPr sz="1100" b="1">
+                <a:solidFill>
+                  <a:srgbClr val="157355"/>
+                </a:solidFill>
+                <a:latin typeface="Bricolage Grotesque"/>
+              </a:rPr>
+              <a:t/>
+            </a:r>
+          </a:p>
+          <a:p>
+            <a:pPr algn="l"/>
+            <a:r>
+              <a:rPr sz="1000">
+                <a:solidFill>
+                  <a:srgbClr val="20242E"/>
+                </a:solidFill>
+                <a:latin typeface="Inter"/>
+              </a:rPr>
+              <a:t>Es en la cocina y está cocinero.</a:t>
+            </a:r>
+          </a:p>
+        </p:txBody>
+      </p:sp>
+      <p:sp>
+        <p:nvSpPr>
+          <p:cNvPr id="37" name="Onthul 7"/>
+          <p:cNvSpPr/>
+          <p:nvPr/>
+        </p:nvSpPr>
+        <p:spPr>
+          <a:xfrm>
+            <a:off x="9114282" y="4846320"/>
+            <a:ext cx="2526030" cy="237744"/>
+          </a:xfrm>
+          <a:prstGeom prst="roundRect">
+            <a:avLst>
+              <a:gd name="adj" fmla="val 20000"/>
+            </a:avLst>
+          </a:prstGeom>
+          <a:solidFill>
+            <a:srgbClr val="E4F4EE"/>
+          </a:solidFill>
+          <a:ln>
+            <a:noFill/>
+          </a:ln>
+          <a:effectLst/>
+        </p:spPr>
+        <p:style>
+          <a:lnRef idx="1">
+            <a:schemeClr val="accent1"/>
+          </a:lnRef>
+          <a:fillRef idx="3">
+            <a:schemeClr val="accent1"/>
+          </a:fillRef>
+          <a:effectRef idx="2">
+            <a:schemeClr val="accent1"/>
+          </a:effectRef>
+          <a:fontRef idx="minor">
+            <a:schemeClr val="lt1"/>
+          </a:fontRef>
+        </p:style>
+        <p:txBody>
+          <a:bodyPr rtlCol="0" anchor="ctr"/>
+          <a:lstStyle/>
+          <a:p/>
+        </p:txBody>
+      </p:sp>
+      <p:sp>
+        <p:nvSpPr>
+          <p:cNvPr id="38" name="OnthulTxt 7"/>
+          <p:cNvSpPr txBox="1"/>
+          <p:nvPr/>
+        </p:nvSpPr>
+        <p:spPr>
+          <a:xfrm>
+            <a:off x="9132570" y="4846320"/>
+            <a:ext cx="2489454" cy="237744"/>
+          </a:xfrm>
+          <a:prstGeom prst="rect">
+            <a:avLst/>
+          </a:prstGeom>
+          <a:noFill/>
+        </p:spPr>
+        <p:txBody>
+          <a:bodyPr wrap="square" anchor="ctr" lIns="45720" rIns="45720" tIns="27432" bIns="27432">
+            <a:normAutofit/>
+          </a:bodyPr>
+          <a:lstStyle/>
+          <a:p>
+            <a:pPr algn="l"/>
+            <a:r>
+              <a:rPr sz="850" b="1">
+                <a:solidFill>
+                  <a:srgbClr val="157355"/>
+                </a:solidFill>
+                <a:latin typeface="Inter"/>
+              </a:rPr>
+              <a:t>✗ idem, andere volgorde</a:t>
+            </a:r>
+          </a:p>
+        </p:txBody>
+      </p:sp>
+      <p:sp>
+        <p:nvSpPr>
+          <p:cNvPr id="39" name="Tarjeta 8"/>
+          <p:cNvSpPr/>
+          <p:nvPr/>
+        </p:nvSpPr>
+        <p:spPr>
+          <a:xfrm>
+            <a:off x="457200" y="5266944"/>
+            <a:ext cx="2708910" cy="1170432"/>
+          </a:xfrm>
+          <a:prstGeom prst="roundRect">
+            <a:avLst>
+              <a:gd name="adj" fmla="val 6000"/>
+            </a:avLst>
+          </a:prstGeom>
+          <a:solidFill>
+            <a:srgbClr val="FFFFFF"/>
+          </a:solidFill>
+          <a:ln w="12700">
+            <a:solidFill>
+              <a:srgbClr val="E4E3DE"/>
+            </a:solidFill>
+          </a:ln>
+          <a:effectLst/>
+        </p:spPr>
+        <p:style>
+          <a:lnRef idx="1">
+            <a:schemeClr val="accent1"/>
+          </a:lnRef>
+          <a:fillRef idx="3">
+            <a:schemeClr val="accent1"/>
+          </a:fillRef>
+          <a:effectRef idx="2">
+            <a:schemeClr val="accent1"/>
+          </a:effectRef>
+          <a:fontRef idx="minor">
+            <a:schemeClr val="lt1"/>
+          </a:fontRef>
+        </p:style>
+        <p:txBody>
+          <a:bodyPr rtlCol="0" anchor="ctr"/>
+          <a:lstStyle/>
+          <a:p/>
+        </p:txBody>
+      </p:sp>
+      <p:sp>
+        <p:nvSpPr>
+          <p:cNvPr id="40" name="TarjetaTxt 8"/>
+          <p:cNvSpPr txBox="1"/>
+          <p:nvPr/>
+        </p:nvSpPr>
+        <p:spPr>
+          <a:xfrm>
+            <a:off x="548640" y="5321808"/>
+            <a:ext cx="2526030" cy="1060704"/>
+          </a:xfrm>
+          <a:prstGeom prst="rect">
+            <a:avLst/>
+          </a:prstGeom>
+          <a:noFill/>
+        </p:spPr>
+        <p:txBody>
+          <a:bodyPr wrap="square" anchor="t" lIns="45720" rIns="45720" tIns="27432" bIns="27432">
+            <a:normAutofit/>
+          </a:bodyPr>
+          <a:lstStyle/>
+          <a:p>
+            <a:pPr algn="l"/>
+            <a:r>
+              <a:rPr sz="1100" b="1">
+                <a:solidFill>
+                  <a:srgbClr val="157355"/>
+                </a:solidFill>
+                <a:latin typeface="Bricolage Grotesque"/>
+              </a:rPr>
+              <a:t>Foto 3</a:t>
+            </a:r>
+          </a:p>
+          <a:p>
+            <a:pPr algn="l"/>
+            <a:r>
+              <a:rPr sz="1000">
+                <a:solidFill>
+                  <a:srgbClr val="20242E"/>
+                </a:solidFill>
+                <a:latin typeface="Inter"/>
+              </a:rPr>
+              <a:t>Dos hermanos idénticos, uno con gafas.</a:t>
+            </a:r>
+          </a:p>
+        </p:txBody>
+      </p:sp>
+      <p:sp>
+        <p:nvSpPr>
+          <p:cNvPr id="41" name="Tarjeta 9"/>
+          <p:cNvSpPr/>
+          <p:nvPr/>
+        </p:nvSpPr>
+        <p:spPr>
+          <a:xfrm>
+            <a:off x="3312414" y="5266944"/>
+            <a:ext cx="2708910" cy="1170432"/>
+          </a:xfrm>
+          <a:prstGeom prst="roundRect">
+            <a:avLst>
+              <a:gd name="adj" fmla="val 6000"/>
+            </a:avLst>
+          </a:prstGeom>
+          <a:solidFill>
+            <a:srgbClr val="FFFFFF"/>
+          </a:solidFill>
+          <a:ln w="12700">
+            <a:solidFill>
+              <a:srgbClr val="E4E3DE"/>
+            </a:solidFill>
+          </a:ln>
+          <a:effectLst/>
+        </p:spPr>
+        <p:style>
+          <a:lnRef idx="1">
+            <a:schemeClr val="accent1"/>
+          </a:lnRef>
+          <a:fillRef idx="3">
+            <a:schemeClr val="accent1"/>
+          </a:fillRef>
+          <a:effectRef idx="2">
+            <a:schemeClr val="accent1"/>
+          </a:effectRef>
+          <a:fontRef idx="minor">
+            <a:schemeClr val="lt1"/>
+          </a:fontRef>
+        </p:style>
+        <p:txBody>
+          <a:bodyPr rtlCol="0" anchor="ctr"/>
+          <a:lstStyle/>
+          <a:p/>
+        </p:txBody>
+      </p:sp>
+      <p:sp>
+        <p:nvSpPr>
+          <p:cNvPr id="42" name="TarjetaTxt 9"/>
+          <p:cNvSpPr txBox="1"/>
+          <p:nvPr/>
+        </p:nvSpPr>
+        <p:spPr>
+          <a:xfrm>
+            <a:off x="3403854" y="5321808"/>
+            <a:ext cx="2526030" cy="859536"/>
+          </a:xfrm>
+          <a:prstGeom prst="rect">
+            <a:avLst/>
+          </a:prstGeom>
+          <a:noFill/>
+        </p:spPr>
+        <p:txBody>
+          <a:bodyPr wrap="square" anchor="t" lIns="45720" rIns="45720" tIns="27432" bIns="27432">
+            <a:normAutofit/>
+          </a:bodyPr>
+          <a:lstStyle/>
+          <a:p>
+            <a:pPr algn="l"/>
+            <a:r>
+              <a:rPr sz="1100" b="1">
+                <a:solidFill>
+                  <a:srgbClr val="157355"/>
+                </a:solidFill>
+                <a:latin typeface="Bricolage Grotesque"/>
+              </a:rPr>
+              <a:t/>
+            </a:r>
+          </a:p>
+          <a:p>
+            <a:pPr algn="l"/>
+            <a:r>
+              <a:rPr sz="1000">
+                <a:solidFill>
+                  <a:srgbClr val="20242E"/>
+                </a:solidFill>
+                <a:latin typeface="Inter"/>
+              </a:rPr>
+              <a:t>Son gemelos, pero uno está con gafas.</a:t>
+            </a:r>
+          </a:p>
+        </p:txBody>
+      </p:sp>
+      <p:sp>
+        <p:nvSpPr>
+          <p:cNvPr id="43" name="Onthul 9"/>
+          <p:cNvSpPr/>
+          <p:nvPr/>
+        </p:nvSpPr>
+        <p:spPr>
+          <a:xfrm>
+            <a:off x="3403854" y="6144768"/>
+            <a:ext cx="2526030" cy="237744"/>
+          </a:xfrm>
+          <a:prstGeom prst="roundRect">
+            <a:avLst>
+              <a:gd name="adj" fmla="val 20000"/>
+            </a:avLst>
+          </a:prstGeom>
+          <a:solidFill>
+            <a:srgbClr val="E4F4EE"/>
+          </a:solidFill>
+          <a:ln>
+            <a:noFill/>
+          </a:ln>
+          <a:effectLst/>
+        </p:spPr>
+        <p:style>
+          <a:lnRef idx="1">
+            <a:schemeClr val="accent1"/>
+          </a:lnRef>
+          <a:fillRef idx="3">
+            <a:schemeClr val="accent1"/>
+          </a:fillRef>
+          <a:effectRef idx="2">
+            <a:schemeClr val="accent1"/>
+          </a:effectRef>
+          <a:fontRef idx="minor">
+            <a:schemeClr val="lt1"/>
+          </a:fontRef>
+        </p:style>
+        <p:txBody>
+          <a:bodyPr rtlCol="0" anchor="ctr"/>
+          <a:lstStyle/>
+          <a:p/>
+        </p:txBody>
+      </p:sp>
+      <p:sp>
+        <p:nvSpPr>
+          <p:cNvPr id="44" name="OnthulTxt 9"/>
+          <p:cNvSpPr txBox="1"/>
+          <p:nvPr/>
+        </p:nvSpPr>
+        <p:spPr>
+          <a:xfrm>
+            <a:off x="3422142" y="6144768"/>
+            <a:ext cx="2489454" cy="237744"/>
+          </a:xfrm>
+          <a:prstGeom prst="rect">
+            <a:avLst/>
+          </a:prstGeom>
+          <a:noFill/>
+        </p:spPr>
+        <p:txBody>
+          <a:bodyPr wrap="square" anchor="ctr" lIns="45720" rIns="45720" tIns="27432" bIns="27432">
+            <a:normAutofit/>
+          </a:bodyPr>
+          <a:lstStyle/>
+          <a:p>
+            <a:pPr algn="l"/>
+            <a:r>
+              <a:rPr sz="850" b="1">
+                <a:solidFill>
+                  <a:srgbClr val="157355"/>
+                </a:solidFill>
+                <a:latin typeface="Inter"/>
+              </a:rPr>
+              <a:t>✗ bril dragen = llevar, niet estar</a:t>
+            </a:r>
+          </a:p>
+        </p:txBody>
+      </p:sp>
+      <p:sp>
+        <p:nvSpPr>
+          <p:cNvPr id="45" name="Tarjeta 10"/>
+          <p:cNvSpPr/>
+          <p:nvPr/>
+        </p:nvSpPr>
+        <p:spPr>
+          <a:xfrm>
+            <a:off x="6167628" y="5266944"/>
+            <a:ext cx="2708910" cy="1170432"/>
+          </a:xfrm>
+          <a:prstGeom prst="roundRect">
+            <a:avLst>
+              <a:gd name="adj" fmla="val 6000"/>
+            </a:avLst>
+          </a:prstGeom>
+          <a:solidFill>
+            <a:srgbClr val="FFFFFF"/>
+          </a:solidFill>
+          <a:ln w="12700">
+            <a:solidFill>
+              <a:srgbClr val="E4E3DE"/>
+            </a:solidFill>
+          </a:ln>
+          <a:effectLst/>
+        </p:spPr>
+        <p:style>
+          <a:lnRef idx="1">
+            <a:schemeClr val="accent1"/>
+          </a:lnRef>
+          <a:fillRef idx="3">
+            <a:schemeClr val="accent1"/>
+          </a:fillRef>
+          <a:effectRef idx="2">
+            <a:schemeClr val="accent1"/>
+          </a:effectRef>
+          <a:fontRef idx="minor">
+            <a:schemeClr val="lt1"/>
+          </a:fontRef>
+        </p:style>
+        <p:txBody>
+          <a:bodyPr rtlCol="0" anchor="ctr"/>
+          <a:lstStyle/>
+          <a:p/>
+        </p:txBody>
+      </p:sp>
+      <p:sp>
+        <p:nvSpPr>
+          <p:cNvPr id="46" name="TarjetaTxt 10"/>
+          <p:cNvSpPr txBox="1"/>
+          <p:nvPr/>
+        </p:nvSpPr>
+        <p:spPr>
+          <a:xfrm>
+            <a:off x="6259068" y="5321808"/>
+            <a:ext cx="2526030" cy="859536"/>
+          </a:xfrm>
+          <a:prstGeom prst="rect">
+            <a:avLst/>
+          </a:prstGeom>
+          <a:noFill/>
+        </p:spPr>
+        <p:txBody>
+          <a:bodyPr wrap="square" anchor="t" lIns="45720" rIns="45720" tIns="27432" bIns="27432">
+            <a:normAutofit/>
+          </a:bodyPr>
+          <a:lstStyle/>
+          <a:p>
+            <a:pPr algn="l"/>
+            <a:r>
+              <a:rPr sz="1100" b="1">
+                <a:solidFill>
+                  <a:srgbClr val="157355"/>
+                </a:solidFill>
+                <a:latin typeface="Bricolage Grotesque"/>
+              </a:rPr>
+              <a:t/>
+            </a:r>
+          </a:p>
+          <a:p>
+            <a:pPr algn="l"/>
+            <a:r>
+              <a:rPr sz="1000">
+                <a:solidFill>
+                  <a:srgbClr val="20242E"/>
+                </a:solidFill>
+                <a:latin typeface="Inter"/>
+              </a:rPr>
+              <a:t>Son gemelos y uno lleva gafas.</a:t>
+            </a:r>
+          </a:p>
+        </p:txBody>
+      </p:sp>
+      <p:sp>
+        <p:nvSpPr>
+          <p:cNvPr id="47" name="Onthul 10"/>
+          <p:cNvSpPr/>
+          <p:nvPr/>
+        </p:nvSpPr>
+        <p:spPr>
+          <a:xfrm>
+            <a:off x="6259068" y="6144768"/>
+            <a:ext cx="2526030" cy="237744"/>
+          </a:xfrm>
+          <a:prstGeom prst="roundRect">
+            <a:avLst>
+              <a:gd name="adj" fmla="val 20000"/>
+            </a:avLst>
+          </a:prstGeom>
+          <a:solidFill>
+            <a:srgbClr val="E4F4EE"/>
+          </a:solidFill>
+          <a:ln>
+            <a:noFill/>
+          </a:ln>
+          <a:effectLst/>
+        </p:spPr>
+        <p:style>
+          <a:lnRef idx="1">
+            <a:schemeClr val="accent1"/>
+          </a:lnRef>
+          <a:fillRef idx="3">
+            <a:schemeClr val="accent1"/>
+          </a:fillRef>
+          <a:effectRef idx="2">
+            <a:schemeClr val="accent1"/>
+          </a:effectRef>
+          <a:fontRef idx="minor">
+            <a:schemeClr val="lt1"/>
+          </a:fontRef>
+        </p:style>
+        <p:txBody>
+          <a:bodyPr rtlCol="0" anchor="ctr"/>
+          <a:lstStyle/>
+          <a:p/>
+        </p:txBody>
+      </p:sp>
+      <p:sp>
+        <p:nvSpPr>
+          <p:cNvPr id="48" name="OnthulTxt 10"/>
+          <p:cNvSpPr txBox="1"/>
+          <p:nvPr/>
+        </p:nvSpPr>
+        <p:spPr>
+          <a:xfrm>
+            <a:off x="6277356" y="6144768"/>
+            <a:ext cx="2489454" cy="237744"/>
+          </a:xfrm>
+          <a:prstGeom prst="rect">
+            <a:avLst/>
+          </a:prstGeom>
+          <a:noFill/>
+        </p:spPr>
+        <p:txBody>
+          <a:bodyPr wrap="square" anchor="ctr" lIns="45720" rIns="45720" tIns="27432" bIns="27432">
+            <a:normAutofit/>
+          </a:bodyPr>
+          <a:lstStyle/>
+          <a:p>
+            <a:pPr algn="l"/>
+            <a:r>
+              <a:rPr sz="850" b="1">
+                <a:solidFill>
+                  <a:srgbClr val="157355"/>
+                </a:solidFill>
+                <a:latin typeface="Inter"/>
+              </a:rPr>
+              <a:t>✓ llevar voor kleding en bril</a:t>
+            </a:r>
+          </a:p>
+        </p:txBody>
+      </p:sp>
+      <p:sp>
+        <p:nvSpPr>
+          <p:cNvPr id="49" name="Tarjeta 11"/>
+          <p:cNvSpPr/>
+          <p:nvPr/>
+        </p:nvSpPr>
+        <p:spPr>
+          <a:xfrm>
+            <a:off x="9022842" y="5266944"/>
+            <a:ext cx="2708910" cy="1170432"/>
+          </a:xfrm>
+          <a:prstGeom prst="roundRect">
+            <a:avLst>
+              <a:gd name="adj" fmla="val 6000"/>
+            </a:avLst>
+          </a:prstGeom>
+          <a:solidFill>
+            <a:srgbClr val="FFFFFF"/>
+          </a:solidFill>
+          <a:ln w="12700">
+            <a:solidFill>
+              <a:srgbClr val="E4E3DE"/>
+            </a:solidFill>
+          </a:ln>
+          <a:effectLst/>
+        </p:spPr>
+        <p:style>
+          <a:lnRef idx="1">
+            <a:schemeClr val="accent1"/>
+          </a:lnRef>
+          <a:fillRef idx="3">
+            <a:schemeClr val="accent1"/>
+          </a:fillRef>
+          <a:effectRef idx="2">
+            <a:schemeClr val="accent1"/>
+          </a:effectRef>
+          <a:fontRef idx="minor">
+            <a:schemeClr val="lt1"/>
+          </a:fontRef>
+        </p:style>
+        <p:txBody>
+          <a:bodyPr rtlCol="0" anchor="ctr"/>
+          <a:lstStyle/>
+          <a:p/>
+        </p:txBody>
+      </p:sp>
+      <p:sp>
+        <p:nvSpPr>
+          <p:cNvPr id="50" name="TarjetaTxt 11"/>
+          <p:cNvSpPr txBox="1"/>
+          <p:nvPr/>
+        </p:nvSpPr>
+        <p:spPr>
+          <a:xfrm>
+            <a:off x="9114282" y="5321808"/>
+            <a:ext cx="2526030" cy="859536"/>
+          </a:xfrm>
+          <a:prstGeom prst="rect">
+            <a:avLst/>
+          </a:prstGeom>
+          <a:noFill/>
+        </p:spPr>
+        <p:txBody>
+          <a:bodyPr wrap="square" anchor="t" lIns="45720" rIns="45720" tIns="27432" bIns="27432">
+            <a:normAutofit/>
+          </a:bodyPr>
+          <a:lstStyle/>
+          <a:p>
+            <a:pPr algn="l"/>
+            <a:r>
+              <a:rPr sz="1100" b="1">
+                <a:solidFill>
+                  <a:srgbClr val="157355"/>
+                </a:solidFill>
+                <a:latin typeface="Bricolage Grotesque"/>
+              </a:rPr>
+              <a:t/>
+            </a:r>
+          </a:p>
+          <a:p>
+            <a:pPr algn="l"/>
+            <a:r>
+              <a:rPr sz="1000">
+                <a:solidFill>
+                  <a:srgbClr val="20242E"/>
+                </a:solidFill>
+                <a:latin typeface="Inter"/>
+              </a:rPr>
+              <a:t>Están gemelos y uno es gafas.</a:t>
+            </a:r>
+          </a:p>
+        </p:txBody>
+      </p:sp>
+      <p:sp>
+        <p:nvSpPr>
+          <p:cNvPr id="51" name="Onthul 11"/>
+          <p:cNvSpPr/>
+          <p:nvPr/>
+        </p:nvSpPr>
+        <p:spPr>
+          <a:xfrm>
+            <a:off x="9114282" y="6144768"/>
+            <a:ext cx="2526030" cy="237744"/>
+          </a:xfrm>
+          <a:prstGeom prst="roundRect">
+            <a:avLst>
+              <a:gd name="adj" fmla="val 20000"/>
+            </a:avLst>
+          </a:prstGeom>
+          <a:solidFill>
+            <a:srgbClr val="E4F4EE"/>
+          </a:solidFill>
+          <a:ln>
+            <a:noFill/>
+          </a:ln>
+          <a:effectLst/>
+        </p:spPr>
+        <p:style>
+          <a:lnRef idx="1">
+            <a:schemeClr val="accent1"/>
+          </a:lnRef>
+          <a:fillRef idx="3">
+            <a:schemeClr val="accent1"/>
+          </a:fillRef>
+          <a:effectRef idx="2">
+            <a:schemeClr val="accent1"/>
+          </a:effectRef>
+          <a:fontRef idx="minor">
+            <a:schemeClr val="lt1"/>
+          </a:fontRef>
+        </p:style>
+        <p:txBody>
+          <a:bodyPr rtlCol="0" anchor="ctr"/>
+          <a:lstStyle/>
+          <a:p/>
+        </p:txBody>
+      </p:sp>
+      <p:sp>
+        <p:nvSpPr>
+          <p:cNvPr id="52" name="OnthulTxt 11"/>
+          <p:cNvSpPr txBox="1"/>
+          <p:nvPr/>
+        </p:nvSpPr>
+        <p:spPr>
+          <a:xfrm>
+            <a:off x="9132570" y="6144768"/>
+            <a:ext cx="2489454" cy="237744"/>
+          </a:xfrm>
+          <a:prstGeom prst="rect">
+            <a:avLst/>
+          </a:prstGeom>
+          <a:noFill/>
+        </p:spPr>
+        <p:txBody>
+          <a:bodyPr wrap="square" anchor="ctr" lIns="45720" rIns="45720" tIns="27432" bIns="27432">
+            <a:normAutofit/>
+          </a:bodyPr>
+          <a:lstStyle/>
+          <a:p>
+            <a:pPr algn="l"/>
+            <a:r>
+              <a:rPr sz="850" b="1">
+                <a:solidFill>
+                  <a:srgbClr val="157355"/>
+                </a:solidFill>
+                <a:latin typeface="Inter"/>
+              </a:rPr>
+              <a:t>✗ familieband is ser, en «es gafa…</a:t>
+            </a:r>
+          </a:p>
+        </p:txBody>
+      </p:sp>
+    </p:spTree>
+  </p:cSld>
+  <p:clrMapOvr>
+    <a:masterClrMapping/>
+  </p:clrMapOvr>
+  <p:timing>
+    <p:tnLst>
+      <p:par>
+        <p:cTn id="1" dur="indefinite" restart="never" nodeType="tmRoot">
+          <p:childTnLst>
+            <p:seq concurrent="1" nextAc="seek">
+              <p:cTn id="2" dur="indefinite" nodeType="mainSeq">
+                <p:childTnLst>
+                  <p:par>
+                    <p:cTn id="5" fill="hold">
+                      <p:stCondLst>
+                        <p:cond delay="indefinite"/>
+                      </p:stCondLst>
+                      <p:childTnLst>
+                        <p:par>
+                          <p:cTn id="6" fill="hold">
+                            <p:stCondLst>
+                              <p:cond delay="0"/>
+                            </p:stCondLst>
+                            <p:childTnLst>
+                              <p:par>
+                                <p:cTn id="7" presetID="10" presetClass="entr" presetSubtype="0" fill="hold" grpId="0" nodeType="clickEffect">
+                                  <p:stCondLst>
+                                    <p:cond delay="0"/>
+                                  </p:stCondLst>
+                                  <p:childTnLst>
+                                    <p:set>
+                                      <p:cBhvr>
+                                        <p:cTn id="8" dur="1" fill="hold">
+                                          <p:stCondLst>
+                                            <p:cond delay="0"/>
+                                          </p:stCondLst>
+                                        </p:cTn>
+                                        <p:tgtEl>
+                                          <p:spTgt spid="15"/>
+                                        </p:tgtEl>
+                                        <p:attrNameLst>
+                                          <p:attrName>style.visibility</p:attrName>
+                                        </p:attrNameLst>
+                                      </p:cBhvr>
+                                      <p:to>
+                                        <p:strVal val="visible"/>
+                                      </p:to>
+                                    </p:set>
+                                    <p:animEffect transition="in" filter="fade">
+                                      <p:cBhvr>
+                                        <p:cTn id="9" dur="500"/>
+                                        <p:tgtEl>
+                                          <p:spTgt spid="15"/>
+                                        </p:tgtEl>
+                                      </p:cBhvr>
+                                    </p:animEffect>
+                                  </p:childTnLst>
+                                </p:cTn>
+                              </p:par>
+                            </p:childTnLst>
+                          </p:cTn>
+                        </p:par>
+                      </p:childTnLst>
+                    </p:cTn>
+                  </p:par>
+                  <p:par>
+                    <p:cTn id="10" fill="hold">
+                      <p:stCondLst>
+                        <p:cond delay="indefinite"/>
+                      </p:stCondLst>
+                      <p:childTnLst>
+                        <p:par>
+                          <p:cTn id="11" fill="hold">
+                            <p:stCondLst>
+                              <p:cond delay="0"/>
+                            </p:stCondLst>
+                            <p:childTnLst>
+                              <p:par>
+                                <p:cTn id="12" presetID="10" presetClass="entr" presetSubtype="0" fill="hold" grpId="0" nodeType="clickEffect">
+                                  <p:stCondLst>
+                                    <p:cond delay="0"/>
+                                  </p:stCondLst>
+                                  <p:childTnLst>
+                                    <p:set>
+                                      <p:cBhvr>
+                                        <p:cTn id="13" dur="1" fill="hold">
+                                          <p:stCondLst>
+                                            <p:cond delay="0"/>
+                                          </p:stCondLst>
+                                        </p:cTn>
+                                        <p:tgtEl>
+                                          <p:spTgt spid="16"/>
+                                        </p:tgtEl>
+                                        <p:attrNameLst>
+                                          <p:attrName>style.visibility</p:attrName>
+                                        </p:attrNameLst>
+                                      </p:cBhvr>
+                                      <p:to>
+                                        <p:strVal val="visible"/>
+                                      </p:to>
+                                    </p:set>
+                                    <p:animEffect transition="in" filter="fade">
+                                      <p:cBhvr>
+                                        <p:cTn id="14" dur="500"/>
+                                        <p:tgtEl>
+                                          <p:spTgt spid="16"/>
+                                        </p:tgtEl>
+                                      </p:cBhvr>
+                                    </p:animEffect>
+                                  </p:childTnLst>
+                                </p:cTn>
+                              </p:par>
+                            </p:childTnLst>
+                          </p:cTn>
+                        </p:par>
+                      </p:childTnLst>
+                    </p:cTn>
+                  </p:par>
+                  <p:par>
+                    <p:cTn id="15" fill="hold">
+                      <p:stCondLst>
+                        <p:cond delay="indefinite"/>
+                      </p:stCondLst>
+                      <p:childTnLst>
+                        <p:par>
+                          <p:cTn id="16" fill="hold">
+                            <p:stCondLst>
+                              <p:cond delay="0"/>
+                            </p:stCondLst>
+                            <p:childTnLst>
+                              <p:par>
+                                <p:cTn id="17" presetID="10" presetClass="entr" presetSubtype="0" fill="hold" grpId="0" nodeType="clickEffect">
+                                  <p:stCondLst>
+                                    <p:cond delay="0"/>
+                                  </p:stCondLst>
+                                  <p:childTnLst>
+                                    <p:set>
+                                      <p:cBhvr>
+                                        <p:cTn id="18" dur="1" fill="hold">
+                                          <p:stCondLst>
+                                            <p:cond delay="0"/>
+                                          </p:stCondLst>
+                                        </p:cTn>
+                                        <p:tgtEl>
+                                          <p:spTgt spid="19"/>
+                                        </p:tgtEl>
+                                        <p:attrNameLst>
+                                          <p:attrName>style.visibility</p:attrName>
+                                        </p:attrNameLst>
+                                      </p:cBhvr>
+                                      <p:to>
+                                        <p:strVal val="visible"/>
+                                      </p:to>
+                                    </p:set>
+                                    <p:animEffect transition="in" filter="fade">
+                                      <p:cBhvr>
+                                        <p:cTn id="19" dur="500"/>
+                                        <p:tgtEl>
+                                          <p:spTgt spid="19"/>
+                                        </p:tgtEl>
+                                      </p:cBhvr>
+                                    </p:animEffect>
+                                  </p:childTnLst>
+                                </p:cTn>
+                              </p:par>
+                            </p:childTnLst>
+                          </p:cTn>
+                        </p:par>
+                      </p:childTnLst>
+                    </p:cTn>
+                  </p:par>
+                  <p:par>
+                    <p:cTn id="20" fill="hold">
+                      <p:stCondLst>
+                        <p:cond delay="indefinite"/>
+                      </p:stCondLst>
+                      <p:childTnLst>
+                        <p:par>
+                          <p:cTn id="21" fill="hold">
+                            <p:stCondLst>
+                              <p:cond delay="0"/>
+                            </p:stCondLst>
+                            <p:childTnLst>
+                              <p:par>
+                                <p:cTn id="22" presetID="10" presetClass="entr" presetSubtype="0" fill="hold" grpId="0" nodeType="clickEffect">
+                                  <p:stCondLst>
+                                    <p:cond delay="0"/>
+                                  </p:stCondLst>
+                                  <p:childTnLst>
+                                    <p:set>
+                                      <p:cBhvr>
+                                        <p:cTn id="23" dur="1" fill="hold">
+                                          <p:stCondLst>
+                                            <p:cond delay="0"/>
+                                          </p:stCondLst>
+                                        </p:cTn>
+                                        <p:tgtEl>
+                                          <p:spTgt spid="20"/>
+                                        </p:tgtEl>
+                                        <p:attrNameLst>
+                                          <p:attrName>style.visibility</p:attrName>
+                                        </p:attrNameLst>
+                                      </p:cBhvr>
+                                      <p:to>
+                                        <p:strVal val="visible"/>
+                                      </p:to>
+                                    </p:set>
+                                    <p:animEffect transition="in" filter="fade">
+                                      <p:cBhvr>
+                                        <p:cTn id="24" dur="500"/>
+                                        <p:tgtEl>
+                                          <p:spTgt spid="20"/>
+                                        </p:tgtEl>
+                                      </p:cBhvr>
+                                    </p:animEffect>
+                                  </p:childTnLst>
+                                </p:cTn>
+                              </p:par>
+                            </p:childTnLst>
+                          </p:cTn>
+                        </p:par>
+                      </p:childTnLst>
+                    </p:cTn>
+                  </p:par>
+                  <p:par>
+                    <p:cTn id="25" fill="hold">
+                      <p:stCondLst>
+                        <p:cond delay="indefinite"/>
+                      </p:stCondLst>
+                      <p:childTnLst>
+                        <p:par>
+                          <p:cTn id="26" fill="hold">
+                            <p:stCondLst>
+                              <p:cond delay="0"/>
+                            </p:stCondLst>
+                            <p:childTnLst>
+                              <p:par>
+                                <p:cTn id="27" presetID="10" presetClass="entr" presetSubtype="0" fill="hold" grpId="0" nodeType="clickEffect">
+                                  <p:stCondLst>
+                                    <p:cond delay="0"/>
+                                  </p:stCondLst>
+                                  <p:childTnLst>
+                                    <p:set>
+                                      <p:cBhvr>
+                                        <p:cTn id="28" dur="1" fill="hold">
+                                          <p:stCondLst>
+                                            <p:cond delay="0"/>
+                                          </p:stCondLst>
+                                        </p:cTn>
+                                        <p:tgtEl>
+                                          <p:spTgt spid="23"/>
+                                        </p:tgtEl>
+                                        <p:attrNameLst>
+                                          <p:attrName>style.visibility</p:attrName>
+                                        </p:attrNameLst>
+                                      </p:cBhvr>
+                                      <p:to>
+                                        <p:strVal val="visible"/>
+                                      </p:to>
+                                    </p:set>
+                                    <p:animEffect transition="in" filter="fade">
+                                      <p:cBhvr>
+                                        <p:cTn id="29" dur="500"/>
+                                        <p:tgtEl>
+                                          <p:spTgt spid="23"/>
+                                        </p:tgtEl>
+                                      </p:cBhvr>
+                                    </p:animEffect>
+                                  </p:childTnLst>
+                                </p:cTn>
+                              </p:par>
+                            </p:childTnLst>
+                          </p:cTn>
+                        </p:par>
+                      </p:childTnLst>
+                    </p:cTn>
+                  </p:par>
+                  <p:par>
+                    <p:cTn id="30" fill="hold">
+                      <p:stCondLst>
+                        <p:cond delay="indefinite"/>
+                      </p:stCondLst>
+                      <p:childTnLst>
+                        <p:par>
+                          <p:cTn id="31" fill="hold">
+                            <p:stCondLst>
+                              <p:cond delay="0"/>
+                            </p:stCondLst>
+                            <p:childTnLst>
+                              <p:par>
+                                <p:cTn id="32" presetID="10" presetClass="entr" presetSubtype="0" fill="hold" grpId="0" nodeType="clickEffect">
+                                  <p:stCondLst>
+                                    <p:cond delay="0"/>
+                                  </p:stCondLst>
+                                  <p:childTnLst>
+                                    <p:set>
+                                      <p:cBhvr>
+                                        <p:cTn id="33" dur="1" fill="hold">
+                                          <p:stCondLst>
+                                            <p:cond delay="0"/>
+                                          </p:stCondLst>
+                                        </p:cTn>
+                                        <p:tgtEl>
+                                          <p:spTgt spid="24"/>
+                                        </p:tgtEl>
+                                        <p:attrNameLst>
+                                          <p:attrName>style.visibility</p:attrName>
+                                        </p:attrNameLst>
+                                      </p:cBhvr>
+                                      <p:to>
+                                        <p:strVal val="visible"/>
+                                      </p:to>
+                                    </p:set>
+                                    <p:animEffect transition="in" filter="fade">
+                                      <p:cBhvr>
+                                        <p:cTn id="34" dur="500"/>
+                                        <p:tgtEl>
+                                          <p:spTgt spid="24"/>
+                                        </p:tgtEl>
+                                      </p:cBhvr>
+                                    </p:animEffect>
+                                  </p:childTnLst>
+                                </p:cTn>
+                              </p:par>
+                            </p:childTnLst>
+                          </p:cTn>
+                        </p:par>
+                      </p:childTnLst>
+                    </p:cTn>
+                  </p:par>
+                  <p:par>
+                    <p:cTn id="35" fill="hold">
+                      <p:stCondLst>
+                        <p:cond delay="indefinite"/>
+                      </p:stCondLst>
+                      <p:childTnLst>
+                        <p:par>
+                          <p:cTn id="36" fill="hold">
+                            <p:stCondLst>
+                              <p:cond delay="0"/>
+                            </p:stCondLst>
+                            <p:childTnLst>
+                              <p:par>
+                                <p:cTn id="37" presetID="10" presetClass="entr" presetSubtype="0" fill="hold" grpId="0" nodeType="clickEffect">
+                                  <p:stCondLst>
+                                    <p:cond delay="0"/>
+                                  </p:stCondLst>
+                                  <p:childTnLst>
+                                    <p:set>
+                                      <p:cBhvr>
+                                        <p:cTn id="38" dur="1" fill="hold">
+                                          <p:stCondLst>
+                                            <p:cond delay="0"/>
+                                          </p:stCondLst>
+                                        </p:cTn>
+                                        <p:tgtEl>
+                                          <p:spTgt spid="29"/>
+                                        </p:tgtEl>
+                                        <p:attrNameLst>
+                                          <p:attrName>style.visibility</p:attrName>
+                                        </p:attrNameLst>
+                                      </p:cBhvr>
+                                      <p:to>
+                                        <p:strVal val="visible"/>
+                                      </p:to>
+                                    </p:set>
+                                    <p:animEffect transition="in" filter="fade">
+                                      <p:cBhvr>
+                                        <p:cTn id="39" dur="500"/>
+                                        <p:tgtEl>
+                                          <p:spTgt spid="29"/>
+                                        </p:tgtEl>
+                                      </p:cBhvr>
+                                    </p:animEffect>
+                                  </p:childTnLst>
+                                </p:cTn>
+                              </p:par>
+                            </p:childTnLst>
+                          </p:cTn>
+                        </p:par>
+                      </p:childTnLst>
+                    </p:cTn>
+                  </p:par>
+                  <p:par>
+                    <p:cTn id="40" fill="hold">
+                      <p:stCondLst>
+                        <p:cond delay="indefinite"/>
+                      </p:stCondLst>
+                      <p:childTnLst>
+                        <p:par>
+                          <p:cTn id="41" fill="hold">
+                            <p:stCondLst>
+                              <p:cond delay="0"/>
+                            </p:stCondLst>
+                            <p:childTnLst>
+                              <p:par>
+                                <p:cTn id="42" presetID="10" presetClass="entr" presetSubtype="0" fill="hold" grpId="0" nodeType="clickEffect">
+                                  <p:stCondLst>
+                                    <p:cond delay="0"/>
+                                  </p:stCondLst>
+                                  <p:childTnLst>
+                                    <p:set>
+                                      <p:cBhvr>
+                                        <p:cTn id="43" dur="1" fill="hold">
+                                          <p:stCondLst>
+                                            <p:cond delay="0"/>
+                                          </p:stCondLst>
+                                        </p:cTn>
+                                        <p:tgtEl>
+                                          <p:spTgt spid="30"/>
+                                        </p:tgtEl>
+                                        <p:attrNameLst>
+                                          <p:attrName>style.visibility</p:attrName>
+                                        </p:attrNameLst>
+                                      </p:cBhvr>
+                                      <p:to>
+                                        <p:strVal val="visible"/>
+                                      </p:to>
+                                    </p:set>
+                                    <p:animEffect transition="in" filter="fade">
+                                      <p:cBhvr>
+                                        <p:cTn id="44" dur="500"/>
+                                        <p:tgtEl>
+                                          <p:spTgt spid="30"/>
+                                        </p:tgtEl>
+                                      </p:cBhvr>
+                                    </p:animEffect>
+                                  </p:childTnLst>
+                                </p:cTn>
+                              </p:par>
+                            </p:childTnLst>
+                          </p:cTn>
+                        </p:par>
+                      </p:childTnLst>
+                    </p:cTn>
+                  </p:par>
+                  <p:par>
+                    <p:cTn id="45" fill="hold">
+                      <p:stCondLst>
+                        <p:cond delay="indefinite"/>
+                      </p:stCondLst>
+                      <p:childTnLst>
+                        <p:par>
+                          <p:cTn id="46" fill="hold">
+                            <p:stCondLst>
+                              <p:cond delay="0"/>
+                            </p:stCondLst>
+                            <p:childTnLst>
+                              <p:par>
+                                <p:cTn id="47" presetID="10" presetClass="entr" presetSubtype="0" fill="hold" grpId="0" nodeType="clickEffect">
+                                  <p:stCondLst>
+                                    <p:cond delay="0"/>
+                                  </p:stCondLst>
+                                  <p:childTnLst>
+                                    <p:set>
+                                      <p:cBhvr>
+                                        <p:cTn id="48" dur="1" fill="hold">
+                                          <p:stCondLst>
+                                            <p:cond delay="0"/>
+                                          </p:stCondLst>
+                                        </p:cTn>
+                                        <p:tgtEl>
+                                          <p:spTgt spid="33"/>
+                                        </p:tgtEl>
+                                        <p:attrNameLst>
+                                          <p:attrName>style.visibility</p:attrName>
+                                        </p:attrNameLst>
+                                      </p:cBhvr>
+                                      <p:to>
+                                        <p:strVal val="visible"/>
+                                      </p:to>
+                                    </p:set>
+                                    <p:animEffect transition="in" filter="fade">
+                                      <p:cBhvr>
+                                        <p:cTn id="49" dur="500"/>
+                                        <p:tgtEl>
+                                          <p:spTgt spid="33"/>
+                                        </p:tgtEl>
+                                      </p:cBhvr>
+                                    </p:animEffect>
+                                  </p:childTnLst>
+                                </p:cTn>
+                              </p:par>
+                            </p:childTnLst>
+                          </p:cTn>
+                        </p:par>
+                      </p:childTnLst>
+                    </p:cTn>
+                  </p:par>
+                  <p:par>
+                    <p:cTn id="50" fill="hold">
+                      <p:stCondLst>
+                        <p:cond delay="indefinite"/>
+                      </p:stCondLst>
+                      <p:childTnLst>
+                        <p:par>
+                          <p:cTn id="51" fill="hold">
+                            <p:stCondLst>
+                              <p:cond delay="0"/>
+                            </p:stCondLst>
+                            <p:childTnLst>
+                              <p:par>
+                                <p:cTn id="52" presetID="10" presetClass="entr" presetSubtype="0" fill="hold" grpId="0" nodeType="clickEffect">
+                                  <p:stCondLst>
+                                    <p:cond delay="0"/>
+                                  </p:stCondLst>
+                                  <p:childTnLst>
+                                    <p:set>
+                                      <p:cBhvr>
+                                        <p:cTn id="53" dur="1" fill="hold">
+                                          <p:stCondLst>
+                                            <p:cond delay="0"/>
+                                          </p:stCondLst>
+                                        </p:cTn>
+                                        <p:tgtEl>
+                                          <p:spTgt spid="34"/>
+                                        </p:tgtEl>
+                                        <p:attrNameLst>
+                                          <p:attrName>style.visibility</p:attrName>
+                                        </p:attrNameLst>
+                                      </p:cBhvr>
+                                      <p:to>
+                                        <p:strVal val="visible"/>
+                                      </p:to>
+                                    </p:set>
+                                    <p:animEffect transition="in" filter="fade">
+                                      <p:cBhvr>
+                                        <p:cTn id="54" dur="500"/>
+                                        <p:tgtEl>
+                                          <p:spTgt spid="34"/>
+                                        </p:tgtEl>
+                                      </p:cBhvr>
+                                    </p:animEffect>
+                                  </p:childTnLst>
+                                </p:cTn>
+                              </p:par>
+                            </p:childTnLst>
+                          </p:cTn>
+                        </p:par>
+                      </p:childTnLst>
+                    </p:cTn>
+                  </p:par>
+                  <p:par>
+                    <p:cTn id="55" fill="hold">
+                      <p:stCondLst>
+                        <p:cond delay="indefinite"/>
+                      </p:stCondLst>
+                      <p:childTnLst>
+                        <p:par>
+                          <p:cTn id="56" fill="hold">
+                            <p:stCondLst>
+                              <p:cond delay="0"/>
+                            </p:stCondLst>
+                            <p:childTnLst>
+                              <p:par>
+                                <p:cTn id="57" presetID="10" presetClass="entr" presetSubtype="0" fill="hold" grpId="0" nodeType="clickEffect">
+                                  <p:stCondLst>
+                                    <p:cond delay="0"/>
+                                  </p:stCondLst>
+                                  <p:childTnLst>
+                                    <p:set>
+                                      <p:cBhvr>
+                                        <p:cTn id="58" dur="1" fill="hold">
+                                          <p:stCondLst>
+                                            <p:cond delay="0"/>
+                                          </p:stCondLst>
+                                        </p:cTn>
+                                        <p:tgtEl>
+                                          <p:spTgt spid="37"/>
+                                        </p:tgtEl>
+                                        <p:attrNameLst>
+                                          <p:attrName>style.visibility</p:attrName>
+                                        </p:attrNameLst>
+                                      </p:cBhvr>
+                                      <p:to>
+                                        <p:strVal val="visible"/>
+                                      </p:to>
+                                    </p:set>
+                                    <p:animEffect transition="in" filter="fade">
+                                      <p:cBhvr>
+                                        <p:cTn id="59" dur="500"/>
+                                        <p:tgtEl>
+                                          <p:spTgt spid="37"/>
+                                        </p:tgtEl>
+                                      </p:cBhvr>
+                                    </p:animEffect>
+                                  </p:childTnLst>
+                                </p:cTn>
+                              </p:par>
+                            </p:childTnLst>
+                          </p:cTn>
+                        </p:par>
+                      </p:childTnLst>
+                    </p:cTn>
+                  </p:par>
+                  <p:par>
+                    <p:cTn id="60" fill="hold">
+                      <p:stCondLst>
+                        <p:cond delay="indefinite"/>
+                      </p:stCondLst>
+                      <p:childTnLst>
+                        <p:par>
+                          <p:cTn id="61" fill="hold">
+                            <p:stCondLst>
+                              <p:cond delay="0"/>
+                            </p:stCondLst>
+                            <p:childTnLst>
+                              <p:par>
+                                <p:cTn id="62" presetID="10" presetClass="entr" presetSubtype="0" fill="hold" grpId="0" nodeType="clickEffect">
+                                  <p:stCondLst>
+                                    <p:cond delay="0"/>
+                                  </p:stCondLst>
+                                  <p:childTnLst>
+                                    <p:set>
+                                      <p:cBhvr>
+                                        <p:cTn id="63" dur="1" fill="hold">
+                                          <p:stCondLst>
+                                            <p:cond delay="0"/>
+                                          </p:stCondLst>
+                                        </p:cTn>
+                                        <p:tgtEl>
+                                          <p:spTgt spid="38"/>
+                                        </p:tgtEl>
+                                        <p:attrNameLst>
+                                          <p:attrName>style.visibility</p:attrName>
+                                        </p:attrNameLst>
+                                      </p:cBhvr>
+                                      <p:to>
+                                        <p:strVal val="visible"/>
+                                      </p:to>
+                                    </p:set>
+                                    <p:animEffect transition="in" filter="fade">
+                                      <p:cBhvr>
+                                        <p:cTn id="64" dur="500"/>
+                                        <p:tgtEl>
+                                          <p:spTgt spid="38"/>
+                                        </p:tgtEl>
+                                      </p:cBhvr>
+                                    </p:animEffect>
+                                  </p:childTnLst>
+                                </p:cTn>
+                              </p:par>
+                            </p:childTnLst>
+                          </p:cTn>
+                        </p:par>
+                      </p:childTnLst>
+                    </p:cTn>
+                  </p:par>
+                  <p:par>
+                    <p:cTn id="65" fill="hold">
+                      <p:stCondLst>
+                        <p:cond delay="indefinite"/>
+                      </p:stCondLst>
+                      <p:childTnLst>
+                        <p:par>
+                          <p:cTn id="66" fill="hold">
+                            <p:stCondLst>
+                              <p:cond delay="0"/>
+                            </p:stCondLst>
+                            <p:childTnLst>
+                              <p:par>
+                                <p:cTn id="67" presetID="10" presetClass="entr" presetSubtype="0" fill="hold" grpId="0" nodeType="clickEffect">
+                                  <p:stCondLst>
+                                    <p:cond delay="0"/>
+                                  </p:stCondLst>
+                                  <p:childTnLst>
+                                    <p:set>
+                                      <p:cBhvr>
+                                        <p:cTn id="68" dur="1" fill="hold">
+                                          <p:stCondLst>
+                                            <p:cond delay="0"/>
+                                          </p:stCondLst>
+                                        </p:cTn>
+                                        <p:tgtEl>
+                                          <p:spTgt spid="43"/>
+                                        </p:tgtEl>
+                                        <p:attrNameLst>
+                                          <p:attrName>style.visibility</p:attrName>
+                                        </p:attrNameLst>
+                                      </p:cBhvr>
+                                      <p:to>
+                                        <p:strVal val="visible"/>
+                                      </p:to>
+                                    </p:set>
+                                    <p:animEffect transition="in" filter="fade">
+                                      <p:cBhvr>
+                                        <p:cTn id="69" dur="500"/>
+                                        <p:tgtEl>
+                                          <p:spTgt spid="43"/>
+                                        </p:tgtEl>
+                                      </p:cBhvr>
+                                    </p:animEffect>
+                                  </p:childTnLst>
+                                </p:cTn>
+                              </p:par>
+                            </p:childTnLst>
+                          </p:cTn>
+                        </p:par>
+                      </p:childTnLst>
+                    </p:cTn>
+                  </p:par>
+                  <p:par>
+                    <p:cTn id="70" fill="hold">
+                      <p:stCondLst>
+                        <p:cond delay="indefinite"/>
+                      </p:stCondLst>
+                      <p:childTnLst>
+                        <p:par>
+                          <p:cTn id="71" fill="hold">
+                            <p:stCondLst>
+                              <p:cond delay="0"/>
+                            </p:stCondLst>
+                            <p:childTnLst>
+                              <p:par>
+                                <p:cTn id="72" presetID="10" presetClass="entr" presetSubtype="0" fill="hold" grpId="0" nodeType="clickEffect">
+                                  <p:stCondLst>
+                                    <p:cond delay="0"/>
+                                  </p:stCondLst>
+                                  <p:childTnLst>
+                                    <p:set>
+                                      <p:cBhvr>
+                                        <p:cTn id="73" dur="1" fill="hold">
+                                          <p:stCondLst>
+                                            <p:cond delay="0"/>
+                                          </p:stCondLst>
+                                        </p:cTn>
+                                        <p:tgtEl>
+                                          <p:spTgt spid="44"/>
+                                        </p:tgtEl>
+                                        <p:attrNameLst>
+                                          <p:attrName>style.visibility</p:attrName>
+                                        </p:attrNameLst>
+                                      </p:cBhvr>
+                                      <p:to>
+                                        <p:strVal val="visible"/>
+                                      </p:to>
+                                    </p:set>
+                                    <p:animEffect transition="in" filter="fade">
+                                      <p:cBhvr>
+                                        <p:cTn id="74" dur="500"/>
+                                        <p:tgtEl>
+                                          <p:spTgt spid="44"/>
+                                        </p:tgtEl>
+                                      </p:cBhvr>
+                                    </p:animEffect>
+                                  </p:childTnLst>
+                                </p:cTn>
+                              </p:par>
+                            </p:childTnLst>
+                          </p:cTn>
+                        </p:par>
+                      </p:childTnLst>
+                    </p:cTn>
+                  </p:par>
+                  <p:par>
+                    <p:cTn id="75" fill="hold">
+                      <p:stCondLst>
+                        <p:cond delay="indefinite"/>
+                      </p:stCondLst>
+                      <p:childTnLst>
+                        <p:par>
+                          <p:cTn id="76" fill="hold">
+                            <p:stCondLst>
+                              <p:cond delay="0"/>
+                            </p:stCondLst>
+                            <p:childTnLst>
+                              <p:par>
+                                <p:cTn id="77" presetID="10" presetClass="entr" presetSubtype="0" fill="hold" grpId="0" nodeType="clickEffect">
+                                  <p:stCondLst>
+                                    <p:cond delay="0"/>
+                                  </p:stCondLst>
+                                  <p:childTnLst>
+                                    <p:set>
+                                      <p:cBhvr>
+                                        <p:cTn id="78" dur="1" fill="hold">
+                                          <p:stCondLst>
+                                            <p:cond delay="0"/>
+                                          </p:stCondLst>
+                                        </p:cTn>
+                                        <p:tgtEl>
+                                          <p:spTgt spid="47"/>
+                                        </p:tgtEl>
+                                        <p:attrNameLst>
+                                          <p:attrName>style.visibility</p:attrName>
+                                        </p:attrNameLst>
+                                      </p:cBhvr>
+                                      <p:to>
+                                        <p:strVal val="visible"/>
+                                      </p:to>
+                                    </p:set>
+                                    <p:animEffect transition="in" filter="fade">
+                                      <p:cBhvr>
+                                        <p:cTn id="79" dur="500"/>
+                                        <p:tgtEl>
+                                          <p:spTgt spid="47"/>
+                                        </p:tgtEl>
+                                      </p:cBhvr>
+                                    </p:animEffect>
+                                  </p:childTnLst>
+                                </p:cTn>
+                              </p:par>
+                            </p:childTnLst>
+                          </p:cTn>
+                        </p:par>
+                      </p:childTnLst>
+                    </p:cTn>
+                  </p:par>
+                  <p:par>
+                    <p:cTn id="80" fill="hold">
+                      <p:stCondLst>
+                        <p:cond delay="indefinite"/>
+                      </p:stCondLst>
+                      <p:childTnLst>
+                        <p:par>
+                          <p:cTn id="81" fill="hold">
+                            <p:stCondLst>
+                              <p:cond delay="0"/>
+                            </p:stCondLst>
+                            <p:childTnLst>
+                              <p:par>
+                                <p:cTn id="82" presetID="10" presetClass="entr" presetSubtype="0" fill="hold" grpId="0" nodeType="clickEffect">
+                                  <p:stCondLst>
+                                    <p:cond delay="0"/>
+                                  </p:stCondLst>
+                                  <p:childTnLst>
+                                    <p:set>
+                                      <p:cBhvr>
+                                        <p:cTn id="83" dur="1" fill="hold">
+                                          <p:stCondLst>
+                                            <p:cond delay="0"/>
+                                          </p:stCondLst>
+                                        </p:cTn>
+                                        <p:tgtEl>
+                                          <p:spTgt spid="48"/>
+                                        </p:tgtEl>
+                                        <p:attrNameLst>
+                                          <p:attrName>style.visibility</p:attrName>
+                                        </p:attrNameLst>
+                                      </p:cBhvr>
+                                      <p:to>
+                                        <p:strVal val="visible"/>
+                                      </p:to>
+                                    </p:set>
+                                    <p:animEffect transition="in" filter="fade">
+                                      <p:cBhvr>
+                                        <p:cTn id="84" dur="500"/>
+                                        <p:tgtEl>
+                                          <p:spTgt spid="48"/>
+                                        </p:tgtEl>
+                                      </p:cBhvr>
+                                    </p:animEffect>
+                                  </p:childTnLst>
+                                </p:cTn>
+                              </p:par>
+                            </p:childTnLst>
+                          </p:cTn>
+                        </p:par>
+                      </p:childTnLst>
+                    </p:cTn>
+                  </p:par>
+                  <p:par>
+                    <p:cTn id="85" fill="hold">
+                      <p:stCondLst>
+                        <p:cond delay="indefinite"/>
+                      </p:stCondLst>
+                      <p:childTnLst>
+                        <p:par>
+                          <p:cTn id="86" fill="hold">
+                            <p:stCondLst>
+                              <p:cond delay="0"/>
+                            </p:stCondLst>
+                            <p:childTnLst>
+                              <p:par>
+                                <p:cTn id="87" presetID="10" presetClass="entr" presetSubtype="0" fill="hold" grpId="0" nodeType="clickEffect">
+                                  <p:stCondLst>
+                                    <p:cond delay="0"/>
+                                  </p:stCondLst>
+                                  <p:childTnLst>
+                                    <p:set>
+                                      <p:cBhvr>
+                                        <p:cTn id="88" dur="1" fill="hold">
+                                          <p:stCondLst>
+                                            <p:cond delay="0"/>
+                                          </p:stCondLst>
+                                        </p:cTn>
+                                        <p:tgtEl>
+                                          <p:spTgt spid="51"/>
+                                        </p:tgtEl>
+                                        <p:attrNameLst>
+                                          <p:attrName>style.visibility</p:attrName>
+                                        </p:attrNameLst>
+                                      </p:cBhvr>
+                                      <p:to>
+                                        <p:strVal val="visible"/>
+                                      </p:to>
+                                    </p:set>
+                                    <p:animEffect transition="in" filter="fade">
+                                      <p:cBhvr>
+                                        <p:cTn id="89" dur="500"/>
+                                        <p:tgtEl>
+                                          <p:spTgt spid="51"/>
+                                        </p:tgtEl>
+                                      </p:cBhvr>
+                                    </p:animEffect>
+                                  </p:childTnLst>
+                                </p:cTn>
+                              </p:par>
+                            </p:childTnLst>
+                          </p:cTn>
+                        </p:par>
+                      </p:childTnLst>
+                    </p:cTn>
+                  </p:par>
+                  <p:par>
+                    <p:cTn id="90" fill="hold">
+                      <p:stCondLst>
+                        <p:cond delay="indefinite"/>
+                      </p:stCondLst>
+                      <p:childTnLst>
+                        <p:par>
+                          <p:cTn id="91" fill="hold">
+                            <p:stCondLst>
+                              <p:cond delay="0"/>
+                            </p:stCondLst>
+                            <p:childTnLst>
+                              <p:par>
+                                <p:cTn id="92" presetID="10" presetClass="entr" presetSubtype="0" fill="hold" grpId="0" nodeType="clickEffect">
+                                  <p:stCondLst>
+                                    <p:cond delay="0"/>
+                                  </p:stCondLst>
+                                  <p:childTnLst>
+                                    <p:set>
+                                      <p:cBhvr>
+                                        <p:cTn id="93" dur="1" fill="hold">
+                                          <p:stCondLst>
+                                            <p:cond delay="0"/>
+                                          </p:stCondLst>
+                                        </p:cTn>
+                                        <p:tgtEl>
+                                          <p:spTgt spid="52"/>
+                                        </p:tgtEl>
+                                        <p:attrNameLst>
+                                          <p:attrName>style.visibility</p:attrName>
+                                        </p:attrNameLst>
+                                      </p:cBhvr>
+                                      <p:to>
+                                        <p:strVal val="visible"/>
+                                      </p:to>
+                                    </p:set>
+                                    <p:animEffect transition="in" filter="fade">
+                                      <p:cBhvr>
+                                        <p:cTn id="94" dur="500"/>
+                                        <p:tgtEl>
+                                          <p:spTgt spid="52"/>
+                                        </p:tgtEl>
+                                      </p:cBhvr>
+                                    </p:animEffect>
+                                  </p:childTnLst>
+                                </p:cTn>
+                              </p:par>
+                            </p:childTnLst>
+                          </p:cTn>
+                        </p:par>
+                      </p:childTnLst>
+                    </p:cTn>
+                  </p:par>
+                </p:childTnLst>
+              </p:cTn>
+              <p:prevCondLst>
+                <p:cond evt="onPrev" delay="0">
+                  <p:tgtEl>
+                    <p:sldTgt/>
+                  </p:tgtEl>
+                </p:cond>
+              </p:prevCondLst>
+              <p:nextCondLst>
+                <p:cond evt="onNext" delay="0">
+                  <p:tgtEl>
+                    <p:sldTgt/>
+                  </p:tgtEl>
+                </p:cond>
+              </p:nextCondLst>
+            </p:seq>
+          </p:childTnLst>
+        </p:cTn>
+      </p:par>
+    </p:tnLst>
+  </p:timing>
 </p:sld>
 </file>
 
